--- a/assets/ppt/intro/in1-evangelize-compilers.pptx
+++ b/assets/ppt/intro/in1-evangelize-compilers.pptx
@@ -5,29 +5,31 @@
     <p:sldMasterId id="2147483700" r:id="rId1"/>
   </p:sldMasterIdLst>
   <p:notesMasterIdLst>
-    <p:notesMasterId r:id="rId22"/>
+    <p:notesMasterId r:id="rId24"/>
   </p:notesMasterIdLst>
   <p:sldIdLst>
     <p:sldId id="277" r:id="rId2"/>
-    <p:sldId id="257" r:id="rId3"/>
-    <p:sldId id="278" r:id="rId4"/>
-    <p:sldId id="279" r:id="rId5"/>
-    <p:sldId id="280" r:id="rId6"/>
-    <p:sldId id="294" r:id="rId7"/>
-    <p:sldId id="282" r:id="rId8"/>
-    <p:sldId id="283" r:id="rId9"/>
-    <p:sldId id="284" r:id="rId10"/>
-    <p:sldId id="285" r:id="rId11"/>
-    <p:sldId id="286" r:id="rId12"/>
-    <p:sldId id="290" r:id="rId13"/>
-    <p:sldId id="291" r:id="rId14"/>
-    <p:sldId id="293" r:id="rId15"/>
-    <p:sldId id="287" r:id="rId16"/>
-    <p:sldId id="288" r:id="rId17"/>
-    <p:sldId id="289" r:id="rId18"/>
-    <p:sldId id="273" r:id="rId19"/>
-    <p:sldId id="274" r:id="rId20"/>
-    <p:sldId id="292" r:id="rId21"/>
+    <p:sldId id="295" r:id="rId3"/>
+    <p:sldId id="296" r:id="rId4"/>
+    <p:sldId id="257" r:id="rId5"/>
+    <p:sldId id="278" r:id="rId6"/>
+    <p:sldId id="279" r:id="rId7"/>
+    <p:sldId id="280" r:id="rId8"/>
+    <p:sldId id="294" r:id="rId9"/>
+    <p:sldId id="282" r:id="rId10"/>
+    <p:sldId id="283" r:id="rId11"/>
+    <p:sldId id="284" r:id="rId12"/>
+    <p:sldId id="285" r:id="rId13"/>
+    <p:sldId id="286" r:id="rId14"/>
+    <p:sldId id="290" r:id="rId15"/>
+    <p:sldId id="291" r:id="rId16"/>
+    <p:sldId id="293" r:id="rId17"/>
+    <p:sldId id="287" r:id="rId18"/>
+    <p:sldId id="288" r:id="rId19"/>
+    <p:sldId id="289" r:id="rId20"/>
+    <p:sldId id="273" r:id="rId21"/>
+    <p:sldId id="274" r:id="rId22"/>
+    <p:sldId id="292" r:id="rId23"/>
   </p:sldIdLst>
   <p:sldSz cx="9144000" cy="5143500" type="screen16x9"/>
   <p:notesSz cx="6858000" cy="9144000"/>
@@ -1593,7 +1595,7 @@
           <a:p>
             <a:fld id="{031950AD-E443-1743-A459-21F1AAF6F81A}" type="datetime1">
               <a:rPr lang="en-CA" smtClean="0"/>
-              <a:t>2021-09-26</a:t>
+              <a:t>2025-05-12</a:t>
             </a:fld>
             <a:endParaRPr lang="en-US"/>
           </a:p>
@@ -1791,7 +1793,7 @@
           <a:p>
             <a:fld id="{06378DE7-32B7-DE46-BFEF-C88F96B6CB46}" type="datetime1">
               <a:rPr lang="en-CA" smtClean="0"/>
-              <a:t>2021-09-26</a:t>
+              <a:t>2025-05-12</a:t>
             </a:fld>
             <a:endParaRPr lang="en-US"/>
           </a:p>
@@ -1999,7 +2001,7 @@
           <a:p>
             <a:fld id="{E9DA3F3E-97D7-E44B-928F-428312F41925}" type="datetime1">
               <a:rPr lang="en-CA" smtClean="0"/>
-              <a:t>2021-09-26</a:t>
+              <a:t>2025-05-12</a:t>
             </a:fld>
             <a:endParaRPr lang="en-US"/>
           </a:p>
@@ -2349,7 +2351,7 @@
           <a:p>
             <a:fld id="{B8239F57-6224-5A48-B5A0-8B41CBC82DE5}" type="datetime1">
               <a:rPr lang="en-CA" smtClean="0"/>
-              <a:t>2021-09-26</a:t>
+              <a:t>2025-05-12</a:t>
             </a:fld>
             <a:endParaRPr lang="en-US"/>
           </a:p>
@@ -2624,7 +2626,7 @@
           <a:p>
             <a:fld id="{82B3F797-7154-BC4F-9D0E-5EAD5AEED6D6}" type="datetime1">
               <a:rPr lang="en-CA" smtClean="0"/>
-              <a:t>2021-09-26</a:t>
+              <a:t>2025-05-12</a:t>
             </a:fld>
             <a:endParaRPr lang="en-US"/>
           </a:p>
@@ -2889,7 +2891,7 @@
           <a:p>
             <a:fld id="{3097AE3F-C575-B946-9624-8F064FF29641}" type="datetime1">
               <a:rPr lang="en-CA" smtClean="0"/>
-              <a:t>2021-09-26</a:t>
+              <a:t>2025-05-12</a:t>
             </a:fld>
             <a:endParaRPr lang="en-US"/>
           </a:p>
@@ -3301,7 +3303,7 @@
           <a:p>
             <a:fld id="{FCF57352-CE81-D949-8615-D94A6D43C5AB}" type="datetime1">
               <a:rPr lang="en-CA" smtClean="0"/>
-              <a:t>2021-09-26</a:t>
+              <a:t>2025-05-12</a:t>
             </a:fld>
             <a:endParaRPr lang="en-US"/>
           </a:p>
@@ -3442,7 +3444,7 @@
           <a:p>
             <a:fld id="{5644584D-0879-4C43-9A33-9262212C8909}" type="datetime1">
               <a:rPr lang="en-CA" smtClean="0"/>
-              <a:t>2021-09-26</a:t>
+              <a:t>2025-05-12</a:t>
             </a:fld>
             <a:endParaRPr lang="en-US"/>
           </a:p>
@@ -3555,7 +3557,7 @@
           <a:p>
             <a:fld id="{1EF55C8E-3F84-9742-9F0E-FF66F4EE05BA}" type="datetime1">
               <a:rPr lang="en-CA" smtClean="0"/>
-              <a:t>2021-09-26</a:t>
+              <a:t>2025-05-12</a:t>
             </a:fld>
             <a:endParaRPr lang="en-US"/>
           </a:p>
@@ -3866,7 +3868,7 @@
           <a:p>
             <a:fld id="{9F487085-DD22-E94F-A745-BA3BAACACBF9}" type="datetime1">
               <a:rPr lang="en-CA" smtClean="0"/>
-              <a:t>2021-09-26</a:t>
+              <a:t>2025-05-12</a:t>
             </a:fld>
             <a:endParaRPr lang="en-US"/>
           </a:p>
@@ -4154,7 +4156,7 @@
           <a:p>
             <a:fld id="{DF553C96-34AC-1447-87E6-A53840AE668C}" type="datetime1">
               <a:rPr lang="en-CA" smtClean="0"/>
-              <a:t>2021-09-26</a:t>
+              <a:t>2025-05-12</a:t>
             </a:fld>
             <a:endParaRPr lang="en-US"/>
           </a:p>
@@ -4395,7 +4397,7 @@
           <a:p>
             <a:fld id="{478D0DE7-FBBE-9D43-9800-3DF9B4EF63B2}" type="datetime1">
               <a:rPr lang="en-CA" smtClean="0"/>
-              <a:t>2021-09-26</a:t>
+              <a:t>2025-05-12</a:t>
             </a:fld>
             <a:endParaRPr lang="en-US"/>
           </a:p>
@@ -5070,1528 +5072,128 @@
       </p:grpSpPr>
       <p:sp>
         <p:nvSpPr>
-          <p:cNvPr id="3" name="TextBox 2">
+          <p:cNvPr id="2" name="Title 1">
             <a:extLst>
               <a:ext uri="{FF2B5EF4-FFF2-40B4-BE49-F238E27FC236}">
-                <a16:creationId xmlns:a16="http://schemas.microsoft.com/office/drawing/2014/main" id="{C231BD23-3C23-8249-9F67-F9D87F408314}"/>
+                <a16:creationId xmlns:a16="http://schemas.microsoft.com/office/drawing/2014/main" id="{E631FF38-765E-994D-819C-EB74771BC79E}"/>
               </a:ext>
             </a:extLst>
           </p:cNvPr>
-          <p:cNvSpPr txBox="1"/>
-          <p:nvPr/>
+          <p:cNvSpPr>
+            <a:spLocks noGrp="1"/>
+          </p:cNvSpPr>
+          <p:nvPr>
+            <p:ph type="title"/>
+          </p:nvPr>
+        </p:nvSpPr>
+        <p:spPr/>
+        <p:txBody>
+          <a:bodyPr>
+            <a:normAutofit/>
+          </a:bodyPr>
+          <a:lstStyle/>
+          <a:p>
+            <a:r>
+              <a:rPr lang="en-US" dirty="0"/>
+              <a:t>Rich Programmer Food (Steve </a:t>
+            </a:r>
+            <a:r>
+              <a:rPr lang="en-US" dirty="0" err="1"/>
+              <a:t>Yegge</a:t>
+            </a:r>
+            <a:r>
+              <a:rPr lang="en-US" dirty="0"/>
+              <a:t>)</a:t>
+            </a:r>
+          </a:p>
+        </p:txBody>
+      </p:sp>
+      <p:sp>
+        <p:nvSpPr>
+          <p:cNvPr id="3" name="Text Placeholder 2">
+            <a:extLst>
+              <a:ext uri="{FF2B5EF4-FFF2-40B4-BE49-F238E27FC236}">
+                <a16:creationId xmlns:a16="http://schemas.microsoft.com/office/drawing/2014/main" id="{48DA3C79-6656-CF45-8DF5-CF03A8EB0A42}"/>
+              </a:ext>
+            </a:extLst>
+          </p:cNvPr>
+          <p:cNvSpPr>
+            <a:spLocks noGrp="1"/>
+          </p:cNvSpPr>
+          <p:nvPr>
+            <p:ph idx="1"/>
+          </p:nvPr>
         </p:nvSpPr>
         <p:spPr>
           <a:xfrm>
-            <a:off x="709404" y="150998"/>
-            <a:ext cx="6955750" cy="4708981"/>
+            <a:off x="457200" y="1200150"/>
+            <a:ext cx="8229600" cy="3567113"/>
           </a:xfrm>
-          <a:prstGeom prst="rect">
-            <a:avLst/>
-          </a:prstGeom>
-          <a:noFill/>
         </p:spPr>
         <p:txBody>
-          <a:bodyPr wrap="none" rtlCol="0">
-            <a:spAutoFit/>
+          <a:bodyPr>
+            <a:normAutofit/>
           </a:bodyPr>
           <a:lstStyle/>
           <a:p>
             <a:r>
-              <a:rPr lang="en-US" sz="2000" dirty="0">
-                <a:solidFill>
-                  <a:srgbClr val="B00040"/>
-                </a:solidFill>
-                <a:latin typeface="Courier" pitchFamily="2" charset="0"/>
-              </a:rPr>
-              <a:t>void</a:t>
-            </a:r>
-            <a:r>
-              <a:rPr lang="en-US" sz="2000" dirty="0">
-                <a:solidFill>
-                  <a:prstClr val="black"/>
-                </a:solidFill>
-                <a:latin typeface="Courier" pitchFamily="2" charset="0"/>
-              </a:rPr>
+              <a:rPr lang="en-US" dirty="0"/>
               <a:t> </a:t>
             </a:r>
             <a:r>
-              <a:rPr lang="en-US" sz="2000" dirty="0">
-                <a:solidFill>
-                  <a:srgbClr val="0000FF"/>
-                </a:solidFill>
-                <a:latin typeface="Courier" pitchFamily="2" charset="0"/>
-              </a:rPr>
-              <a:t>send2</a:t>
-            </a:r>
-            <a:r>
-              <a:rPr lang="en-US" sz="2000" dirty="0">
-                <a:solidFill>
-                  <a:prstClr val="black"/>
-                </a:solidFill>
-                <a:latin typeface="Courier" pitchFamily="2" charset="0"/>
-              </a:rPr>
-              <a:t> (</a:t>
-            </a:r>
-            <a:r>
-              <a:rPr lang="en-US" sz="2000" dirty="0">
-                <a:solidFill>
-                  <a:srgbClr val="B00040"/>
-                </a:solidFill>
-                <a:latin typeface="Courier" pitchFamily="2" charset="0"/>
-              </a:rPr>
-              <a:t>char</a:t>
-            </a:r>
-            <a:r>
-              <a:rPr lang="en-US" sz="2000" dirty="0">
-                <a:solidFill>
-                  <a:prstClr val="black"/>
-                </a:solidFill>
-                <a:latin typeface="Courier" pitchFamily="2" charset="0"/>
-              </a:rPr>
+              <a:rPr lang="en-US" dirty="0">
+                <a:solidFill>
+                  <a:schemeClr val="accent1"/>
+                </a:solidFill>
+              </a:rPr>
+              <a:t>Situation 6</a:t>
+            </a:r>
+            <a:r>
+              <a:rPr lang="en-US" dirty="0"/>
+              <a:t>: The “software engineers” at your company have decided to redesign the entire code base to make it easier to add to the codebase. You have to write them a tool to ensure code maintenance does not get worse</a:t>
+            </a:r>
+            <a:r>
+              <a:rPr lang="en-CA" dirty="0"/>
+              <a:t>.</a:t>
+            </a:r>
+            <a:endParaRPr lang="en-US" dirty="0"/>
+          </a:p>
+          <a:p>
+            <a:r>
+              <a:rPr lang="en-US" dirty="0"/>
               <a:t> </a:t>
             </a:r>
             <a:r>
-              <a:rPr lang="en-US" sz="2000" dirty="0">
-                <a:solidFill>
-                  <a:srgbClr val="666666"/>
-                </a:solidFill>
-                <a:latin typeface="Courier" pitchFamily="2" charset="0"/>
-              </a:rPr>
-              <a:t>*</a:t>
-            </a:r>
-            <a:r>
-              <a:rPr lang="en-US" sz="2000" dirty="0">
-                <a:solidFill>
-                  <a:prstClr val="black"/>
-                </a:solidFill>
-                <a:latin typeface="Courier" pitchFamily="2" charset="0"/>
-              </a:rPr>
-              <a:t>to, </a:t>
-            </a:r>
-            <a:r>
-              <a:rPr lang="en-US" sz="2000" dirty="0">
-                <a:solidFill>
-                  <a:srgbClr val="B00040"/>
-                </a:solidFill>
-                <a:latin typeface="Courier" pitchFamily="2" charset="0"/>
-              </a:rPr>
-              <a:t>char</a:t>
-            </a:r>
-            <a:r>
-              <a:rPr lang="en-US" sz="2000" dirty="0">
-                <a:solidFill>
-                  <a:prstClr val="black"/>
-                </a:solidFill>
-                <a:latin typeface="Courier" pitchFamily="2" charset="0"/>
-              </a:rPr>
-              <a:t> </a:t>
-            </a:r>
-            <a:r>
-              <a:rPr lang="en-US" sz="2000" dirty="0">
-                <a:solidFill>
-                  <a:srgbClr val="666666"/>
-                </a:solidFill>
-                <a:latin typeface="Courier" pitchFamily="2" charset="0"/>
-              </a:rPr>
-              <a:t>*</a:t>
-            </a:r>
-            <a:r>
-              <a:rPr lang="en-US" sz="2000" dirty="0">
-                <a:solidFill>
-                  <a:prstClr val="black"/>
-                </a:solidFill>
-                <a:latin typeface="Courier" pitchFamily="2" charset="0"/>
-              </a:rPr>
-              <a:t>from, </a:t>
-            </a:r>
-            <a:r>
-              <a:rPr lang="en-US" sz="2000" dirty="0">
-                <a:solidFill>
-                  <a:srgbClr val="B00040"/>
-                </a:solidFill>
-                <a:latin typeface="Courier" pitchFamily="2" charset="0"/>
-              </a:rPr>
-              <a:t>int</a:t>
-            </a:r>
-            <a:r>
-              <a:rPr lang="en-US" sz="2000" dirty="0">
-                <a:solidFill>
-                  <a:prstClr val="black"/>
-                </a:solidFill>
-                <a:latin typeface="Courier" pitchFamily="2" charset="0"/>
-              </a:rPr>
-              <a:t> count)</a:t>
-            </a:r>
-          </a:p>
-          <a:p>
-            <a:r>
-              <a:rPr lang="en-US" sz="2000" dirty="0">
-                <a:solidFill>
-                  <a:prstClr val="black"/>
-                </a:solidFill>
-                <a:latin typeface="Courier" pitchFamily="2" charset="0"/>
-              </a:rPr>
-              <a:t>{  </a:t>
-            </a:r>
-          </a:p>
-          <a:p>
-            <a:r>
-              <a:rPr lang="en-US" sz="2000" dirty="0">
-                <a:solidFill>
-                  <a:prstClr val="black"/>
-                </a:solidFill>
-                <a:latin typeface="Courier" pitchFamily="2" charset="0"/>
-              </a:rPr>
-              <a:t>	</a:t>
-            </a:r>
-            <a:r>
-              <a:rPr lang="en-US" sz="2000" dirty="0">
-                <a:solidFill>
-                  <a:srgbClr val="B00040"/>
-                </a:solidFill>
-                <a:latin typeface="Courier" pitchFamily="2" charset="0"/>
-              </a:rPr>
-              <a:t>int</a:t>
-            </a:r>
-            <a:r>
-              <a:rPr lang="en-US" sz="2000" dirty="0">
-                <a:solidFill>
-                  <a:prstClr val="black"/>
-                </a:solidFill>
-                <a:latin typeface="Courier" pitchFamily="2" charset="0"/>
-              </a:rPr>
-              <a:t> n </a:t>
-            </a:r>
-            <a:r>
-              <a:rPr lang="en-US" sz="2000" dirty="0">
-                <a:solidFill>
-                  <a:srgbClr val="666666"/>
-                </a:solidFill>
-                <a:latin typeface="Courier" pitchFamily="2" charset="0"/>
-              </a:rPr>
-              <a:t>=</a:t>
-            </a:r>
-            <a:r>
-              <a:rPr lang="en-US" sz="2000" dirty="0">
-                <a:solidFill>
-                  <a:prstClr val="black"/>
-                </a:solidFill>
-                <a:latin typeface="Courier" pitchFamily="2" charset="0"/>
-              </a:rPr>
-              <a:t> (count</a:t>
-            </a:r>
-            <a:r>
-              <a:rPr lang="en-US" sz="2000" dirty="0">
-                <a:solidFill>
-                  <a:srgbClr val="666666"/>
-                </a:solidFill>
-                <a:latin typeface="Courier" pitchFamily="2" charset="0"/>
-              </a:rPr>
-              <a:t>+7</a:t>
-            </a:r>
-            <a:r>
-              <a:rPr lang="en-US" sz="2000" dirty="0">
-                <a:solidFill>
-                  <a:prstClr val="black"/>
-                </a:solidFill>
-                <a:latin typeface="Courier" pitchFamily="2" charset="0"/>
-              </a:rPr>
-              <a:t>)</a:t>
-            </a:r>
-            <a:r>
-              <a:rPr lang="en-US" sz="2000" dirty="0">
-                <a:solidFill>
-                  <a:srgbClr val="666666"/>
-                </a:solidFill>
-                <a:latin typeface="Courier" pitchFamily="2" charset="0"/>
-              </a:rPr>
-              <a:t>/8</a:t>
-            </a:r>
-            <a:r>
-              <a:rPr lang="en-US" sz="2000" dirty="0">
-                <a:solidFill>
-                  <a:prstClr val="black"/>
-                </a:solidFill>
-                <a:latin typeface="Courier" pitchFamily="2" charset="0"/>
-              </a:rPr>
-              <a:t>;  </a:t>
-            </a:r>
-          </a:p>
-          <a:p>
-            <a:r>
-              <a:rPr lang="en-US" sz="2000" b="1" dirty="0">
-                <a:solidFill>
-                  <a:prstClr val="black"/>
-                </a:solidFill>
-                <a:latin typeface="Courier" pitchFamily="2" charset="0"/>
-              </a:rPr>
-              <a:t>	</a:t>
-            </a:r>
-            <a:r>
-              <a:rPr lang="en-US" sz="2000" b="1" dirty="0">
-                <a:solidFill>
-                  <a:srgbClr val="008000"/>
-                </a:solidFill>
-                <a:latin typeface="Courier-Bold" pitchFamily="2" charset="0"/>
-              </a:rPr>
-              <a:t>switch</a:t>
-            </a:r>
-            <a:r>
-              <a:rPr lang="en-US" sz="2000" dirty="0">
-                <a:solidFill>
-                  <a:prstClr val="black"/>
-                </a:solidFill>
-                <a:latin typeface="Courier" pitchFamily="2" charset="0"/>
-              </a:rPr>
-              <a:t> (count </a:t>
-            </a:r>
-            <a:r>
-              <a:rPr lang="en-US" sz="2000" dirty="0">
-                <a:solidFill>
-                  <a:srgbClr val="666666"/>
-                </a:solidFill>
-                <a:latin typeface="Courier" pitchFamily="2" charset="0"/>
-              </a:rPr>
-              <a:t>%</a:t>
-            </a:r>
-            <a:r>
-              <a:rPr lang="en-US" sz="2000" dirty="0">
-                <a:solidFill>
-                  <a:prstClr val="black"/>
-                </a:solidFill>
-                <a:latin typeface="Courier" pitchFamily="2" charset="0"/>
-              </a:rPr>
-              <a:t> </a:t>
-            </a:r>
-            <a:r>
-              <a:rPr lang="en-US" sz="2000" dirty="0">
-                <a:solidFill>
-                  <a:srgbClr val="666666"/>
-                </a:solidFill>
-                <a:latin typeface="Courier" pitchFamily="2" charset="0"/>
-              </a:rPr>
-              <a:t>8</a:t>
-            </a:r>
-            <a:r>
-              <a:rPr lang="en-US" sz="2000" dirty="0">
-                <a:solidFill>
-                  <a:prstClr val="black"/>
-                </a:solidFill>
-                <a:latin typeface="Courier" pitchFamily="2" charset="0"/>
-              </a:rPr>
-              <a:t>) {  </a:t>
-            </a:r>
-          </a:p>
-          <a:p>
-            <a:r>
-              <a:rPr lang="en-US" sz="2000" b="1" dirty="0">
-                <a:solidFill>
-                  <a:prstClr val="black"/>
-                </a:solidFill>
-                <a:latin typeface="Courier" pitchFamily="2" charset="0"/>
-              </a:rPr>
-              <a:t>	</a:t>
-            </a:r>
-            <a:r>
-              <a:rPr lang="en-US" sz="2000" b="1" dirty="0">
-                <a:solidFill>
-                  <a:srgbClr val="008000"/>
-                </a:solidFill>
-                <a:latin typeface="Courier-Bold" pitchFamily="2" charset="0"/>
-              </a:rPr>
-              <a:t>case</a:t>
-            </a:r>
-            <a:r>
-              <a:rPr lang="en-US" sz="2000" dirty="0">
-                <a:solidFill>
-                  <a:prstClr val="black"/>
-                </a:solidFill>
-                <a:latin typeface="Courier" pitchFamily="2" charset="0"/>
-              </a:rPr>
-              <a:t> </a:t>
-            </a:r>
-            <a:r>
-              <a:rPr lang="en-US" sz="2000" dirty="0">
-                <a:solidFill>
-                  <a:srgbClr val="666666"/>
-                </a:solidFill>
-                <a:latin typeface="Courier" pitchFamily="2" charset="0"/>
-              </a:rPr>
-              <a:t>0:</a:t>
-            </a:r>
-            <a:r>
-              <a:rPr lang="en-US" sz="2000" dirty="0">
-                <a:solidFill>
-                  <a:prstClr val="black"/>
-                </a:solidFill>
-                <a:latin typeface="Courier" pitchFamily="2" charset="0"/>
-              </a:rPr>
-              <a:t> </a:t>
-            </a:r>
-            <a:r>
-              <a:rPr lang="en-US" sz="2000" b="1" dirty="0">
-                <a:solidFill>
-                  <a:srgbClr val="008000"/>
-                </a:solidFill>
-                <a:latin typeface="Courier-Bold" pitchFamily="2" charset="0"/>
-              </a:rPr>
-              <a:t>do </a:t>
-            </a:r>
-            <a:r>
-              <a:rPr lang="en-US" sz="2000" dirty="0">
-                <a:solidFill>
-                  <a:prstClr val="black"/>
-                </a:solidFill>
-                <a:latin typeface="Courier" pitchFamily="2" charset="0"/>
-              </a:rPr>
-              <a:t>{ </a:t>
-            </a:r>
-            <a:r>
-              <a:rPr lang="en-US" sz="2000" dirty="0">
-                <a:solidFill>
-                  <a:srgbClr val="666666"/>
-                </a:solidFill>
-                <a:latin typeface="Courier" pitchFamily="2" charset="0"/>
-              </a:rPr>
-              <a:t>*</a:t>
-            </a:r>
-            <a:r>
-              <a:rPr lang="en-US" sz="2000" dirty="0">
-                <a:solidFill>
-                  <a:prstClr val="black"/>
-                </a:solidFill>
-                <a:latin typeface="Courier" pitchFamily="2" charset="0"/>
-              </a:rPr>
-              <a:t>to</a:t>
-            </a:r>
-            <a:r>
-              <a:rPr lang="en-US" sz="2000" dirty="0">
-                <a:solidFill>
-                  <a:srgbClr val="666666"/>
-                </a:solidFill>
-                <a:latin typeface="Courier" pitchFamily="2" charset="0"/>
-              </a:rPr>
-              <a:t>++</a:t>
-            </a:r>
-            <a:r>
-              <a:rPr lang="en-US" sz="2000" dirty="0">
-                <a:solidFill>
-                  <a:prstClr val="black"/>
-                </a:solidFill>
-                <a:latin typeface="Courier" pitchFamily="2" charset="0"/>
-              </a:rPr>
-              <a:t> </a:t>
-            </a:r>
-            <a:r>
-              <a:rPr lang="en-US" sz="2000" dirty="0">
-                <a:solidFill>
-                  <a:srgbClr val="666666"/>
-                </a:solidFill>
-                <a:latin typeface="Courier" pitchFamily="2" charset="0"/>
-              </a:rPr>
-              <a:t>=</a:t>
-            </a:r>
-            <a:r>
-              <a:rPr lang="en-US" sz="2000" dirty="0">
-                <a:solidFill>
-                  <a:prstClr val="black"/>
-                </a:solidFill>
-                <a:latin typeface="Courier" pitchFamily="2" charset="0"/>
-              </a:rPr>
-              <a:t> </a:t>
-            </a:r>
-            <a:r>
-              <a:rPr lang="en-US" sz="2000" dirty="0">
-                <a:solidFill>
-                  <a:srgbClr val="666666"/>
-                </a:solidFill>
-                <a:latin typeface="Courier" pitchFamily="2" charset="0"/>
-              </a:rPr>
-              <a:t>*</a:t>
-            </a:r>
-            <a:r>
-              <a:rPr lang="en-US" sz="2000" dirty="0">
-                <a:solidFill>
-                  <a:prstClr val="black"/>
-                </a:solidFill>
-                <a:latin typeface="Courier" pitchFamily="2" charset="0"/>
-              </a:rPr>
-              <a:t>from</a:t>
-            </a:r>
-            <a:r>
-              <a:rPr lang="en-US" sz="2000" dirty="0">
-                <a:solidFill>
-                  <a:srgbClr val="666666"/>
-                </a:solidFill>
-                <a:latin typeface="Courier" pitchFamily="2" charset="0"/>
-              </a:rPr>
-              <a:t>++</a:t>
-            </a:r>
-            <a:r>
-              <a:rPr lang="en-US" sz="2000" dirty="0">
-                <a:solidFill>
-                  <a:prstClr val="black"/>
-                </a:solidFill>
-                <a:latin typeface="Courier" pitchFamily="2" charset="0"/>
-              </a:rPr>
-              <a:t>;  </a:t>
-            </a:r>
-          </a:p>
-          <a:p>
-            <a:r>
-              <a:rPr lang="en-US" sz="2000" b="1" dirty="0">
-                <a:solidFill>
-                  <a:prstClr val="black"/>
-                </a:solidFill>
-                <a:latin typeface="Courier" pitchFamily="2" charset="0"/>
-              </a:rPr>
-              <a:t>	</a:t>
-            </a:r>
-            <a:r>
-              <a:rPr lang="en-US" sz="2000" b="1" dirty="0">
-                <a:solidFill>
-                  <a:srgbClr val="008000"/>
-                </a:solidFill>
-                <a:latin typeface="Courier-Bold" pitchFamily="2" charset="0"/>
-              </a:rPr>
-              <a:t>case</a:t>
-            </a:r>
-            <a:r>
-              <a:rPr lang="en-US" sz="2000" dirty="0">
-                <a:solidFill>
-                  <a:prstClr val="black"/>
-                </a:solidFill>
-                <a:latin typeface="Courier" pitchFamily="2" charset="0"/>
-              </a:rPr>
-              <a:t> </a:t>
-            </a:r>
-            <a:r>
-              <a:rPr lang="en-US" sz="2000" dirty="0">
-                <a:solidFill>
-                  <a:srgbClr val="666666"/>
-                </a:solidFill>
-                <a:latin typeface="Courier" pitchFamily="2" charset="0"/>
-              </a:rPr>
-              <a:t>7:</a:t>
-            </a:r>
-            <a:r>
-              <a:rPr lang="en-US" sz="2000" dirty="0">
-                <a:solidFill>
-                  <a:prstClr val="black"/>
-                </a:solidFill>
-                <a:latin typeface="Courier" pitchFamily="2" charset="0"/>
-              </a:rPr>
-              <a:t>      </a:t>
-            </a:r>
-            <a:r>
-              <a:rPr lang="en-US" sz="2000" dirty="0">
-                <a:solidFill>
-                  <a:srgbClr val="666666"/>
-                </a:solidFill>
-                <a:latin typeface="Courier" pitchFamily="2" charset="0"/>
-              </a:rPr>
-              <a:t>*</a:t>
-            </a:r>
-            <a:r>
-              <a:rPr lang="en-US" sz="2000" dirty="0">
-                <a:solidFill>
-                  <a:prstClr val="black"/>
-                </a:solidFill>
-                <a:latin typeface="Courier" pitchFamily="2" charset="0"/>
-              </a:rPr>
-              <a:t>to</a:t>
-            </a:r>
-            <a:r>
-              <a:rPr lang="en-US" sz="2000" dirty="0">
-                <a:solidFill>
-                  <a:srgbClr val="666666"/>
-                </a:solidFill>
-                <a:latin typeface="Courier" pitchFamily="2" charset="0"/>
-              </a:rPr>
-              <a:t>++</a:t>
-            </a:r>
-            <a:r>
-              <a:rPr lang="en-US" sz="2000" dirty="0">
-                <a:solidFill>
-                  <a:prstClr val="black"/>
-                </a:solidFill>
-                <a:latin typeface="Courier" pitchFamily="2" charset="0"/>
-              </a:rPr>
-              <a:t> </a:t>
-            </a:r>
-            <a:r>
-              <a:rPr lang="en-US" sz="2000" dirty="0">
-                <a:solidFill>
-                  <a:srgbClr val="666666"/>
-                </a:solidFill>
-                <a:latin typeface="Courier" pitchFamily="2" charset="0"/>
-              </a:rPr>
-              <a:t>=</a:t>
-            </a:r>
-            <a:r>
-              <a:rPr lang="en-US" sz="2000" dirty="0">
-                <a:solidFill>
-                  <a:prstClr val="black"/>
-                </a:solidFill>
-                <a:latin typeface="Courier" pitchFamily="2" charset="0"/>
-              </a:rPr>
-              <a:t> </a:t>
-            </a:r>
-            <a:r>
-              <a:rPr lang="en-US" sz="2000" dirty="0">
-                <a:solidFill>
-                  <a:srgbClr val="666666"/>
-                </a:solidFill>
-                <a:latin typeface="Courier" pitchFamily="2" charset="0"/>
-              </a:rPr>
-              <a:t>*</a:t>
-            </a:r>
-            <a:r>
-              <a:rPr lang="en-US" sz="2000" dirty="0">
-                <a:solidFill>
-                  <a:prstClr val="black"/>
-                </a:solidFill>
-                <a:latin typeface="Courier" pitchFamily="2" charset="0"/>
-              </a:rPr>
-              <a:t>from</a:t>
-            </a:r>
-            <a:r>
-              <a:rPr lang="en-US" sz="2000" dirty="0">
-                <a:solidFill>
-                  <a:srgbClr val="666666"/>
-                </a:solidFill>
-                <a:latin typeface="Courier" pitchFamily="2" charset="0"/>
-              </a:rPr>
-              <a:t>++</a:t>
-            </a:r>
-            <a:r>
-              <a:rPr lang="en-US" sz="2000" dirty="0">
-                <a:solidFill>
-                  <a:prstClr val="black"/>
-                </a:solidFill>
-                <a:latin typeface="Courier" pitchFamily="2" charset="0"/>
-              </a:rPr>
-              <a:t>;  </a:t>
-            </a:r>
-          </a:p>
-          <a:p>
-            <a:r>
-              <a:rPr lang="en-US" sz="2000" b="1" dirty="0">
-                <a:solidFill>
-                  <a:prstClr val="black"/>
-                </a:solidFill>
-                <a:latin typeface="Courier" pitchFamily="2" charset="0"/>
-              </a:rPr>
-              <a:t>	</a:t>
-            </a:r>
-            <a:r>
-              <a:rPr lang="en-US" sz="2000" b="1" dirty="0">
-                <a:solidFill>
-                  <a:srgbClr val="008000"/>
-                </a:solidFill>
-                <a:latin typeface="Courier-Bold" pitchFamily="2" charset="0"/>
-              </a:rPr>
-              <a:t>case</a:t>
-            </a:r>
-            <a:r>
-              <a:rPr lang="en-US" sz="2000" dirty="0">
-                <a:solidFill>
-                  <a:prstClr val="black"/>
-                </a:solidFill>
-                <a:latin typeface="Courier" pitchFamily="2" charset="0"/>
-              </a:rPr>
-              <a:t> </a:t>
-            </a:r>
-            <a:r>
-              <a:rPr lang="en-US" sz="2000" dirty="0">
-                <a:solidFill>
-                  <a:srgbClr val="666666"/>
-                </a:solidFill>
-                <a:latin typeface="Courier" pitchFamily="2" charset="0"/>
-              </a:rPr>
-              <a:t>6:</a:t>
-            </a:r>
-            <a:r>
-              <a:rPr lang="en-US" sz="2000" dirty="0">
-                <a:solidFill>
-                  <a:prstClr val="black"/>
-                </a:solidFill>
-                <a:latin typeface="Courier" pitchFamily="2" charset="0"/>
-              </a:rPr>
-              <a:t>      </a:t>
-            </a:r>
-            <a:r>
-              <a:rPr lang="en-US" sz="2000" dirty="0">
-                <a:solidFill>
-                  <a:srgbClr val="666666"/>
-                </a:solidFill>
-                <a:latin typeface="Courier" pitchFamily="2" charset="0"/>
-              </a:rPr>
-              <a:t>*</a:t>
-            </a:r>
-            <a:r>
-              <a:rPr lang="en-US" sz="2000" dirty="0">
-                <a:solidFill>
-                  <a:prstClr val="black"/>
-                </a:solidFill>
-                <a:latin typeface="Courier" pitchFamily="2" charset="0"/>
-              </a:rPr>
-              <a:t>to</a:t>
-            </a:r>
-            <a:r>
-              <a:rPr lang="en-US" sz="2000" dirty="0">
-                <a:solidFill>
-                  <a:srgbClr val="666666"/>
-                </a:solidFill>
-                <a:latin typeface="Courier" pitchFamily="2" charset="0"/>
-              </a:rPr>
-              <a:t>++</a:t>
-            </a:r>
-            <a:r>
-              <a:rPr lang="en-US" sz="2000" dirty="0">
-                <a:solidFill>
-                  <a:prstClr val="black"/>
-                </a:solidFill>
-                <a:latin typeface="Courier" pitchFamily="2" charset="0"/>
-              </a:rPr>
-              <a:t> </a:t>
-            </a:r>
-            <a:r>
-              <a:rPr lang="en-US" sz="2000" dirty="0">
-                <a:solidFill>
-                  <a:srgbClr val="666666"/>
-                </a:solidFill>
-                <a:latin typeface="Courier" pitchFamily="2" charset="0"/>
-              </a:rPr>
-              <a:t>=</a:t>
-            </a:r>
-            <a:r>
-              <a:rPr lang="en-US" sz="2000" dirty="0">
-                <a:solidFill>
-                  <a:prstClr val="black"/>
-                </a:solidFill>
-                <a:latin typeface="Courier" pitchFamily="2" charset="0"/>
-              </a:rPr>
-              <a:t> </a:t>
-            </a:r>
-            <a:r>
-              <a:rPr lang="en-US" sz="2000" dirty="0">
-                <a:solidFill>
-                  <a:srgbClr val="666666"/>
-                </a:solidFill>
-                <a:latin typeface="Courier" pitchFamily="2" charset="0"/>
-              </a:rPr>
-              <a:t>*</a:t>
-            </a:r>
-            <a:r>
-              <a:rPr lang="en-US" sz="2000" dirty="0">
-                <a:solidFill>
-                  <a:prstClr val="black"/>
-                </a:solidFill>
-                <a:latin typeface="Courier" pitchFamily="2" charset="0"/>
-              </a:rPr>
-              <a:t>from</a:t>
-            </a:r>
-            <a:r>
-              <a:rPr lang="en-US" sz="2000" dirty="0">
-                <a:solidFill>
-                  <a:srgbClr val="666666"/>
-                </a:solidFill>
-                <a:latin typeface="Courier" pitchFamily="2" charset="0"/>
-              </a:rPr>
-              <a:t>++</a:t>
-            </a:r>
-            <a:r>
-              <a:rPr lang="en-US" sz="2000" dirty="0">
-                <a:solidFill>
-                  <a:prstClr val="black"/>
-                </a:solidFill>
-                <a:latin typeface="Courier" pitchFamily="2" charset="0"/>
-              </a:rPr>
-              <a:t>;  </a:t>
-            </a:r>
-          </a:p>
-          <a:p>
-            <a:r>
-              <a:rPr lang="en-US" sz="2000" b="1" dirty="0">
-                <a:solidFill>
-                  <a:prstClr val="black"/>
-                </a:solidFill>
-                <a:latin typeface="Courier" pitchFamily="2" charset="0"/>
-              </a:rPr>
-              <a:t>	</a:t>
-            </a:r>
-            <a:r>
-              <a:rPr lang="en-US" sz="2000" b="1" dirty="0">
-                <a:solidFill>
-                  <a:srgbClr val="008000"/>
-                </a:solidFill>
-                <a:latin typeface="Courier-Bold" pitchFamily="2" charset="0"/>
-              </a:rPr>
-              <a:t>case</a:t>
-            </a:r>
-            <a:r>
-              <a:rPr lang="en-US" sz="2000" dirty="0">
-                <a:solidFill>
-                  <a:prstClr val="black"/>
-                </a:solidFill>
-                <a:latin typeface="Courier" pitchFamily="2" charset="0"/>
-              </a:rPr>
-              <a:t> </a:t>
-            </a:r>
-            <a:r>
-              <a:rPr lang="en-US" sz="2000" dirty="0">
-                <a:solidFill>
-                  <a:srgbClr val="666666"/>
-                </a:solidFill>
-                <a:latin typeface="Courier" pitchFamily="2" charset="0"/>
-              </a:rPr>
-              <a:t>5:</a:t>
-            </a:r>
-            <a:r>
-              <a:rPr lang="en-US" sz="2000" dirty="0">
-                <a:solidFill>
-                  <a:prstClr val="black"/>
-                </a:solidFill>
-                <a:latin typeface="Courier" pitchFamily="2" charset="0"/>
-              </a:rPr>
-              <a:t>      </a:t>
-            </a:r>
-            <a:r>
-              <a:rPr lang="en-US" sz="2000" dirty="0">
-                <a:solidFill>
-                  <a:srgbClr val="666666"/>
-                </a:solidFill>
-                <a:latin typeface="Courier" pitchFamily="2" charset="0"/>
-              </a:rPr>
-              <a:t>*</a:t>
-            </a:r>
-            <a:r>
-              <a:rPr lang="en-US" sz="2000" dirty="0">
-                <a:solidFill>
-                  <a:prstClr val="black"/>
-                </a:solidFill>
-                <a:latin typeface="Courier" pitchFamily="2" charset="0"/>
-              </a:rPr>
-              <a:t>to</a:t>
-            </a:r>
-            <a:r>
-              <a:rPr lang="en-US" sz="2000" dirty="0">
-                <a:solidFill>
-                  <a:srgbClr val="666666"/>
-                </a:solidFill>
-                <a:latin typeface="Courier" pitchFamily="2" charset="0"/>
-              </a:rPr>
-              <a:t>++</a:t>
-            </a:r>
-            <a:r>
-              <a:rPr lang="en-US" sz="2000" dirty="0">
-                <a:solidFill>
-                  <a:prstClr val="black"/>
-                </a:solidFill>
-                <a:latin typeface="Courier" pitchFamily="2" charset="0"/>
-              </a:rPr>
-              <a:t> </a:t>
-            </a:r>
-            <a:r>
-              <a:rPr lang="en-US" sz="2000" dirty="0">
-                <a:solidFill>
-                  <a:srgbClr val="666666"/>
-                </a:solidFill>
-                <a:latin typeface="Courier" pitchFamily="2" charset="0"/>
-              </a:rPr>
-              <a:t>=</a:t>
-            </a:r>
-            <a:r>
-              <a:rPr lang="en-US" sz="2000" dirty="0">
-                <a:solidFill>
-                  <a:prstClr val="black"/>
-                </a:solidFill>
-                <a:latin typeface="Courier" pitchFamily="2" charset="0"/>
-              </a:rPr>
-              <a:t> </a:t>
-            </a:r>
-            <a:r>
-              <a:rPr lang="en-US" sz="2000" dirty="0">
-                <a:solidFill>
-                  <a:srgbClr val="666666"/>
-                </a:solidFill>
-                <a:latin typeface="Courier" pitchFamily="2" charset="0"/>
-              </a:rPr>
-              <a:t>*</a:t>
-            </a:r>
-            <a:r>
-              <a:rPr lang="en-US" sz="2000" dirty="0">
-                <a:solidFill>
-                  <a:prstClr val="black"/>
-                </a:solidFill>
-                <a:latin typeface="Courier" pitchFamily="2" charset="0"/>
-              </a:rPr>
-              <a:t>from</a:t>
-            </a:r>
-            <a:r>
-              <a:rPr lang="en-US" sz="2000" dirty="0">
-                <a:solidFill>
-                  <a:srgbClr val="666666"/>
-                </a:solidFill>
-                <a:latin typeface="Courier" pitchFamily="2" charset="0"/>
-              </a:rPr>
-              <a:t>++</a:t>
-            </a:r>
-            <a:r>
-              <a:rPr lang="en-US" sz="2000" dirty="0">
-                <a:solidFill>
-                  <a:prstClr val="black"/>
-                </a:solidFill>
-                <a:latin typeface="Courier" pitchFamily="2" charset="0"/>
-              </a:rPr>
-              <a:t>;  </a:t>
-            </a:r>
-          </a:p>
-          <a:p>
-            <a:r>
-              <a:rPr lang="en-US" sz="2000" b="1" dirty="0">
-                <a:solidFill>
-                  <a:prstClr val="black"/>
-                </a:solidFill>
-                <a:latin typeface="Courier" pitchFamily="2" charset="0"/>
-              </a:rPr>
-              <a:t>	</a:t>
-            </a:r>
-            <a:r>
-              <a:rPr lang="en-US" sz="2000" b="1" dirty="0">
-                <a:solidFill>
-                  <a:srgbClr val="008000"/>
-                </a:solidFill>
-                <a:latin typeface="Courier-Bold" pitchFamily="2" charset="0"/>
-              </a:rPr>
-              <a:t>case</a:t>
-            </a:r>
-            <a:r>
-              <a:rPr lang="en-US" sz="2000" dirty="0">
-                <a:solidFill>
-                  <a:prstClr val="black"/>
-                </a:solidFill>
-                <a:latin typeface="Courier" pitchFamily="2" charset="0"/>
-              </a:rPr>
-              <a:t> </a:t>
-            </a:r>
-            <a:r>
-              <a:rPr lang="en-US" sz="2000" dirty="0">
-                <a:solidFill>
-                  <a:srgbClr val="666666"/>
-                </a:solidFill>
-                <a:latin typeface="Courier" pitchFamily="2" charset="0"/>
-              </a:rPr>
-              <a:t>4:</a:t>
-            </a:r>
-            <a:r>
-              <a:rPr lang="en-US" sz="2000" dirty="0">
-                <a:solidFill>
-                  <a:prstClr val="black"/>
-                </a:solidFill>
-                <a:latin typeface="Courier" pitchFamily="2" charset="0"/>
-              </a:rPr>
-              <a:t>      </a:t>
-            </a:r>
-            <a:r>
-              <a:rPr lang="en-US" sz="2000" dirty="0">
-                <a:solidFill>
-                  <a:srgbClr val="666666"/>
-                </a:solidFill>
-                <a:latin typeface="Courier" pitchFamily="2" charset="0"/>
-              </a:rPr>
-              <a:t>*</a:t>
-            </a:r>
-            <a:r>
-              <a:rPr lang="en-US" sz="2000" dirty="0">
-                <a:solidFill>
-                  <a:prstClr val="black"/>
-                </a:solidFill>
-                <a:latin typeface="Courier" pitchFamily="2" charset="0"/>
-              </a:rPr>
-              <a:t>to</a:t>
-            </a:r>
-            <a:r>
-              <a:rPr lang="en-US" sz="2000" dirty="0">
-                <a:solidFill>
-                  <a:srgbClr val="666666"/>
-                </a:solidFill>
-                <a:latin typeface="Courier" pitchFamily="2" charset="0"/>
-              </a:rPr>
-              <a:t>++</a:t>
-            </a:r>
-            <a:r>
-              <a:rPr lang="en-US" sz="2000" dirty="0">
-                <a:solidFill>
-                  <a:prstClr val="black"/>
-                </a:solidFill>
-                <a:latin typeface="Courier" pitchFamily="2" charset="0"/>
-              </a:rPr>
-              <a:t> </a:t>
-            </a:r>
-            <a:r>
-              <a:rPr lang="en-US" sz="2000" dirty="0">
-                <a:solidFill>
-                  <a:srgbClr val="666666"/>
-                </a:solidFill>
-                <a:latin typeface="Courier" pitchFamily="2" charset="0"/>
-              </a:rPr>
-              <a:t>=</a:t>
-            </a:r>
-            <a:r>
-              <a:rPr lang="en-US" sz="2000" dirty="0">
-                <a:solidFill>
-                  <a:prstClr val="black"/>
-                </a:solidFill>
-                <a:latin typeface="Courier" pitchFamily="2" charset="0"/>
-              </a:rPr>
-              <a:t> </a:t>
-            </a:r>
-            <a:r>
-              <a:rPr lang="en-US" sz="2000" dirty="0">
-                <a:solidFill>
-                  <a:srgbClr val="666666"/>
-                </a:solidFill>
-                <a:latin typeface="Courier" pitchFamily="2" charset="0"/>
-              </a:rPr>
-              <a:t>*</a:t>
-            </a:r>
-            <a:r>
-              <a:rPr lang="en-US" sz="2000" dirty="0">
-                <a:solidFill>
-                  <a:prstClr val="black"/>
-                </a:solidFill>
-                <a:latin typeface="Courier" pitchFamily="2" charset="0"/>
-              </a:rPr>
-              <a:t>from</a:t>
-            </a:r>
-            <a:r>
-              <a:rPr lang="en-US" sz="2000" dirty="0">
-                <a:solidFill>
-                  <a:srgbClr val="666666"/>
-                </a:solidFill>
-                <a:latin typeface="Courier" pitchFamily="2" charset="0"/>
-              </a:rPr>
-              <a:t>++</a:t>
-            </a:r>
-            <a:r>
-              <a:rPr lang="en-US" sz="2000" dirty="0">
-                <a:solidFill>
-                  <a:prstClr val="black"/>
-                </a:solidFill>
-                <a:latin typeface="Courier" pitchFamily="2" charset="0"/>
-              </a:rPr>
-              <a:t>;  </a:t>
-            </a:r>
-          </a:p>
-          <a:p>
-            <a:r>
-              <a:rPr lang="en-US" sz="2000" b="1" dirty="0">
-                <a:solidFill>
-                  <a:prstClr val="black"/>
-                </a:solidFill>
-                <a:latin typeface="Courier" pitchFamily="2" charset="0"/>
-              </a:rPr>
-              <a:t>	</a:t>
-            </a:r>
-            <a:r>
-              <a:rPr lang="en-US" sz="2000" b="1" dirty="0">
-                <a:solidFill>
-                  <a:srgbClr val="008000"/>
-                </a:solidFill>
-                <a:latin typeface="Courier-Bold" pitchFamily="2" charset="0"/>
-              </a:rPr>
-              <a:t>case</a:t>
-            </a:r>
-            <a:r>
-              <a:rPr lang="en-US" sz="2000" dirty="0">
-                <a:solidFill>
-                  <a:prstClr val="black"/>
-                </a:solidFill>
-                <a:latin typeface="Courier" pitchFamily="2" charset="0"/>
-              </a:rPr>
-              <a:t> </a:t>
-            </a:r>
-            <a:r>
-              <a:rPr lang="en-US" sz="2000" dirty="0">
-                <a:solidFill>
-                  <a:srgbClr val="666666"/>
-                </a:solidFill>
-                <a:latin typeface="Courier" pitchFamily="2" charset="0"/>
-              </a:rPr>
-              <a:t>3:</a:t>
-            </a:r>
-            <a:r>
-              <a:rPr lang="en-US" sz="2000" dirty="0">
-                <a:solidFill>
-                  <a:prstClr val="black"/>
-                </a:solidFill>
-                <a:latin typeface="Courier" pitchFamily="2" charset="0"/>
-              </a:rPr>
-              <a:t>      </a:t>
-            </a:r>
-            <a:r>
-              <a:rPr lang="en-US" sz="2000" dirty="0">
-                <a:solidFill>
-                  <a:srgbClr val="666666"/>
-                </a:solidFill>
-                <a:latin typeface="Courier" pitchFamily="2" charset="0"/>
-              </a:rPr>
-              <a:t>*</a:t>
-            </a:r>
-            <a:r>
-              <a:rPr lang="en-US" sz="2000" dirty="0">
-                <a:solidFill>
-                  <a:prstClr val="black"/>
-                </a:solidFill>
-                <a:latin typeface="Courier" pitchFamily="2" charset="0"/>
-              </a:rPr>
-              <a:t>to</a:t>
-            </a:r>
-            <a:r>
-              <a:rPr lang="en-US" sz="2000" dirty="0">
-                <a:solidFill>
-                  <a:srgbClr val="666666"/>
-                </a:solidFill>
-                <a:latin typeface="Courier" pitchFamily="2" charset="0"/>
-              </a:rPr>
-              <a:t>++</a:t>
-            </a:r>
-            <a:r>
-              <a:rPr lang="en-US" sz="2000" dirty="0">
-                <a:solidFill>
-                  <a:prstClr val="black"/>
-                </a:solidFill>
-                <a:latin typeface="Courier" pitchFamily="2" charset="0"/>
-              </a:rPr>
-              <a:t> </a:t>
-            </a:r>
-            <a:r>
-              <a:rPr lang="en-US" sz="2000" dirty="0">
-                <a:solidFill>
-                  <a:srgbClr val="666666"/>
-                </a:solidFill>
-                <a:latin typeface="Courier" pitchFamily="2" charset="0"/>
-              </a:rPr>
-              <a:t>=</a:t>
-            </a:r>
-            <a:r>
-              <a:rPr lang="en-US" sz="2000" dirty="0">
-                <a:solidFill>
-                  <a:prstClr val="black"/>
-                </a:solidFill>
-                <a:latin typeface="Courier" pitchFamily="2" charset="0"/>
-              </a:rPr>
-              <a:t> </a:t>
-            </a:r>
-            <a:r>
-              <a:rPr lang="en-US" sz="2000" dirty="0">
-                <a:solidFill>
-                  <a:srgbClr val="666666"/>
-                </a:solidFill>
-                <a:latin typeface="Courier" pitchFamily="2" charset="0"/>
-              </a:rPr>
-              <a:t>*</a:t>
-            </a:r>
-            <a:r>
-              <a:rPr lang="en-US" sz="2000" dirty="0">
-                <a:solidFill>
-                  <a:prstClr val="black"/>
-                </a:solidFill>
-                <a:latin typeface="Courier" pitchFamily="2" charset="0"/>
-              </a:rPr>
-              <a:t>from</a:t>
-            </a:r>
-            <a:r>
-              <a:rPr lang="en-US" sz="2000" dirty="0">
-                <a:solidFill>
-                  <a:srgbClr val="666666"/>
-                </a:solidFill>
-                <a:latin typeface="Courier" pitchFamily="2" charset="0"/>
-              </a:rPr>
-              <a:t>++</a:t>
-            </a:r>
-            <a:r>
-              <a:rPr lang="en-US" sz="2000" dirty="0">
-                <a:solidFill>
-                  <a:prstClr val="black"/>
-                </a:solidFill>
-                <a:latin typeface="Courier" pitchFamily="2" charset="0"/>
-              </a:rPr>
-              <a:t>;  </a:t>
-            </a:r>
-          </a:p>
-          <a:p>
-            <a:r>
-              <a:rPr lang="en-US" sz="2000" b="1" dirty="0">
-                <a:solidFill>
-                  <a:prstClr val="black"/>
-                </a:solidFill>
-                <a:latin typeface="Courier" pitchFamily="2" charset="0"/>
-              </a:rPr>
-              <a:t>	</a:t>
-            </a:r>
-            <a:r>
-              <a:rPr lang="en-US" sz="2000" b="1" dirty="0">
-                <a:solidFill>
-                  <a:srgbClr val="008000"/>
-                </a:solidFill>
-                <a:latin typeface="Courier-Bold" pitchFamily="2" charset="0"/>
-              </a:rPr>
-              <a:t>case</a:t>
-            </a:r>
-            <a:r>
-              <a:rPr lang="en-US" sz="2000" dirty="0">
-                <a:solidFill>
-                  <a:prstClr val="black"/>
-                </a:solidFill>
-                <a:latin typeface="Courier" pitchFamily="2" charset="0"/>
-              </a:rPr>
-              <a:t> </a:t>
-            </a:r>
-            <a:r>
-              <a:rPr lang="en-US" sz="2000" dirty="0">
-                <a:solidFill>
-                  <a:srgbClr val="666666"/>
-                </a:solidFill>
-                <a:latin typeface="Courier" pitchFamily="2" charset="0"/>
-              </a:rPr>
-              <a:t>2:</a:t>
-            </a:r>
-            <a:r>
-              <a:rPr lang="en-US" sz="2000" dirty="0">
-                <a:solidFill>
-                  <a:prstClr val="black"/>
-                </a:solidFill>
-                <a:latin typeface="Courier" pitchFamily="2" charset="0"/>
-              </a:rPr>
-              <a:t>      </a:t>
-            </a:r>
-            <a:r>
-              <a:rPr lang="en-US" sz="2000" dirty="0">
-                <a:solidFill>
-                  <a:srgbClr val="666666"/>
-                </a:solidFill>
-                <a:latin typeface="Courier" pitchFamily="2" charset="0"/>
-              </a:rPr>
-              <a:t>*</a:t>
-            </a:r>
-            <a:r>
-              <a:rPr lang="en-US" sz="2000" dirty="0">
-                <a:solidFill>
-                  <a:prstClr val="black"/>
-                </a:solidFill>
-                <a:latin typeface="Courier" pitchFamily="2" charset="0"/>
-              </a:rPr>
-              <a:t>to</a:t>
-            </a:r>
-            <a:r>
-              <a:rPr lang="en-US" sz="2000" dirty="0">
-                <a:solidFill>
-                  <a:srgbClr val="666666"/>
-                </a:solidFill>
-                <a:latin typeface="Courier" pitchFamily="2" charset="0"/>
-              </a:rPr>
-              <a:t>++</a:t>
-            </a:r>
-            <a:r>
-              <a:rPr lang="en-US" sz="2000" dirty="0">
-                <a:solidFill>
-                  <a:prstClr val="black"/>
-                </a:solidFill>
-                <a:latin typeface="Courier" pitchFamily="2" charset="0"/>
-              </a:rPr>
-              <a:t> </a:t>
-            </a:r>
-            <a:r>
-              <a:rPr lang="en-US" sz="2000" dirty="0">
-                <a:solidFill>
-                  <a:srgbClr val="666666"/>
-                </a:solidFill>
-                <a:latin typeface="Courier" pitchFamily="2" charset="0"/>
-              </a:rPr>
-              <a:t>=</a:t>
-            </a:r>
-            <a:r>
-              <a:rPr lang="en-US" sz="2000" dirty="0">
-                <a:solidFill>
-                  <a:prstClr val="black"/>
-                </a:solidFill>
-                <a:latin typeface="Courier" pitchFamily="2" charset="0"/>
-              </a:rPr>
-              <a:t> </a:t>
-            </a:r>
-            <a:r>
-              <a:rPr lang="en-US" sz="2000" dirty="0">
-                <a:solidFill>
-                  <a:srgbClr val="666666"/>
-                </a:solidFill>
-                <a:latin typeface="Courier" pitchFamily="2" charset="0"/>
-              </a:rPr>
-              <a:t>*</a:t>
-            </a:r>
-            <a:r>
-              <a:rPr lang="en-US" sz="2000" dirty="0">
-                <a:solidFill>
-                  <a:prstClr val="black"/>
-                </a:solidFill>
-                <a:latin typeface="Courier" pitchFamily="2" charset="0"/>
-              </a:rPr>
-              <a:t>from</a:t>
-            </a:r>
-            <a:r>
-              <a:rPr lang="en-US" sz="2000" dirty="0">
-                <a:solidFill>
-                  <a:srgbClr val="666666"/>
-                </a:solidFill>
-                <a:latin typeface="Courier" pitchFamily="2" charset="0"/>
-              </a:rPr>
-              <a:t>++</a:t>
-            </a:r>
-            <a:r>
-              <a:rPr lang="en-US" sz="2000" dirty="0">
-                <a:solidFill>
-                  <a:prstClr val="black"/>
-                </a:solidFill>
-                <a:latin typeface="Courier" pitchFamily="2" charset="0"/>
-              </a:rPr>
-              <a:t>;  </a:t>
-            </a:r>
-          </a:p>
-          <a:p>
-            <a:r>
-              <a:rPr lang="en-US" sz="2000" b="1" dirty="0">
-                <a:solidFill>
-                  <a:prstClr val="black"/>
-                </a:solidFill>
-                <a:latin typeface="Courier" pitchFamily="2" charset="0"/>
-              </a:rPr>
-              <a:t>	</a:t>
-            </a:r>
-            <a:r>
-              <a:rPr lang="en-US" sz="2000" b="1" dirty="0">
-                <a:solidFill>
-                  <a:srgbClr val="008000"/>
-                </a:solidFill>
-                <a:latin typeface="Courier-Bold" pitchFamily="2" charset="0"/>
-              </a:rPr>
-              <a:t>case</a:t>
-            </a:r>
-            <a:r>
-              <a:rPr lang="en-US" sz="2000" dirty="0">
-                <a:solidFill>
-                  <a:prstClr val="black"/>
-                </a:solidFill>
-                <a:latin typeface="Courier" pitchFamily="2" charset="0"/>
-              </a:rPr>
-              <a:t> </a:t>
-            </a:r>
-            <a:r>
-              <a:rPr lang="en-US" sz="2000" dirty="0">
-                <a:solidFill>
-                  <a:srgbClr val="666666"/>
-                </a:solidFill>
-                <a:latin typeface="Courier" pitchFamily="2" charset="0"/>
-              </a:rPr>
-              <a:t>1:</a:t>
-            </a:r>
-            <a:r>
-              <a:rPr lang="en-US" sz="2000" dirty="0">
-                <a:solidFill>
-                  <a:prstClr val="black"/>
-                </a:solidFill>
-                <a:latin typeface="Courier" pitchFamily="2" charset="0"/>
-              </a:rPr>
-              <a:t>      </a:t>
-            </a:r>
-            <a:r>
-              <a:rPr lang="en-US" sz="2000" dirty="0">
-                <a:solidFill>
-                  <a:srgbClr val="666666"/>
-                </a:solidFill>
-                <a:latin typeface="Courier" pitchFamily="2" charset="0"/>
-              </a:rPr>
-              <a:t>*</a:t>
-            </a:r>
-            <a:r>
-              <a:rPr lang="en-US" sz="2000" dirty="0">
-                <a:solidFill>
-                  <a:prstClr val="black"/>
-                </a:solidFill>
-                <a:latin typeface="Courier" pitchFamily="2" charset="0"/>
-              </a:rPr>
-              <a:t>to</a:t>
-            </a:r>
-            <a:r>
-              <a:rPr lang="en-US" sz="2000" dirty="0">
-                <a:solidFill>
-                  <a:srgbClr val="666666"/>
-                </a:solidFill>
-                <a:latin typeface="Courier" pitchFamily="2" charset="0"/>
-              </a:rPr>
-              <a:t>++</a:t>
-            </a:r>
-            <a:r>
-              <a:rPr lang="en-US" sz="2000" dirty="0">
-                <a:solidFill>
-                  <a:prstClr val="black"/>
-                </a:solidFill>
-                <a:latin typeface="Courier" pitchFamily="2" charset="0"/>
-              </a:rPr>
-              <a:t> </a:t>
-            </a:r>
-            <a:r>
-              <a:rPr lang="en-US" sz="2000" dirty="0">
-                <a:solidFill>
-                  <a:srgbClr val="666666"/>
-                </a:solidFill>
-                <a:latin typeface="Courier" pitchFamily="2" charset="0"/>
-              </a:rPr>
-              <a:t>=</a:t>
-            </a:r>
-            <a:r>
-              <a:rPr lang="en-US" sz="2000" dirty="0">
-                <a:solidFill>
-                  <a:prstClr val="black"/>
-                </a:solidFill>
-                <a:latin typeface="Courier" pitchFamily="2" charset="0"/>
-              </a:rPr>
-              <a:t> </a:t>
-            </a:r>
-            <a:r>
-              <a:rPr lang="en-US" sz="2000" dirty="0">
-                <a:solidFill>
-                  <a:srgbClr val="666666"/>
-                </a:solidFill>
-                <a:latin typeface="Courier" pitchFamily="2" charset="0"/>
-              </a:rPr>
-              <a:t>*</a:t>
-            </a:r>
-            <a:r>
-              <a:rPr lang="en-US" sz="2000" dirty="0">
-                <a:solidFill>
-                  <a:prstClr val="black"/>
-                </a:solidFill>
-                <a:latin typeface="Courier" pitchFamily="2" charset="0"/>
-              </a:rPr>
-              <a:t>from</a:t>
-            </a:r>
-            <a:r>
-              <a:rPr lang="en-US" sz="2000" dirty="0">
-                <a:solidFill>
-                  <a:srgbClr val="666666"/>
-                </a:solidFill>
-                <a:latin typeface="Courier" pitchFamily="2" charset="0"/>
-              </a:rPr>
-              <a:t>++</a:t>
-            </a:r>
-            <a:r>
-              <a:rPr lang="en-US" sz="2000" dirty="0">
-                <a:solidFill>
-                  <a:prstClr val="black"/>
-                </a:solidFill>
-                <a:latin typeface="Courier" pitchFamily="2" charset="0"/>
-              </a:rPr>
-              <a:t>;</a:t>
-            </a:r>
-          </a:p>
-          <a:p>
-            <a:r>
-              <a:rPr lang="en-US" sz="2000" dirty="0">
-                <a:solidFill>
-                  <a:prstClr val="black"/>
-                </a:solidFill>
-                <a:latin typeface="Courier" pitchFamily="2" charset="0"/>
-              </a:rPr>
-              <a:t>		  } </a:t>
-            </a:r>
-            <a:r>
-              <a:rPr lang="en-US" sz="2000" b="1" dirty="0">
-                <a:solidFill>
-                  <a:srgbClr val="008000"/>
-                </a:solidFill>
-                <a:latin typeface="Courier-Bold" pitchFamily="2" charset="0"/>
-              </a:rPr>
-              <a:t>while</a:t>
-            </a:r>
-            <a:r>
-              <a:rPr lang="en-US" sz="2000" dirty="0">
-                <a:solidFill>
-                  <a:prstClr val="black"/>
-                </a:solidFill>
-                <a:latin typeface="Courier" pitchFamily="2" charset="0"/>
-              </a:rPr>
-              <a:t>(--n </a:t>
-            </a:r>
-            <a:r>
-              <a:rPr lang="en-US" sz="2000" dirty="0">
-                <a:solidFill>
-                  <a:srgbClr val="666666"/>
-                </a:solidFill>
-                <a:latin typeface="Courier" pitchFamily="2" charset="0"/>
-              </a:rPr>
-              <a:t>&gt;</a:t>
-            </a:r>
-            <a:r>
-              <a:rPr lang="en-US" sz="2000" dirty="0">
-                <a:solidFill>
-                  <a:prstClr val="black"/>
-                </a:solidFill>
-                <a:latin typeface="Courier" pitchFamily="2" charset="0"/>
-              </a:rPr>
-              <a:t> </a:t>
-            </a:r>
-            <a:r>
-              <a:rPr lang="en-US" sz="2000" dirty="0">
-                <a:solidFill>
-                  <a:srgbClr val="666666"/>
-                </a:solidFill>
-                <a:latin typeface="Courier" pitchFamily="2" charset="0"/>
-              </a:rPr>
-              <a:t>0</a:t>
-            </a:r>
-            <a:r>
-              <a:rPr lang="en-US" sz="2000" dirty="0">
-                <a:solidFill>
-                  <a:prstClr val="black"/>
-                </a:solidFill>
-                <a:latin typeface="Courier" pitchFamily="2" charset="0"/>
-              </a:rPr>
-              <a:t>);  </a:t>
-            </a:r>
-          </a:p>
-          <a:p>
-            <a:r>
-              <a:rPr lang="en-US" sz="2000" dirty="0">
-                <a:solidFill>
-                  <a:prstClr val="black"/>
-                </a:solidFill>
-                <a:latin typeface="Courier" pitchFamily="2" charset="0"/>
-              </a:rPr>
-              <a:t>	}</a:t>
-            </a:r>
-          </a:p>
-          <a:p>
-            <a:r>
-              <a:rPr lang="en-US" sz="2000" dirty="0">
-                <a:solidFill>
-                  <a:prstClr val="black"/>
-                </a:solidFill>
-                <a:latin typeface="Courier" pitchFamily="2" charset="0"/>
-              </a:rPr>
-              <a:t>}</a:t>
-            </a:r>
-            <a:endParaRPr lang="en-US" sz="2000" dirty="0"/>
-          </a:p>
-        </p:txBody>
-      </p:sp>
-      <p:sp>
-        <p:nvSpPr>
-          <p:cNvPr id="4" name="Slide Number Placeholder 3">
+              <a:rPr lang="en-US" dirty="0">
+                <a:solidFill>
+                  <a:schemeClr val="accent1"/>
+                </a:solidFill>
+              </a:rPr>
+              <a:t>Situation 7</a:t>
+            </a:r>
+            <a:r>
+              <a:rPr lang="en-US" dirty="0"/>
+              <a:t>: In order to remove a security hole you must make a set of non-trivial changes to the code to replace one idiom with another in your entire codebase. (Look up </a:t>
+            </a:r>
+            <a:r>
+              <a:rPr lang="en-US" dirty="0">
+                <a:hlinkClick r:id="rId2"/>
+              </a:rPr>
+              <a:t>CVE</a:t>
+            </a:r>
+            <a:r>
+              <a:rPr lang="en-US" dirty="0"/>
+              <a:t>s)</a:t>
+            </a:r>
+          </a:p>
+        </p:txBody>
+      </p:sp>
+      <p:sp>
+        <p:nvSpPr>
+          <p:cNvPr id="5" name="Slide Number Placeholder 4">
             <a:extLst>
               <a:ext uri="{FF2B5EF4-FFF2-40B4-BE49-F238E27FC236}">
-                <a16:creationId xmlns:a16="http://schemas.microsoft.com/office/drawing/2014/main" id="{8E1F2FB9-BABD-F242-85B1-6DC85958C53C}"/>
+                <a16:creationId xmlns:a16="http://schemas.microsoft.com/office/drawing/2014/main" id="{200C66D5-C963-0F44-AA2E-5CFF38C99C07}"/>
               </a:ext>
             </a:extLst>
           </p:cNvPr>
@@ -6604,8 +5206,8 @@
         </p:nvSpPr>
         <p:spPr>
           <a:xfrm>
-            <a:off x="8472457" y="4663217"/>
-            <a:ext cx="548700" cy="393525"/>
+            <a:off x="6553200" y="4767263"/>
+            <a:ext cx="2133600" cy="273825"/>
           </a:xfrm>
           <a:prstGeom prst="rect">
             <a:avLst/>
@@ -6615,25 +5217,177 @@
           <a:bodyPr/>
           <a:lstStyle/>
           <a:p>
+            <a:pPr algn="r">
+              <a:buSzPct val="25000"/>
+            </a:pPr>
             <a:fld id="{00000000-1234-1234-1234-123412341234}" type="slidenum">
-              <a:rPr lang="en-US" smtClean="0"/>
-              <a:pPr/>
+              <a:rPr lang="en-US" sz="900" smtClean="0">
+                <a:solidFill>
+                  <a:srgbClr val="888888"/>
+                </a:solidFill>
+                <a:latin typeface="Calibri"/>
+                <a:ea typeface="Calibri"/>
+                <a:cs typeface="Calibri"/>
+                <a:sym typeface="Calibri"/>
+              </a:rPr>
+              <a:pPr algn="r">
+                <a:buSzPct val="25000"/>
+              </a:pPr>
               <a:t>10</a:t>
             </a:fld>
-            <a:endParaRPr lang="en-US"/>
+            <a:endParaRPr lang="en-US" sz="900">
+              <a:solidFill>
+                <a:srgbClr val="888888"/>
+              </a:solidFill>
+              <a:latin typeface="Calibri"/>
+              <a:ea typeface="Calibri"/>
+              <a:cs typeface="Calibri"/>
+              <a:sym typeface="Calibri"/>
+            </a:endParaRPr>
           </a:p>
         </p:txBody>
       </p:sp>
     </p:spTree>
     <p:extLst>
       <p:ext uri="{BB962C8B-B14F-4D97-AF65-F5344CB8AC3E}">
-        <p14:creationId xmlns:p14="http://schemas.microsoft.com/office/powerpoint/2010/main" val="271732955"/>
+        <p14:creationId xmlns:p14="http://schemas.microsoft.com/office/powerpoint/2010/main" val="3355460447"/>
       </p:ext>
     </p:extLst>
   </p:cSld>
   <p:clrMapOvr>
     <a:masterClrMapping/>
   </p:clrMapOvr>
+  <p:timing>
+    <p:tnLst>
+      <p:par>
+        <p:cTn id="1" dur="indefinite" restart="never" nodeType="tmRoot">
+          <p:childTnLst>
+            <p:seq concurrent="1" nextAc="seek">
+              <p:cTn id="2" dur="indefinite" nodeType="mainSeq">
+                <p:childTnLst>
+                  <p:par>
+                    <p:cTn id="3" fill="hold">
+                      <p:stCondLst>
+                        <p:cond delay="indefinite"/>
+                      </p:stCondLst>
+                      <p:childTnLst>
+                        <p:par>
+                          <p:cTn id="4" fill="hold">
+                            <p:stCondLst>
+                              <p:cond delay="0"/>
+                            </p:stCondLst>
+                            <p:childTnLst>
+                              <p:par>
+                                <p:cTn id="5" presetID="1" presetClass="entr" presetSubtype="0" fill="hold" grpId="0" nodeType="clickEffect">
+                                  <p:stCondLst>
+                                    <p:cond delay="0"/>
+                                  </p:stCondLst>
+                                  <p:childTnLst>
+                                    <p:set>
+                                      <p:cBhvr>
+                                        <p:cTn id="6" dur="1" fill="hold">
+                                          <p:stCondLst>
+                                            <p:cond delay="0"/>
+                                          </p:stCondLst>
+                                        </p:cTn>
+                                        <p:tgtEl>
+                                          <p:spTgt spid="3">
+                                            <p:txEl>
+                                              <p:pRg st="0" end="0"/>
+                                            </p:txEl>
+                                          </p:spTgt>
+                                        </p:tgtEl>
+                                        <p:attrNameLst>
+                                          <p:attrName>style.visibility</p:attrName>
+                                        </p:attrNameLst>
+                                      </p:cBhvr>
+                                      <p:to>
+                                        <p:strVal val="visible"/>
+                                      </p:to>
+                                    </p:set>
+                                  </p:childTnLst>
+                                </p:cTn>
+                              </p:par>
+                            </p:childTnLst>
+                          </p:cTn>
+                        </p:par>
+                      </p:childTnLst>
+                    </p:cTn>
+                  </p:par>
+                  <p:par>
+                    <p:cTn id="7" fill="hold">
+                      <p:stCondLst>
+                        <p:cond delay="indefinite"/>
+                      </p:stCondLst>
+                      <p:childTnLst>
+                        <p:par>
+                          <p:cTn id="8" fill="hold">
+                            <p:stCondLst>
+                              <p:cond delay="0"/>
+                            </p:stCondLst>
+                            <p:childTnLst>
+                              <p:par>
+                                <p:cTn id="9" presetID="1" presetClass="entr" presetSubtype="0" fill="hold" grpId="0" nodeType="clickEffect">
+                                  <p:stCondLst>
+                                    <p:cond delay="0"/>
+                                  </p:stCondLst>
+                                  <p:childTnLst>
+                                    <p:set>
+                                      <p:cBhvr>
+                                        <p:cTn id="10" dur="1" fill="hold">
+                                          <p:stCondLst>
+                                            <p:cond delay="0"/>
+                                          </p:stCondLst>
+                                        </p:cTn>
+                                        <p:tgtEl>
+                                          <p:spTgt spid="3">
+                                            <p:txEl>
+                                              <p:pRg st="1" end="1"/>
+                                            </p:txEl>
+                                          </p:spTgt>
+                                        </p:tgtEl>
+                                        <p:attrNameLst>
+                                          <p:attrName>style.visibility</p:attrName>
+                                        </p:attrNameLst>
+                                      </p:cBhvr>
+                                      <p:to>
+                                        <p:strVal val="visible"/>
+                                      </p:to>
+                                    </p:set>
+                                  </p:childTnLst>
+                                </p:cTn>
+                              </p:par>
+                            </p:childTnLst>
+                          </p:cTn>
+                        </p:par>
+                      </p:childTnLst>
+                    </p:cTn>
+                  </p:par>
+                </p:childTnLst>
+              </p:cTn>
+              <p:prevCondLst>
+                <p:cond evt="onPrev" delay="0">
+                  <p:tgtEl>
+                    <p:sldTgt/>
+                  </p:tgtEl>
+                </p:cond>
+              </p:prevCondLst>
+              <p:nextCondLst>
+                <p:cond evt="onNext" delay="0">
+                  <p:tgtEl>
+                    <p:sldTgt/>
+                  </p:tgtEl>
+                </p:cond>
+              </p:nextCondLst>
+            </p:seq>
+          </p:childTnLst>
+        </p:cTn>
+      </p:par>
+    </p:tnLst>
+    <p:bldLst>
+      <p:bldP spid="3" grpId="0" build="p"/>
+    </p:bldLst>
+  </p:timing>
 </p:sld>
 </file>
 
@@ -6659,6 +5413,2063 @@
           <p:cNvPr id="2" name="Title 1">
             <a:extLst>
               <a:ext uri="{FF2B5EF4-FFF2-40B4-BE49-F238E27FC236}">
+                <a16:creationId xmlns:a16="http://schemas.microsoft.com/office/drawing/2014/main" id="{C4D738FD-F0F1-224E-9315-83082A3FC3AA}"/>
+              </a:ext>
+            </a:extLst>
+          </p:cNvPr>
+          <p:cNvSpPr>
+            <a:spLocks noGrp="1"/>
+          </p:cNvSpPr>
+          <p:nvPr>
+            <p:ph type="title"/>
+          </p:nvPr>
+        </p:nvSpPr>
+        <p:spPr/>
+        <p:txBody>
+          <a:bodyPr>
+            <a:normAutofit fontScale="90000"/>
+          </a:bodyPr>
+          <a:lstStyle/>
+          <a:p>
+            <a:r>
+              <a:rPr lang="en-US" dirty="0">
+                <a:latin typeface="Calibri"/>
+                <a:ea typeface="Calibri"/>
+                <a:cs typeface="Calibri"/>
+                <a:sym typeface="Calibri"/>
+              </a:rPr>
+              <a:t>Do you really know how programming languages work?</a:t>
+            </a:r>
+            <a:endParaRPr lang="en-US" dirty="0"/>
+          </a:p>
+        </p:txBody>
+      </p:sp>
+      <p:sp>
+        <p:nvSpPr>
+          <p:cNvPr id="6" name="Slide Number Placeholder 5">
+            <a:extLst>
+              <a:ext uri="{FF2B5EF4-FFF2-40B4-BE49-F238E27FC236}">
+                <a16:creationId xmlns:a16="http://schemas.microsoft.com/office/drawing/2014/main" id="{DE0E230D-EBCA-6B4A-9603-BC403763CB08}"/>
+              </a:ext>
+            </a:extLst>
+          </p:cNvPr>
+          <p:cNvSpPr>
+            <a:spLocks noGrp="1"/>
+          </p:cNvSpPr>
+          <p:nvPr>
+            <p:ph type="sldNum" sz="quarter" idx="12"/>
+          </p:nvPr>
+        </p:nvSpPr>
+        <p:spPr>
+          <a:xfrm>
+            <a:off x="8472457" y="4663217"/>
+            <a:ext cx="548700" cy="393525"/>
+          </a:xfrm>
+          <a:prstGeom prst="rect">
+            <a:avLst/>
+          </a:prstGeom>
+        </p:spPr>
+        <p:txBody>
+          <a:bodyPr/>
+          <a:lstStyle/>
+          <a:p>
+            <a:fld id="{00000000-1234-1234-1234-123412341234}" type="slidenum">
+              <a:rPr lang="en-US" smtClean="0"/>
+              <a:pPr/>
+              <a:t>11</a:t>
+            </a:fld>
+            <a:endParaRPr lang="en-US"/>
+          </a:p>
+        </p:txBody>
+      </p:sp>
+      <p:sp>
+        <p:nvSpPr>
+          <p:cNvPr id="5" name="Shape 133">
+            <a:extLst>
+              <a:ext uri="{FF2B5EF4-FFF2-40B4-BE49-F238E27FC236}">
+                <a16:creationId xmlns:a16="http://schemas.microsoft.com/office/drawing/2014/main" id="{116A0DCA-3395-2C46-9622-CBB29B059604}"/>
+              </a:ext>
+            </a:extLst>
+          </p:cNvPr>
+          <p:cNvSpPr txBox="1"/>
+          <p:nvPr/>
+        </p:nvSpPr>
+        <p:spPr>
+          <a:xfrm>
+            <a:off x="553415" y="1659642"/>
+            <a:ext cx="8037170" cy="2361582"/>
+          </a:xfrm>
+          <a:prstGeom prst="rect">
+            <a:avLst/>
+          </a:prstGeom>
+          <a:noFill/>
+          <a:ln>
+            <a:noFill/>
+          </a:ln>
+        </p:spPr>
+        <p:txBody>
+          <a:bodyPr lIns="68569" tIns="34275" rIns="68569" bIns="34275" anchor="t" anchorCtr="0">
+            <a:noAutofit/>
+          </a:bodyPr>
+          <a:lstStyle/>
+          <a:p>
+            <a:r>
+              <a:rPr lang="en-US" sz="2400" dirty="0">
+                <a:solidFill>
+                  <a:srgbClr val="B00040"/>
+                </a:solidFill>
+                <a:latin typeface="Courier" pitchFamily="2" charset="0"/>
+              </a:rPr>
+              <a:t>void</a:t>
+            </a:r>
+            <a:r>
+              <a:rPr lang="en-US" sz="2400" dirty="0">
+                <a:solidFill>
+                  <a:prstClr val="black"/>
+                </a:solidFill>
+                <a:latin typeface="Courier" pitchFamily="2" charset="0"/>
+              </a:rPr>
+              <a:t> </a:t>
+            </a:r>
+            <a:r>
+              <a:rPr lang="en-US" sz="2400" dirty="0">
+                <a:solidFill>
+                  <a:srgbClr val="0000FF"/>
+                </a:solidFill>
+                <a:latin typeface="Courier" pitchFamily="2" charset="0"/>
+              </a:rPr>
+              <a:t>send</a:t>
+            </a:r>
+            <a:r>
+              <a:rPr lang="en-US" sz="2400" dirty="0">
+                <a:solidFill>
+                  <a:prstClr val="black"/>
+                </a:solidFill>
+                <a:latin typeface="Courier" pitchFamily="2" charset="0"/>
+              </a:rPr>
+              <a:t> (</a:t>
+            </a:r>
+            <a:r>
+              <a:rPr lang="en-US" sz="2400" dirty="0">
+                <a:solidFill>
+                  <a:srgbClr val="B00040"/>
+                </a:solidFill>
+                <a:latin typeface="Courier" pitchFamily="2" charset="0"/>
+              </a:rPr>
+              <a:t>char</a:t>
+            </a:r>
+            <a:r>
+              <a:rPr lang="en-US" sz="2400" dirty="0">
+                <a:solidFill>
+                  <a:prstClr val="black"/>
+                </a:solidFill>
+                <a:latin typeface="Courier" pitchFamily="2" charset="0"/>
+              </a:rPr>
+              <a:t> </a:t>
+            </a:r>
+            <a:r>
+              <a:rPr lang="en-US" sz="2400" dirty="0">
+                <a:solidFill>
+                  <a:srgbClr val="666666"/>
+                </a:solidFill>
+                <a:latin typeface="Courier" pitchFamily="2" charset="0"/>
+              </a:rPr>
+              <a:t>*</a:t>
+            </a:r>
+            <a:r>
+              <a:rPr lang="en-US" sz="2400" dirty="0">
+                <a:solidFill>
+                  <a:prstClr val="black"/>
+                </a:solidFill>
+                <a:latin typeface="Courier" pitchFamily="2" charset="0"/>
+              </a:rPr>
+              <a:t>to, </a:t>
+            </a:r>
+            <a:r>
+              <a:rPr lang="en-US" sz="2400" dirty="0">
+                <a:solidFill>
+                  <a:srgbClr val="B00040"/>
+                </a:solidFill>
+                <a:latin typeface="Courier" pitchFamily="2" charset="0"/>
+              </a:rPr>
+              <a:t>char</a:t>
+            </a:r>
+            <a:r>
+              <a:rPr lang="en-US" sz="2400" dirty="0">
+                <a:solidFill>
+                  <a:prstClr val="black"/>
+                </a:solidFill>
+                <a:latin typeface="Courier" pitchFamily="2" charset="0"/>
+              </a:rPr>
+              <a:t> </a:t>
+            </a:r>
+            <a:r>
+              <a:rPr lang="en-US" sz="2400" dirty="0">
+                <a:solidFill>
+                  <a:srgbClr val="666666"/>
+                </a:solidFill>
+                <a:latin typeface="Courier" pitchFamily="2" charset="0"/>
+              </a:rPr>
+              <a:t>*</a:t>
+            </a:r>
+            <a:r>
+              <a:rPr lang="en-US" sz="2400" dirty="0">
+                <a:solidFill>
+                  <a:prstClr val="black"/>
+                </a:solidFill>
+                <a:latin typeface="Courier" pitchFamily="2" charset="0"/>
+              </a:rPr>
+              <a:t>from, </a:t>
+            </a:r>
+            <a:r>
+              <a:rPr lang="en-US" sz="2400" dirty="0">
+                <a:solidFill>
+                  <a:srgbClr val="B00040"/>
+                </a:solidFill>
+                <a:latin typeface="Courier" pitchFamily="2" charset="0"/>
+              </a:rPr>
+              <a:t>int</a:t>
+            </a:r>
+            <a:r>
+              <a:rPr lang="en-US" sz="2400" dirty="0">
+                <a:solidFill>
+                  <a:prstClr val="black"/>
+                </a:solidFill>
+                <a:latin typeface="Courier" pitchFamily="2" charset="0"/>
+              </a:rPr>
+              <a:t> count)</a:t>
+            </a:r>
+          </a:p>
+          <a:p>
+            <a:r>
+              <a:rPr lang="en-US" sz="2400" dirty="0">
+                <a:solidFill>
+                  <a:prstClr val="black"/>
+                </a:solidFill>
+                <a:latin typeface="Courier" pitchFamily="2" charset="0"/>
+              </a:rPr>
+              <a:t>{  </a:t>
+            </a:r>
+          </a:p>
+          <a:p>
+            <a:r>
+              <a:rPr lang="en-US" sz="2400" b="1" dirty="0">
+                <a:solidFill>
+                  <a:prstClr val="black"/>
+                </a:solidFill>
+                <a:latin typeface="Courier" pitchFamily="2" charset="0"/>
+              </a:rPr>
+              <a:t>	</a:t>
+            </a:r>
+            <a:r>
+              <a:rPr lang="en-US" sz="2400" b="1" dirty="0">
+                <a:solidFill>
+                  <a:srgbClr val="008000"/>
+                </a:solidFill>
+                <a:latin typeface="Courier-Bold" pitchFamily="2" charset="0"/>
+              </a:rPr>
+              <a:t>while</a:t>
+            </a:r>
+            <a:r>
+              <a:rPr lang="en-US" sz="2400" dirty="0">
+                <a:solidFill>
+                  <a:prstClr val="black"/>
+                </a:solidFill>
+                <a:latin typeface="Courier" pitchFamily="2" charset="0"/>
+              </a:rPr>
+              <a:t> (count</a:t>
+            </a:r>
+            <a:r>
+              <a:rPr lang="en-US" sz="2400" dirty="0">
+                <a:solidFill>
+                  <a:srgbClr val="666666"/>
+                </a:solidFill>
+                <a:latin typeface="Courier" pitchFamily="2" charset="0"/>
+              </a:rPr>
+              <a:t>--</a:t>
+            </a:r>
+            <a:r>
+              <a:rPr lang="en-US" sz="2400" dirty="0">
+                <a:solidFill>
+                  <a:prstClr val="black"/>
+                </a:solidFill>
+                <a:latin typeface="Courier" pitchFamily="2" charset="0"/>
+              </a:rPr>
+              <a:t> </a:t>
+            </a:r>
+            <a:r>
+              <a:rPr lang="en-US" sz="2400" dirty="0">
+                <a:solidFill>
+                  <a:srgbClr val="666666"/>
+                </a:solidFill>
+                <a:latin typeface="Courier" pitchFamily="2" charset="0"/>
+              </a:rPr>
+              <a:t>&gt;</a:t>
+            </a:r>
+            <a:r>
+              <a:rPr lang="en-US" sz="2400" dirty="0">
+                <a:solidFill>
+                  <a:prstClr val="black"/>
+                </a:solidFill>
+                <a:latin typeface="Courier" pitchFamily="2" charset="0"/>
+              </a:rPr>
+              <a:t> </a:t>
+            </a:r>
+            <a:r>
+              <a:rPr lang="en-US" sz="2400" dirty="0">
+                <a:solidFill>
+                  <a:srgbClr val="666666"/>
+                </a:solidFill>
+                <a:latin typeface="Courier" pitchFamily="2" charset="0"/>
+              </a:rPr>
+              <a:t>0</a:t>
+            </a:r>
+            <a:r>
+              <a:rPr lang="en-US" sz="2400" dirty="0">
+                <a:solidFill>
+                  <a:prstClr val="black"/>
+                </a:solidFill>
+                <a:latin typeface="Courier" pitchFamily="2" charset="0"/>
+              </a:rPr>
+              <a:t>)</a:t>
+            </a:r>
+          </a:p>
+          <a:p>
+            <a:r>
+              <a:rPr lang="en-US" sz="2400" dirty="0">
+                <a:solidFill>
+                  <a:prstClr val="black"/>
+                </a:solidFill>
+                <a:latin typeface="Courier" pitchFamily="2" charset="0"/>
+              </a:rPr>
+              <a:t>		</a:t>
+            </a:r>
+            <a:r>
+              <a:rPr lang="en-US" sz="2400" dirty="0">
+                <a:solidFill>
+                  <a:srgbClr val="666666"/>
+                </a:solidFill>
+                <a:latin typeface="Courier" pitchFamily="2" charset="0"/>
+              </a:rPr>
+              <a:t>*</a:t>
+            </a:r>
+            <a:r>
+              <a:rPr lang="en-US" sz="2400" dirty="0">
+                <a:solidFill>
+                  <a:prstClr val="black"/>
+                </a:solidFill>
+                <a:latin typeface="Courier" pitchFamily="2" charset="0"/>
+              </a:rPr>
+              <a:t>to</a:t>
+            </a:r>
+            <a:r>
+              <a:rPr lang="en-US" sz="2400" dirty="0">
+                <a:solidFill>
+                  <a:srgbClr val="666666"/>
+                </a:solidFill>
+                <a:latin typeface="Courier" pitchFamily="2" charset="0"/>
+              </a:rPr>
+              <a:t>++</a:t>
+            </a:r>
+            <a:r>
+              <a:rPr lang="en-US" sz="2400" dirty="0">
+                <a:solidFill>
+                  <a:prstClr val="black"/>
+                </a:solidFill>
+                <a:latin typeface="Courier" pitchFamily="2" charset="0"/>
+              </a:rPr>
+              <a:t> </a:t>
+            </a:r>
+            <a:r>
+              <a:rPr lang="en-US" sz="2400" dirty="0">
+                <a:solidFill>
+                  <a:srgbClr val="666666"/>
+                </a:solidFill>
+                <a:latin typeface="Courier" pitchFamily="2" charset="0"/>
+              </a:rPr>
+              <a:t>=</a:t>
+            </a:r>
+            <a:r>
+              <a:rPr lang="en-US" sz="2400" dirty="0">
+                <a:solidFill>
+                  <a:prstClr val="black"/>
+                </a:solidFill>
+                <a:latin typeface="Courier" pitchFamily="2" charset="0"/>
+              </a:rPr>
+              <a:t> </a:t>
+            </a:r>
+            <a:r>
+              <a:rPr lang="en-US" sz="2400" dirty="0">
+                <a:solidFill>
+                  <a:srgbClr val="666666"/>
+                </a:solidFill>
+                <a:latin typeface="Courier" pitchFamily="2" charset="0"/>
+              </a:rPr>
+              <a:t>*</a:t>
+            </a:r>
+            <a:r>
+              <a:rPr lang="en-US" sz="2400" dirty="0">
+                <a:solidFill>
+                  <a:prstClr val="black"/>
+                </a:solidFill>
+                <a:latin typeface="Courier" pitchFamily="2" charset="0"/>
+              </a:rPr>
+              <a:t>from</a:t>
+            </a:r>
+            <a:r>
+              <a:rPr lang="en-US" sz="2400" dirty="0">
+                <a:solidFill>
+                  <a:srgbClr val="666666"/>
+                </a:solidFill>
+                <a:latin typeface="Courier" pitchFamily="2" charset="0"/>
+              </a:rPr>
+              <a:t>++</a:t>
+            </a:r>
+            <a:r>
+              <a:rPr lang="en-US" sz="2400" dirty="0">
+                <a:solidFill>
+                  <a:prstClr val="black"/>
+                </a:solidFill>
+                <a:latin typeface="Courier" pitchFamily="2" charset="0"/>
+              </a:rPr>
+              <a:t>;</a:t>
+            </a:r>
+          </a:p>
+          <a:p>
+            <a:r>
+              <a:rPr lang="en-US" sz="2400" dirty="0">
+                <a:solidFill>
+                  <a:prstClr val="black"/>
+                </a:solidFill>
+                <a:latin typeface="Courier" pitchFamily="2" charset="0"/>
+              </a:rPr>
+              <a:t>}</a:t>
+            </a:r>
+            <a:endParaRPr lang="en-CA" sz="2400" dirty="0"/>
+          </a:p>
+        </p:txBody>
+      </p:sp>
+    </p:spTree>
+    <p:extLst>
+      <p:ext uri="{BB962C8B-B14F-4D97-AF65-F5344CB8AC3E}">
+        <p14:creationId xmlns:p14="http://schemas.microsoft.com/office/powerpoint/2010/main" val="2554529176"/>
+      </p:ext>
+    </p:extLst>
+  </p:cSld>
+  <p:clrMapOvr>
+    <a:masterClrMapping/>
+  </p:clrMapOvr>
+</p:sld>
+</file>
+
+<file path=ppt/slides/slide12.xml><?xml version="1.0" encoding="utf-8"?>
+<p:sld xmlns:a="http://schemas.openxmlformats.org/drawingml/2006/main" xmlns:r="http://schemas.openxmlformats.org/officeDocument/2006/relationships" xmlns:p="http://schemas.openxmlformats.org/presentationml/2006/main">
+  <p:cSld>
+    <p:spTree>
+      <p:nvGrpSpPr>
+        <p:cNvPr id="1" name=""/>
+        <p:cNvGrpSpPr/>
+        <p:nvPr/>
+      </p:nvGrpSpPr>
+      <p:grpSpPr>
+        <a:xfrm>
+          <a:off x="0" y="0"/>
+          <a:ext cx="0" cy="0"/>
+          <a:chOff x="0" y="0"/>
+          <a:chExt cx="0" cy="0"/>
+        </a:xfrm>
+      </p:grpSpPr>
+      <p:sp>
+        <p:nvSpPr>
+          <p:cNvPr id="3" name="TextBox 2">
+            <a:extLst>
+              <a:ext uri="{FF2B5EF4-FFF2-40B4-BE49-F238E27FC236}">
+                <a16:creationId xmlns:a16="http://schemas.microsoft.com/office/drawing/2014/main" id="{C231BD23-3C23-8249-9F67-F9D87F408314}"/>
+              </a:ext>
+            </a:extLst>
+          </p:cNvPr>
+          <p:cNvSpPr txBox="1"/>
+          <p:nvPr/>
+        </p:nvSpPr>
+        <p:spPr>
+          <a:xfrm>
+            <a:off x="709404" y="150998"/>
+            <a:ext cx="6955750" cy="4708981"/>
+          </a:xfrm>
+          <a:prstGeom prst="rect">
+            <a:avLst/>
+          </a:prstGeom>
+          <a:noFill/>
+        </p:spPr>
+        <p:txBody>
+          <a:bodyPr wrap="none" rtlCol="0">
+            <a:spAutoFit/>
+          </a:bodyPr>
+          <a:lstStyle/>
+          <a:p>
+            <a:r>
+              <a:rPr lang="en-US" sz="2000" dirty="0">
+                <a:solidFill>
+                  <a:srgbClr val="B00040"/>
+                </a:solidFill>
+                <a:latin typeface="Courier" pitchFamily="2" charset="0"/>
+              </a:rPr>
+              <a:t>void</a:t>
+            </a:r>
+            <a:r>
+              <a:rPr lang="en-US" sz="2000" dirty="0">
+                <a:solidFill>
+                  <a:prstClr val="black"/>
+                </a:solidFill>
+                <a:latin typeface="Courier" pitchFamily="2" charset="0"/>
+              </a:rPr>
+              <a:t> </a:t>
+            </a:r>
+            <a:r>
+              <a:rPr lang="en-US" sz="2000" dirty="0">
+                <a:solidFill>
+                  <a:srgbClr val="0000FF"/>
+                </a:solidFill>
+                <a:latin typeface="Courier" pitchFamily="2" charset="0"/>
+              </a:rPr>
+              <a:t>send2</a:t>
+            </a:r>
+            <a:r>
+              <a:rPr lang="en-US" sz="2000" dirty="0">
+                <a:solidFill>
+                  <a:prstClr val="black"/>
+                </a:solidFill>
+                <a:latin typeface="Courier" pitchFamily="2" charset="0"/>
+              </a:rPr>
+              <a:t> (</a:t>
+            </a:r>
+            <a:r>
+              <a:rPr lang="en-US" sz="2000" dirty="0">
+                <a:solidFill>
+                  <a:srgbClr val="B00040"/>
+                </a:solidFill>
+                <a:latin typeface="Courier" pitchFamily="2" charset="0"/>
+              </a:rPr>
+              <a:t>char</a:t>
+            </a:r>
+            <a:r>
+              <a:rPr lang="en-US" sz="2000" dirty="0">
+                <a:solidFill>
+                  <a:prstClr val="black"/>
+                </a:solidFill>
+                <a:latin typeface="Courier" pitchFamily="2" charset="0"/>
+              </a:rPr>
+              <a:t> </a:t>
+            </a:r>
+            <a:r>
+              <a:rPr lang="en-US" sz="2000" dirty="0">
+                <a:solidFill>
+                  <a:srgbClr val="666666"/>
+                </a:solidFill>
+                <a:latin typeface="Courier" pitchFamily="2" charset="0"/>
+              </a:rPr>
+              <a:t>*</a:t>
+            </a:r>
+            <a:r>
+              <a:rPr lang="en-US" sz="2000" dirty="0">
+                <a:solidFill>
+                  <a:prstClr val="black"/>
+                </a:solidFill>
+                <a:latin typeface="Courier" pitchFamily="2" charset="0"/>
+              </a:rPr>
+              <a:t>to, </a:t>
+            </a:r>
+            <a:r>
+              <a:rPr lang="en-US" sz="2000" dirty="0">
+                <a:solidFill>
+                  <a:srgbClr val="B00040"/>
+                </a:solidFill>
+                <a:latin typeface="Courier" pitchFamily="2" charset="0"/>
+              </a:rPr>
+              <a:t>char</a:t>
+            </a:r>
+            <a:r>
+              <a:rPr lang="en-US" sz="2000" dirty="0">
+                <a:solidFill>
+                  <a:prstClr val="black"/>
+                </a:solidFill>
+                <a:latin typeface="Courier" pitchFamily="2" charset="0"/>
+              </a:rPr>
+              <a:t> </a:t>
+            </a:r>
+            <a:r>
+              <a:rPr lang="en-US" sz="2000" dirty="0">
+                <a:solidFill>
+                  <a:srgbClr val="666666"/>
+                </a:solidFill>
+                <a:latin typeface="Courier" pitchFamily="2" charset="0"/>
+              </a:rPr>
+              <a:t>*</a:t>
+            </a:r>
+            <a:r>
+              <a:rPr lang="en-US" sz="2000" dirty="0">
+                <a:solidFill>
+                  <a:prstClr val="black"/>
+                </a:solidFill>
+                <a:latin typeface="Courier" pitchFamily="2" charset="0"/>
+              </a:rPr>
+              <a:t>from, </a:t>
+            </a:r>
+            <a:r>
+              <a:rPr lang="en-US" sz="2000" dirty="0">
+                <a:solidFill>
+                  <a:srgbClr val="B00040"/>
+                </a:solidFill>
+                <a:latin typeface="Courier" pitchFamily="2" charset="0"/>
+              </a:rPr>
+              <a:t>int</a:t>
+            </a:r>
+            <a:r>
+              <a:rPr lang="en-US" sz="2000" dirty="0">
+                <a:solidFill>
+                  <a:prstClr val="black"/>
+                </a:solidFill>
+                <a:latin typeface="Courier" pitchFamily="2" charset="0"/>
+              </a:rPr>
+              <a:t> count)</a:t>
+            </a:r>
+          </a:p>
+          <a:p>
+            <a:r>
+              <a:rPr lang="en-US" sz="2000" dirty="0">
+                <a:solidFill>
+                  <a:prstClr val="black"/>
+                </a:solidFill>
+                <a:latin typeface="Courier" pitchFamily="2" charset="0"/>
+              </a:rPr>
+              <a:t>{  </a:t>
+            </a:r>
+          </a:p>
+          <a:p>
+            <a:r>
+              <a:rPr lang="en-US" sz="2000" dirty="0">
+                <a:solidFill>
+                  <a:prstClr val="black"/>
+                </a:solidFill>
+                <a:latin typeface="Courier" pitchFamily="2" charset="0"/>
+              </a:rPr>
+              <a:t>	</a:t>
+            </a:r>
+            <a:r>
+              <a:rPr lang="en-US" sz="2000" dirty="0">
+                <a:solidFill>
+                  <a:srgbClr val="B00040"/>
+                </a:solidFill>
+                <a:latin typeface="Courier" pitchFamily="2" charset="0"/>
+              </a:rPr>
+              <a:t>int</a:t>
+            </a:r>
+            <a:r>
+              <a:rPr lang="en-US" sz="2000" dirty="0">
+                <a:solidFill>
+                  <a:prstClr val="black"/>
+                </a:solidFill>
+                <a:latin typeface="Courier" pitchFamily="2" charset="0"/>
+              </a:rPr>
+              <a:t> n </a:t>
+            </a:r>
+            <a:r>
+              <a:rPr lang="en-US" sz="2000" dirty="0">
+                <a:solidFill>
+                  <a:srgbClr val="666666"/>
+                </a:solidFill>
+                <a:latin typeface="Courier" pitchFamily="2" charset="0"/>
+              </a:rPr>
+              <a:t>=</a:t>
+            </a:r>
+            <a:r>
+              <a:rPr lang="en-US" sz="2000" dirty="0">
+                <a:solidFill>
+                  <a:prstClr val="black"/>
+                </a:solidFill>
+                <a:latin typeface="Courier" pitchFamily="2" charset="0"/>
+              </a:rPr>
+              <a:t> (count</a:t>
+            </a:r>
+            <a:r>
+              <a:rPr lang="en-US" sz="2000" dirty="0">
+                <a:solidFill>
+                  <a:srgbClr val="666666"/>
+                </a:solidFill>
+                <a:latin typeface="Courier" pitchFamily="2" charset="0"/>
+              </a:rPr>
+              <a:t>+7</a:t>
+            </a:r>
+            <a:r>
+              <a:rPr lang="en-US" sz="2000" dirty="0">
+                <a:solidFill>
+                  <a:prstClr val="black"/>
+                </a:solidFill>
+                <a:latin typeface="Courier" pitchFamily="2" charset="0"/>
+              </a:rPr>
+              <a:t>)</a:t>
+            </a:r>
+            <a:r>
+              <a:rPr lang="en-US" sz="2000" dirty="0">
+                <a:solidFill>
+                  <a:srgbClr val="666666"/>
+                </a:solidFill>
+                <a:latin typeface="Courier" pitchFamily="2" charset="0"/>
+              </a:rPr>
+              <a:t>/8</a:t>
+            </a:r>
+            <a:r>
+              <a:rPr lang="en-US" sz="2000" dirty="0">
+                <a:solidFill>
+                  <a:prstClr val="black"/>
+                </a:solidFill>
+                <a:latin typeface="Courier" pitchFamily="2" charset="0"/>
+              </a:rPr>
+              <a:t>;  </a:t>
+            </a:r>
+          </a:p>
+          <a:p>
+            <a:r>
+              <a:rPr lang="en-US" sz="2000" b="1" dirty="0">
+                <a:solidFill>
+                  <a:prstClr val="black"/>
+                </a:solidFill>
+                <a:latin typeface="Courier" pitchFamily="2" charset="0"/>
+              </a:rPr>
+              <a:t>	</a:t>
+            </a:r>
+            <a:r>
+              <a:rPr lang="en-US" sz="2000" b="1" dirty="0">
+                <a:solidFill>
+                  <a:srgbClr val="008000"/>
+                </a:solidFill>
+                <a:latin typeface="Courier-Bold" pitchFamily="2" charset="0"/>
+              </a:rPr>
+              <a:t>switch</a:t>
+            </a:r>
+            <a:r>
+              <a:rPr lang="en-US" sz="2000" dirty="0">
+                <a:solidFill>
+                  <a:prstClr val="black"/>
+                </a:solidFill>
+                <a:latin typeface="Courier" pitchFamily="2" charset="0"/>
+              </a:rPr>
+              <a:t> (count </a:t>
+            </a:r>
+            <a:r>
+              <a:rPr lang="en-US" sz="2000" dirty="0">
+                <a:solidFill>
+                  <a:srgbClr val="666666"/>
+                </a:solidFill>
+                <a:latin typeface="Courier" pitchFamily="2" charset="0"/>
+              </a:rPr>
+              <a:t>%</a:t>
+            </a:r>
+            <a:r>
+              <a:rPr lang="en-US" sz="2000" dirty="0">
+                <a:solidFill>
+                  <a:prstClr val="black"/>
+                </a:solidFill>
+                <a:latin typeface="Courier" pitchFamily="2" charset="0"/>
+              </a:rPr>
+              <a:t> </a:t>
+            </a:r>
+            <a:r>
+              <a:rPr lang="en-US" sz="2000" dirty="0">
+                <a:solidFill>
+                  <a:srgbClr val="666666"/>
+                </a:solidFill>
+                <a:latin typeface="Courier" pitchFamily="2" charset="0"/>
+              </a:rPr>
+              <a:t>8</a:t>
+            </a:r>
+            <a:r>
+              <a:rPr lang="en-US" sz="2000" dirty="0">
+                <a:solidFill>
+                  <a:prstClr val="black"/>
+                </a:solidFill>
+                <a:latin typeface="Courier" pitchFamily="2" charset="0"/>
+              </a:rPr>
+              <a:t>) {  </a:t>
+            </a:r>
+          </a:p>
+          <a:p>
+            <a:r>
+              <a:rPr lang="en-US" sz="2000" b="1" dirty="0">
+                <a:solidFill>
+                  <a:prstClr val="black"/>
+                </a:solidFill>
+                <a:latin typeface="Courier" pitchFamily="2" charset="0"/>
+              </a:rPr>
+              <a:t>	</a:t>
+            </a:r>
+            <a:r>
+              <a:rPr lang="en-US" sz="2000" b="1" dirty="0">
+                <a:solidFill>
+                  <a:srgbClr val="008000"/>
+                </a:solidFill>
+                <a:latin typeface="Courier-Bold" pitchFamily="2" charset="0"/>
+              </a:rPr>
+              <a:t>case</a:t>
+            </a:r>
+            <a:r>
+              <a:rPr lang="en-US" sz="2000" dirty="0">
+                <a:solidFill>
+                  <a:prstClr val="black"/>
+                </a:solidFill>
+                <a:latin typeface="Courier" pitchFamily="2" charset="0"/>
+              </a:rPr>
+              <a:t> </a:t>
+            </a:r>
+            <a:r>
+              <a:rPr lang="en-US" sz="2000" dirty="0">
+                <a:solidFill>
+                  <a:srgbClr val="666666"/>
+                </a:solidFill>
+                <a:latin typeface="Courier" pitchFamily="2" charset="0"/>
+              </a:rPr>
+              <a:t>0:</a:t>
+            </a:r>
+            <a:r>
+              <a:rPr lang="en-US" sz="2000" dirty="0">
+                <a:solidFill>
+                  <a:prstClr val="black"/>
+                </a:solidFill>
+                <a:latin typeface="Courier" pitchFamily="2" charset="0"/>
+              </a:rPr>
+              <a:t> </a:t>
+            </a:r>
+            <a:r>
+              <a:rPr lang="en-US" sz="2000" b="1" dirty="0">
+                <a:solidFill>
+                  <a:srgbClr val="008000"/>
+                </a:solidFill>
+                <a:latin typeface="Courier-Bold" pitchFamily="2" charset="0"/>
+              </a:rPr>
+              <a:t>do </a:t>
+            </a:r>
+            <a:r>
+              <a:rPr lang="en-US" sz="2000" dirty="0">
+                <a:solidFill>
+                  <a:prstClr val="black"/>
+                </a:solidFill>
+                <a:latin typeface="Courier" pitchFamily="2" charset="0"/>
+              </a:rPr>
+              <a:t>{ </a:t>
+            </a:r>
+            <a:r>
+              <a:rPr lang="en-US" sz="2000" dirty="0">
+                <a:solidFill>
+                  <a:srgbClr val="666666"/>
+                </a:solidFill>
+                <a:latin typeface="Courier" pitchFamily="2" charset="0"/>
+              </a:rPr>
+              <a:t>*</a:t>
+            </a:r>
+            <a:r>
+              <a:rPr lang="en-US" sz="2000" dirty="0">
+                <a:solidFill>
+                  <a:prstClr val="black"/>
+                </a:solidFill>
+                <a:latin typeface="Courier" pitchFamily="2" charset="0"/>
+              </a:rPr>
+              <a:t>to</a:t>
+            </a:r>
+            <a:r>
+              <a:rPr lang="en-US" sz="2000" dirty="0">
+                <a:solidFill>
+                  <a:srgbClr val="666666"/>
+                </a:solidFill>
+                <a:latin typeface="Courier" pitchFamily="2" charset="0"/>
+              </a:rPr>
+              <a:t>++</a:t>
+            </a:r>
+            <a:r>
+              <a:rPr lang="en-US" sz="2000" dirty="0">
+                <a:solidFill>
+                  <a:prstClr val="black"/>
+                </a:solidFill>
+                <a:latin typeface="Courier" pitchFamily="2" charset="0"/>
+              </a:rPr>
+              <a:t> </a:t>
+            </a:r>
+            <a:r>
+              <a:rPr lang="en-US" sz="2000" dirty="0">
+                <a:solidFill>
+                  <a:srgbClr val="666666"/>
+                </a:solidFill>
+                <a:latin typeface="Courier" pitchFamily="2" charset="0"/>
+              </a:rPr>
+              <a:t>=</a:t>
+            </a:r>
+            <a:r>
+              <a:rPr lang="en-US" sz="2000" dirty="0">
+                <a:solidFill>
+                  <a:prstClr val="black"/>
+                </a:solidFill>
+                <a:latin typeface="Courier" pitchFamily="2" charset="0"/>
+              </a:rPr>
+              <a:t> </a:t>
+            </a:r>
+            <a:r>
+              <a:rPr lang="en-US" sz="2000" dirty="0">
+                <a:solidFill>
+                  <a:srgbClr val="666666"/>
+                </a:solidFill>
+                <a:latin typeface="Courier" pitchFamily="2" charset="0"/>
+              </a:rPr>
+              <a:t>*</a:t>
+            </a:r>
+            <a:r>
+              <a:rPr lang="en-US" sz="2000" dirty="0">
+                <a:solidFill>
+                  <a:prstClr val="black"/>
+                </a:solidFill>
+                <a:latin typeface="Courier" pitchFamily="2" charset="0"/>
+              </a:rPr>
+              <a:t>from</a:t>
+            </a:r>
+            <a:r>
+              <a:rPr lang="en-US" sz="2000" dirty="0">
+                <a:solidFill>
+                  <a:srgbClr val="666666"/>
+                </a:solidFill>
+                <a:latin typeface="Courier" pitchFamily="2" charset="0"/>
+              </a:rPr>
+              <a:t>++</a:t>
+            </a:r>
+            <a:r>
+              <a:rPr lang="en-US" sz="2000" dirty="0">
+                <a:solidFill>
+                  <a:prstClr val="black"/>
+                </a:solidFill>
+                <a:latin typeface="Courier" pitchFamily="2" charset="0"/>
+              </a:rPr>
+              <a:t>;  </a:t>
+            </a:r>
+          </a:p>
+          <a:p>
+            <a:r>
+              <a:rPr lang="en-US" sz="2000" b="1" dirty="0">
+                <a:solidFill>
+                  <a:prstClr val="black"/>
+                </a:solidFill>
+                <a:latin typeface="Courier" pitchFamily="2" charset="0"/>
+              </a:rPr>
+              <a:t>	</a:t>
+            </a:r>
+            <a:r>
+              <a:rPr lang="en-US" sz="2000" b="1" dirty="0">
+                <a:solidFill>
+                  <a:srgbClr val="008000"/>
+                </a:solidFill>
+                <a:latin typeface="Courier-Bold" pitchFamily="2" charset="0"/>
+              </a:rPr>
+              <a:t>case</a:t>
+            </a:r>
+            <a:r>
+              <a:rPr lang="en-US" sz="2000" dirty="0">
+                <a:solidFill>
+                  <a:prstClr val="black"/>
+                </a:solidFill>
+                <a:latin typeface="Courier" pitchFamily="2" charset="0"/>
+              </a:rPr>
+              <a:t> </a:t>
+            </a:r>
+            <a:r>
+              <a:rPr lang="en-US" sz="2000" dirty="0">
+                <a:solidFill>
+                  <a:srgbClr val="666666"/>
+                </a:solidFill>
+                <a:latin typeface="Courier" pitchFamily="2" charset="0"/>
+              </a:rPr>
+              <a:t>7:</a:t>
+            </a:r>
+            <a:r>
+              <a:rPr lang="en-US" sz="2000" dirty="0">
+                <a:solidFill>
+                  <a:prstClr val="black"/>
+                </a:solidFill>
+                <a:latin typeface="Courier" pitchFamily="2" charset="0"/>
+              </a:rPr>
+              <a:t>      </a:t>
+            </a:r>
+            <a:r>
+              <a:rPr lang="en-US" sz="2000" dirty="0">
+                <a:solidFill>
+                  <a:srgbClr val="666666"/>
+                </a:solidFill>
+                <a:latin typeface="Courier" pitchFamily="2" charset="0"/>
+              </a:rPr>
+              <a:t>*</a:t>
+            </a:r>
+            <a:r>
+              <a:rPr lang="en-US" sz="2000" dirty="0">
+                <a:solidFill>
+                  <a:prstClr val="black"/>
+                </a:solidFill>
+                <a:latin typeface="Courier" pitchFamily="2" charset="0"/>
+              </a:rPr>
+              <a:t>to</a:t>
+            </a:r>
+            <a:r>
+              <a:rPr lang="en-US" sz="2000" dirty="0">
+                <a:solidFill>
+                  <a:srgbClr val="666666"/>
+                </a:solidFill>
+                <a:latin typeface="Courier" pitchFamily="2" charset="0"/>
+              </a:rPr>
+              <a:t>++</a:t>
+            </a:r>
+            <a:r>
+              <a:rPr lang="en-US" sz="2000" dirty="0">
+                <a:solidFill>
+                  <a:prstClr val="black"/>
+                </a:solidFill>
+                <a:latin typeface="Courier" pitchFamily="2" charset="0"/>
+              </a:rPr>
+              <a:t> </a:t>
+            </a:r>
+            <a:r>
+              <a:rPr lang="en-US" sz="2000" dirty="0">
+                <a:solidFill>
+                  <a:srgbClr val="666666"/>
+                </a:solidFill>
+                <a:latin typeface="Courier" pitchFamily="2" charset="0"/>
+              </a:rPr>
+              <a:t>=</a:t>
+            </a:r>
+            <a:r>
+              <a:rPr lang="en-US" sz="2000" dirty="0">
+                <a:solidFill>
+                  <a:prstClr val="black"/>
+                </a:solidFill>
+                <a:latin typeface="Courier" pitchFamily="2" charset="0"/>
+              </a:rPr>
+              <a:t> </a:t>
+            </a:r>
+            <a:r>
+              <a:rPr lang="en-US" sz="2000" dirty="0">
+                <a:solidFill>
+                  <a:srgbClr val="666666"/>
+                </a:solidFill>
+                <a:latin typeface="Courier" pitchFamily="2" charset="0"/>
+              </a:rPr>
+              <a:t>*</a:t>
+            </a:r>
+            <a:r>
+              <a:rPr lang="en-US" sz="2000" dirty="0">
+                <a:solidFill>
+                  <a:prstClr val="black"/>
+                </a:solidFill>
+                <a:latin typeface="Courier" pitchFamily="2" charset="0"/>
+              </a:rPr>
+              <a:t>from</a:t>
+            </a:r>
+            <a:r>
+              <a:rPr lang="en-US" sz="2000" dirty="0">
+                <a:solidFill>
+                  <a:srgbClr val="666666"/>
+                </a:solidFill>
+                <a:latin typeface="Courier" pitchFamily="2" charset="0"/>
+              </a:rPr>
+              <a:t>++</a:t>
+            </a:r>
+            <a:r>
+              <a:rPr lang="en-US" sz="2000" dirty="0">
+                <a:solidFill>
+                  <a:prstClr val="black"/>
+                </a:solidFill>
+                <a:latin typeface="Courier" pitchFamily="2" charset="0"/>
+              </a:rPr>
+              <a:t>;  </a:t>
+            </a:r>
+          </a:p>
+          <a:p>
+            <a:r>
+              <a:rPr lang="en-US" sz="2000" b="1" dirty="0">
+                <a:solidFill>
+                  <a:prstClr val="black"/>
+                </a:solidFill>
+                <a:latin typeface="Courier" pitchFamily="2" charset="0"/>
+              </a:rPr>
+              <a:t>	</a:t>
+            </a:r>
+            <a:r>
+              <a:rPr lang="en-US" sz="2000" b="1" dirty="0">
+                <a:solidFill>
+                  <a:srgbClr val="008000"/>
+                </a:solidFill>
+                <a:latin typeface="Courier-Bold" pitchFamily="2" charset="0"/>
+              </a:rPr>
+              <a:t>case</a:t>
+            </a:r>
+            <a:r>
+              <a:rPr lang="en-US" sz="2000" dirty="0">
+                <a:solidFill>
+                  <a:prstClr val="black"/>
+                </a:solidFill>
+                <a:latin typeface="Courier" pitchFamily="2" charset="0"/>
+              </a:rPr>
+              <a:t> </a:t>
+            </a:r>
+            <a:r>
+              <a:rPr lang="en-US" sz="2000" dirty="0">
+                <a:solidFill>
+                  <a:srgbClr val="666666"/>
+                </a:solidFill>
+                <a:latin typeface="Courier" pitchFamily="2" charset="0"/>
+              </a:rPr>
+              <a:t>6:</a:t>
+            </a:r>
+            <a:r>
+              <a:rPr lang="en-US" sz="2000" dirty="0">
+                <a:solidFill>
+                  <a:prstClr val="black"/>
+                </a:solidFill>
+                <a:latin typeface="Courier" pitchFamily="2" charset="0"/>
+              </a:rPr>
+              <a:t>      </a:t>
+            </a:r>
+            <a:r>
+              <a:rPr lang="en-US" sz="2000" dirty="0">
+                <a:solidFill>
+                  <a:srgbClr val="666666"/>
+                </a:solidFill>
+                <a:latin typeface="Courier" pitchFamily="2" charset="0"/>
+              </a:rPr>
+              <a:t>*</a:t>
+            </a:r>
+            <a:r>
+              <a:rPr lang="en-US" sz="2000" dirty="0">
+                <a:solidFill>
+                  <a:prstClr val="black"/>
+                </a:solidFill>
+                <a:latin typeface="Courier" pitchFamily="2" charset="0"/>
+              </a:rPr>
+              <a:t>to</a:t>
+            </a:r>
+            <a:r>
+              <a:rPr lang="en-US" sz="2000" dirty="0">
+                <a:solidFill>
+                  <a:srgbClr val="666666"/>
+                </a:solidFill>
+                <a:latin typeface="Courier" pitchFamily="2" charset="0"/>
+              </a:rPr>
+              <a:t>++</a:t>
+            </a:r>
+            <a:r>
+              <a:rPr lang="en-US" sz="2000" dirty="0">
+                <a:solidFill>
+                  <a:prstClr val="black"/>
+                </a:solidFill>
+                <a:latin typeface="Courier" pitchFamily="2" charset="0"/>
+              </a:rPr>
+              <a:t> </a:t>
+            </a:r>
+            <a:r>
+              <a:rPr lang="en-US" sz="2000" dirty="0">
+                <a:solidFill>
+                  <a:srgbClr val="666666"/>
+                </a:solidFill>
+                <a:latin typeface="Courier" pitchFamily="2" charset="0"/>
+              </a:rPr>
+              <a:t>=</a:t>
+            </a:r>
+            <a:r>
+              <a:rPr lang="en-US" sz="2000" dirty="0">
+                <a:solidFill>
+                  <a:prstClr val="black"/>
+                </a:solidFill>
+                <a:latin typeface="Courier" pitchFamily="2" charset="0"/>
+              </a:rPr>
+              <a:t> </a:t>
+            </a:r>
+            <a:r>
+              <a:rPr lang="en-US" sz="2000" dirty="0">
+                <a:solidFill>
+                  <a:srgbClr val="666666"/>
+                </a:solidFill>
+                <a:latin typeface="Courier" pitchFamily="2" charset="0"/>
+              </a:rPr>
+              <a:t>*</a:t>
+            </a:r>
+            <a:r>
+              <a:rPr lang="en-US" sz="2000" dirty="0">
+                <a:solidFill>
+                  <a:prstClr val="black"/>
+                </a:solidFill>
+                <a:latin typeface="Courier" pitchFamily="2" charset="0"/>
+              </a:rPr>
+              <a:t>from</a:t>
+            </a:r>
+            <a:r>
+              <a:rPr lang="en-US" sz="2000" dirty="0">
+                <a:solidFill>
+                  <a:srgbClr val="666666"/>
+                </a:solidFill>
+                <a:latin typeface="Courier" pitchFamily="2" charset="0"/>
+              </a:rPr>
+              <a:t>++</a:t>
+            </a:r>
+            <a:r>
+              <a:rPr lang="en-US" sz="2000" dirty="0">
+                <a:solidFill>
+                  <a:prstClr val="black"/>
+                </a:solidFill>
+                <a:latin typeface="Courier" pitchFamily="2" charset="0"/>
+              </a:rPr>
+              <a:t>;  </a:t>
+            </a:r>
+          </a:p>
+          <a:p>
+            <a:r>
+              <a:rPr lang="en-US" sz="2000" b="1" dirty="0">
+                <a:solidFill>
+                  <a:prstClr val="black"/>
+                </a:solidFill>
+                <a:latin typeface="Courier" pitchFamily="2" charset="0"/>
+              </a:rPr>
+              <a:t>	</a:t>
+            </a:r>
+            <a:r>
+              <a:rPr lang="en-US" sz="2000" b="1" dirty="0">
+                <a:solidFill>
+                  <a:srgbClr val="008000"/>
+                </a:solidFill>
+                <a:latin typeface="Courier-Bold" pitchFamily="2" charset="0"/>
+              </a:rPr>
+              <a:t>case</a:t>
+            </a:r>
+            <a:r>
+              <a:rPr lang="en-US" sz="2000" dirty="0">
+                <a:solidFill>
+                  <a:prstClr val="black"/>
+                </a:solidFill>
+                <a:latin typeface="Courier" pitchFamily="2" charset="0"/>
+              </a:rPr>
+              <a:t> </a:t>
+            </a:r>
+            <a:r>
+              <a:rPr lang="en-US" sz="2000" dirty="0">
+                <a:solidFill>
+                  <a:srgbClr val="666666"/>
+                </a:solidFill>
+                <a:latin typeface="Courier" pitchFamily="2" charset="0"/>
+              </a:rPr>
+              <a:t>5:</a:t>
+            </a:r>
+            <a:r>
+              <a:rPr lang="en-US" sz="2000" dirty="0">
+                <a:solidFill>
+                  <a:prstClr val="black"/>
+                </a:solidFill>
+                <a:latin typeface="Courier" pitchFamily="2" charset="0"/>
+              </a:rPr>
+              <a:t>      </a:t>
+            </a:r>
+            <a:r>
+              <a:rPr lang="en-US" sz="2000" dirty="0">
+                <a:solidFill>
+                  <a:srgbClr val="666666"/>
+                </a:solidFill>
+                <a:latin typeface="Courier" pitchFamily="2" charset="0"/>
+              </a:rPr>
+              <a:t>*</a:t>
+            </a:r>
+            <a:r>
+              <a:rPr lang="en-US" sz="2000" dirty="0">
+                <a:solidFill>
+                  <a:prstClr val="black"/>
+                </a:solidFill>
+                <a:latin typeface="Courier" pitchFamily="2" charset="0"/>
+              </a:rPr>
+              <a:t>to</a:t>
+            </a:r>
+            <a:r>
+              <a:rPr lang="en-US" sz="2000" dirty="0">
+                <a:solidFill>
+                  <a:srgbClr val="666666"/>
+                </a:solidFill>
+                <a:latin typeface="Courier" pitchFamily="2" charset="0"/>
+              </a:rPr>
+              <a:t>++</a:t>
+            </a:r>
+            <a:r>
+              <a:rPr lang="en-US" sz="2000" dirty="0">
+                <a:solidFill>
+                  <a:prstClr val="black"/>
+                </a:solidFill>
+                <a:latin typeface="Courier" pitchFamily="2" charset="0"/>
+              </a:rPr>
+              <a:t> </a:t>
+            </a:r>
+            <a:r>
+              <a:rPr lang="en-US" sz="2000" dirty="0">
+                <a:solidFill>
+                  <a:srgbClr val="666666"/>
+                </a:solidFill>
+                <a:latin typeface="Courier" pitchFamily="2" charset="0"/>
+              </a:rPr>
+              <a:t>=</a:t>
+            </a:r>
+            <a:r>
+              <a:rPr lang="en-US" sz="2000" dirty="0">
+                <a:solidFill>
+                  <a:prstClr val="black"/>
+                </a:solidFill>
+                <a:latin typeface="Courier" pitchFamily="2" charset="0"/>
+              </a:rPr>
+              <a:t> </a:t>
+            </a:r>
+            <a:r>
+              <a:rPr lang="en-US" sz="2000" dirty="0">
+                <a:solidFill>
+                  <a:srgbClr val="666666"/>
+                </a:solidFill>
+                <a:latin typeface="Courier" pitchFamily="2" charset="0"/>
+              </a:rPr>
+              <a:t>*</a:t>
+            </a:r>
+            <a:r>
+              <a:rPr lang="en-US" sz="2000" dirty="0">
+                <a:solidFill>
+                  <a:prstClr val="black"/>
+                </a:solidFill>
+                <a:latin typeface="Courier" pitchFamily="2" charset="0"/>
+              </a:rPr>
+              <a:t>from</a:t>
+            </a:r>
+            <a:r>
+              <a:rPr lang="en-US" sz="2000" dirty="0">
+                <a:solidFill>
+                  <a:srgbClr val="666666"/>
+                </a:solidFill>
+                <a:latin typeface="Courier" pitchFamily="2" charset="0"/>
+              </a:rPr>
+              <a:t>++</a:t>
+            </a:r>
+            <a:r>
+              <a:rPr lang="en-US" sz="2000" dirty="0">
+                <a:solidFill>
+                  <a:prstClr val="black"/>
+                </a:solidFill>
+                <a:latin typeface="Courier" pitchFamily="2" charset="0"/>
+              </a:rPr>
+              <a:t>;  </a:t>
+            </a:r>
+          </a:p>
+          <a:p>
+            <a:r>
+              <a:rPr lang="en-US" sz="2000" b="1" dirty="0">
+                <a:solidFill>
+                  <a:prstClr val="black"/>
+                </a:solidFill>
+                <a:latin typeface="Courier" pitchFamily="2" charset="0"/>
+              </a:rPr>
+              <a:t>	</a:t>
+            </a:r>
+            <a:r>
+              <a:rPr lang="en-US" sz="2000" b="1" dirty="0">
+                <a:solidFill>
+                  <a:srgbClr val="008000"/>
+                </a:solidFill>
+                <a:latin typeface="Courier-Bold" pitchFamily="2" charset="0"/>
+              </a:rPr>
+              <a:t>case</a:t>
+            </a:r>
+            <a:r>
+              <a:rPr lang="en-US" sz="2000" dirty="0">
+                <a:solidFill>
+                  <a:prstClr val="black"/>
+                </a:solidFill>
+                <a:latin typeface="Courier" pitchFamily="2" charset="0"/>
+              </a:rPr>
+              <a:t> </a:t>
+            </a:r>
+            <a:r>
+              <a:rPr lang="en-US" sz="2000" dirty="0">
+                <a:solidFill>
+                  <a:srgbClr val="666666"/>
+                </a:solidFill>
+                <a:latin typeface="Courier" pitchFamily="2" charset="0"/>
+              </a:rPr>
+              <a:t>4:</a:t>
+            </a:r>
+            <a:r>
+              <a:rPr lang="en-US" sz="2000" dirty="0">
+                <a:solidFill>
+                  <a:prstClr val="black"/>
+                </a:solidFill>
+                <a:latin typeface="Courier" pitchFamily="2" charset="0"/>
+              </a:rPr>
+              <a:t>      </a:t>
+            </a:r>
+            <a:r>
+              <a:rPr lang="en-US" sz="2000" dirty="0">
+                <a:solidFill>
+                  <a:srgbClr val="666666"/>
+                </a:solidFill>
+                <a:latin typeface="Courier" pitchFamily="2" charset="0"/>
+              </a:rPr>
+              <a:t>*</a:t>
+            </a:r>
+            <a:r>
+              <a:rPr lang="en-US" sz="2000" dirty="0">
+                <a:solidFill>
+                  <a:prstClr val="black"/>
+                </a:solidFill>
+                <a:latin typeface="Courier" pitchFamily="2" charset="0"/>
+              </a:rPr>
+              <a:t>to</a:t>
+            </a:r>
+            <a:r>
+              <a:rPr lang="en-US" sz="2000" dirty="0">
+                <a:solidFill>
+                  <a:srgbClr val="666666"/>
+                </a:solidFill>
+                <a:latin typeface="Courier" pitchFamily="2" charset="0"/>
+              </a:rPr>
+              <a:t>++</a:t>
+            </a:r>
+            <a:r>
+              <a:rPr lang="en-US" sz="2000" dirty="0">
+                <a:solidFill>
+                  <a:prstClr val="black"/>
+                </a:solidFill>
+                <a:latin typeface="Courier" pitchFamily="2" charset="0"/>
+              </a:rPr>
+              <a:t> </a:t>
+            </a:r>
+            <a:r>
+              <a:rPr lang="en-US" sz="2000" dirty="0">
+                <a:solidFill>
+                  <a:srgbClr val="666666"/>
+                </a:solidFill>
+                <a:latin typeface="Courier" pitchFamily="2" charset="0"/>
+              </a:rPr>
+              <a:t>=</a:t>
+            </a:r>
+            <a:r>
+              <a:rPr lang="en-US" sz="2000" dirty="0">
+                <a:solidFill>
+                  <a:prstClr val="black"/>
+                </a:solidFill>
+                <a:latin typeface="Courier" pitchFamily="2" charset="0"/>
+              </a:rPr>
+              <a:t> </a:t>
+            </a:r>
+            <a:r>
+              <a:rPr lang="en-US" sz="2000" dirty="0">
+                <a:solidFill>
+                  <a:srgbClr val="666666"/>
+                </a:solidFill>
+                <a:latin typeface="Courier" pitchFamily="2" charset="0"/>
+              </a:rPr>
+              <a:t>*</a:t>
+            </a:r>
+            <a:r>
+              <a:rPr lang="en-US" sz="2000" dirty="0">
+                <a:solidFill>
+                  <a:prstClr val="black"/>
+                </a:solidFill>
+                <a:latin typeface="Courier" pitchFamily="2" charset="0"/>
+              </a:rPr>
+              <a:t>from</a:t>
+            </a:r>
+            <a:r>
+              <a:rPr lang="en-US" sz="2000" dirty="0">
+                <a:solidFill>
+                  <a:srgbClr val="666666"/>
+                </a:solidFill>
+                <a:latin typeface="Courier" pitchFamily="2" charset="0"/>
+              </a:rPr>
+              <a:t>++</a:t>
+            </a:r>
+            <a:r>
+              <a:rPr lang="en-US" sz="2000" dirty="0">
+                <a:solidFill>
+                  <a:prstClr val="black"/>
+                </a:solidFill>
+                <a:latin typeface="Courier" pitchFamily="2" charset="0"/>
+              </a:rPr>
+              <a:t>;  </a:t>
+            </a:r>
+          </a:p>
+          <a:p>
+            <a:r>
+              <a:rPr lang="en-US" sz="2000" b="1" dirty="0">
+                <a:solidFill>
+                  <a:prstClr val="black"/>
+                </a:solidFill>
+                <a:latin typeface="Courier" pitchFamily="2" charset="0"/>
+              </a:rPr>
+              <a:t>	</a:t>
+            </a:r>
+            <a:r>
+              <a:rPr lang="en-US" sz="2000" b="1" dirty="0">
+                <a:solidFill>
+                  <a:srgbClr val="008000"/>
+                </a:solidFill>
+                <a:latin typeface="Courier-Bold" pitchFamily="2" charset="0"/>
+              </a:rPr>
+              <a:t>case</a:t>
+            </a:r>
+            <a:r>
+              <a:rPr lang="en-US" sz="2000" dirty="0">
+                <a:solidFill>
+                  <a:prstClr val="black"/>
+                </a:solidFill>
+                <a:latin typeface="Courier" pitchFamily="2" charset="0"/>
+              </a:rPr>
+              <a:t> </a:t>
+            </a:r>
+            <a:r>
+              <a:rPr lang="en-US" sz="2000" dirty="0">
+                <a:solidFill>
+                  <a:srgbClr val="666666"/>
+                </a:solidFill>
+                <a:latin typeface="Courier" pitchFamily="2" charset="0"/>
+              </a:rPr>
+              <a:t>3:</a:t>
+            </a:r>
+            <a:r>
+              <a:rPr lang="en-US" sz="2000" dirty="0">
+                <a:solidFill>
+                  <a:prstClr val="black"/>
+                </a:solidFill>
+                <a:latin typeface="Courier" pitchFamily="2" charset="0"/>
+              </a:rPr>
+              <a:t>      </a:t>
+            </a:r>
+            <a:r>
+              <a:rPr lang="en-US" sz="2000" dirty="0">
+                <a:solidFill>
+                  <a:srgbClr val="666666"/>
+                </a:solidFill>
+                <a:latin typeface="Courier" pitchFamily="2" charset="0"/>
+              </a:rPr>
+              <a:t>*</a:t>
+            </a:r>
+            <a:r>
+              <a:rPr lang="en-US" sz="2000" dirty="0">
+                <a:solidFill>
+                  <a:prstClr val="black"/>
+                </a:solidFill>
+                <a:latin typeface="Courier" pitchFamily="2" charset="0"/>
+              </a:rPr>
+              <a:t>to</a:t>
+            </a:r>
+            <a:r>
+              <a:rPr lang="en-US" sz="2000" dirty="0">
+                <a:solidFill>
+                  <a:srgbClr val="666666"/>
+                </a:solidFill>
+                <a:latin typeface="Courier" pitchFamily="2" charset="0"/>
+              </a:rPr>
+              <a:t>++</a:t>
+            </a:r>
+            <a:r>
+              <a:rPr lang="en-US" sz="2000" dirty="0">
+                <a:solidFill>
+                  <a:prstClr val="black"/>
+                </a:solidFill>
+                <a:latin typeface="Courier" pitchFamily="2" charset="0"/>
+              </a:rPr>
+              <a:t> </a:t>
+            </a:r>
+            <a:r>
+              <a:rPr lang="en-US" sz="2000" dirty="0">
+                <a:solidFill>
+                  <a:srgbClr val="666666"/>
+                </a:solidFill>
+                <a:latin typeface="Courier" pitchFamily="2" charset="0"/>
+              </a:rPr>
+              <a:t>=</a:t>
+            </a:r>
+            <a:r>
+              <a:rPr lang="en-US" sz="2000" dirty="0">
+                <a:solidFill>
+                  <a:prstClr val="black"/>
+                </a:solidFill>
+                <a:latin typeface="Courier" pitchFamily="2" charset="0"/>
+              </a:rPr>
+              <a:t> </a:t>
+            </a:r>
+            <a:r>
+              <a:rPr lang="en-US" sz="2000" dirty="0">
+                <a:solidFill>
+                  <a:srgbClr val="666666"/>
+                </a:solidFill>
+                <a:latin typeface="Courier" pitchFamily="2" charset="0"/>
+              </a:rPr>
+              <a:t>*</a:t>
+            </a:r>
+            <a:r>
+              <a:rPr lang="en-US" sz="2000" dirty="0">
+                <a:solidFill>
+                  <a:prstClr val="black"/>
+                </a:solidFill>
+                <a:latin typeface="Courier" pitchFamily="2" charset="0"/>
+              </a:rPr>
+              <a:t>from</a:t>
+            </a:r>
+            <a:r>
+              <a:rPr lang="en-US" sz="2000" dirty="0">
+                <a:solidFill>
+                  <a:srgbClr val="666666"/>
+                </a:solidFill>
+                <a:latin typeface="Courier" pitchFamily="2" charset="0"/>
+              </a:rPr>
+              <a:t>++</a:t>
+            </a:r>
+            <a:r>
+              <a:rPr lang="en-US" sz="2000" dirty="0">
+                <a:solidFill>
+                  <a:prstClr val="black"/>
+                </a:solidFill>
+                <a:latin typeface="Courier" pitchFamily="2" charset="0"/>
+              </a:rPr>
+              <a:t>;  </a:t>
+            </a:r>
+          </a:p>
+          <a:p>
+            <a:r>
+              <a:rPr lang="en-US" sz="2000" b="1" dirty="0">
+                <a:solidFill>
+                  <a:prstClr val="black"/>
+                </a:solidFill>
+                <a:latin typeface="Courier" pitchFamily="2" charset="0"/>
+              </a:rPr>
+              <a:t>	</a:t>
+            </a:r>
+            <a:r>
+              <a:rPr lang="en-US" sz="2000" b="1" dirty="0">
+                <a:solidFill>
+                  <a:srgbClr val="008000"/>
+                </a:solidFill>
+                <a:latin typeface="Courier-Bold" pitchFamily="2" charset="0"/>
+              </a:rPr>
+              <a:t>case</a:t>
+            </a:r>
+            <a:r>
+              <a:rPr lang="en-US" sz="2000" dirty="0">
+                <a:solidFill>
+                  <a:prstClr val="black"/>
+                </a:solidFill>
+                <a:latin typeface="Courier" pitchFamily="2" charset="0"/>
+              </a:rPr>
+              <a:t> </a:t>
+            </a:r>
+            <a:r>
+              <a:rPr lang="en-US" sz="2000" dirty="0">
+                <a:solidFill>
+                  <a:srgbClr val="666666"/>
+                </a:solidFill>
+                <a:latin typeface="Courier" pitchFamily="2" charset="0"/>
+              </a:rPr>
+              <a:t>2:</a:t>
+            </a:r>
+            <a:r>
+              <a:rPr lang="en-US" sz="2000" dirty="0">
+                <a:solidFill>
+                  <a:prstClr val="black"/>
+                </a:solidFill>
+                <a:latin typeface="Courier" pitchFamily="2" charset="0"/>
+              </a:rPr>
+              <a:t>      </a:t>
+            </a:r>
+            <a:r>
+              <a:rPr lang="en-US" sz="2000" dirty="0">
+                <a:solidFill>
+                  <a:srgbClr val="666666"/>
+                </a:solidFill>
+                <a:latin typeface="Courier" pitchFamily="2" charset="0"/>
+              </a:rPr>
+              <a:t>*</a:t>
+            </a:r>
+            <a:r>
+              <a:rPr lang="en-US" sz="2000" dirty="0">
+                <a:solidFill>
+                  <a:prstClr val="black"/>
+                </a:solidFill>
+                <a:latin typeface="Courier" pitchFamily="2" charset="0"/>
+              </a:rPr>
+              <a:t>to</a:t>
+            </a:r>
+            <a:r>
+              <a:rPr lang="en-US" sz="2000" dirty="0">
+                <a:solidFill>
+                  <a:srgbClr val="666666"/>
+                </a:solidFill>
+                <a:latin typeface="Courier" pitchFamily="2" charset="0"/>
+              </a:rPr>
+              <a:t>++</a:t>
+            </a:r>
+            <a:r>
+              <a:rPr lang="en-US" sz="2000" dirty="0">
+                <a:solidFill>
+                  <a:prstClr val="black"/>
+                </a:solidFill>
+                <a:latin typeface="Courier" pitchFamily="2" charset="0"/>
+              </a:rPr>
+              <a:t> </a:t>
+            </a:r>
+            <a:r>
+              <a:rPr lang="en-US" sz="2000" dirty="0">
+                <a:solidFill>
+                  <a:srgbClr val="666666"/>
+                </a:solidFill>
+                <a:latin typeface="Courier" pitchFamily="2" charset="0"/>
+              </a:rPr>
+              <a:t>=</a:t>
+            </a:r>
+            <a:r>
+              <a:rPr lang="en-US" sz="2000" dirty="0">
+                <a:solidFill>
+                  <a:prstClr val="black"/>
+                </a:solidFill>
+                <a:latin typeface="Courier" pitchFamily="2" charset="0"/>
+              </a:rPr>
+              <a:t> </a:t>
+            </a:r>
+            <a:r>
+              <a:rPr lang="en-US" sz="2000" dirty="0">
+                <a:solidFill>
+                  <a:srgbClr val="666666"/>
+                </a:solidFill>
+                <a:latin typeface="Courier" pitchFamily="2" charset="0"/>
+              </a:rPr>
+              <a:t>*</a:t>
+            </a:r>
+            <a:r>
+              <a:rPr lang="en-US" sz="2000" dirty="0">
+                <a:solidFill>
+                  <a:prstClr val="black"/>
+                </a:solidFill>
+                <a:latin typeface="Courier" pitchFamily="2" charset="0"/>
+              </a:rPr>
+              <a:t>from</a:t>
+            </a:r>
+            <a:r>
+              <a:rPr lang="en-US" sz="2000" dirty="0">
+                <a:solidFill>
+                  <a:srgbClr val="666666"/>
+                </a:solidFill>
+                <a:latin typeface="Courier" pitchFamily="2" charset="0"/>
+              </a:rPr>
+              <a:t>++</a:t>
+            </a:r>
+            <a:r>
+              <a:rPr lang="en-US" sz="2000" dirty="0">
+                <a:solidFill>
+                  <a:prstClr val="black"/>
+                </a:solidFill>
+                <a:latin typeface="Courier" pitchFamily="2" charset="0"/>
+              </a:rPr>
+              <a:t>;  </a:t>
+            </a:r>
+          </a:p>
+          <a:p>
+            <a:r>
+              <a:rPr lang="en-US" sz="2000" b="1" dirty="0">
+                <a:solidFill>
+                  <a:prstClr val="black"/>
+                </a:solidFill>
+                <a:latin typeface="Courier" pitchFamily="2" charset="0"/>
+              </a:rPr>
+              <a:t>	</a:t>
+            </a:r>
+            <a:r>
+              <a:rPr lang="en-US" sz="2000" b="1" dirty="0">
+                <a:solidFill>
+                  <a:srgbClr val="008000"/>
+                </a:solidFill>
+                <a:latin typeface="Courier-Bold" pitchFamily="2" charset="0"/>
+              </a:rPr>
+              <a:t>case</a:t>
+            </a:r>
+            <a:r>
+              <a:rPr lang="en-US" sz="2000" dirty="0">
+                <a:solidFill>
+                  <a:prstClr val="black"/>
+                </a:solidFill>
+                <a:latin typeface="Courier" pitchFamily="2" charset="0"/>
+              </a:rPr>
+              <a:t> </a:t>
+            </a:r>
+            <a:r>
+              <a:rPr lang="en-US" sz="2000" dirty="0">
+                <a:solidFill>
+                  <a:srgbClr val="666666"/>
+                </a:solidFill>
+                <a:latin typeface="Courier" pitchFamily="2" charset="0"/>
+              </a:rPr>
+              <a:t>1:</a:t>
+            </a:r>
+            <a:r>
+              <a:rPr lang="en-US" sz="2000" dirty="0">
+                <a:solidFill>
+                  <a:prstClr val="black"/>
+                </a:solidFill>
+                <a:latin typeface="Courier" pitchFamily="2" charset="0"/>
+              </a:rPr>
+              <a:t>      </a:t>
+            </a:r>
+            <a:r>
+              <a:rPr lang="en-US" sz="2000" dirty="0">
+                <a:solidFill>
+                  <a:srgbClr val="666666"/>
+                </a:solidFill>
+                <a:latin typeface="Courier" pitchFamily="2" charset="0"/>
+              </a:rPr>
+              <a:t>*</a:t>
+            </a:r>
+            <a:r>
+              <a:rPr lang="en-US" sz="2000" dirty="0">
+                <a:solidFill>
+                  <a:prstClr val="black"/>
+                </a:solidFill>
+                <a:latin typeface="Courier" pitchFamily="2" charset="0"/>
+              </a:rPr>
+              <a:t>to</a:t>
+            </a:r>
+            <a:r>
+              <a:rPr lang="en-US" sz="2000" dirty="0">
+                <a:solidFill>
+                  <a:srgbClr val="666666"/>
+                </a:solidFill>
+                <a:latin typeface="Courier" pitchFamily="2" charset="0"/>
+              </a:rPr>
+              <a:t>++</a:t>
+            </a:r>
+            <a:r>
+              <a:rPr lang="en-US" sz="2000" dirty="0">
+                <a:solidFill>
+                  <a:prstClr val="black"/>
+                </a:solidFill>
+                <a:latin typeface="Courier" pitchFamily="2" charset="0"/>
+              </a:rPr>
+              <a:t> </a:t>
+            </a:r>
+            <a:r>
+              <a:rPr lang="en-US" sz="2000" dirty="0">
+                <a:solidFill>
+                  <a:srgbClr val="666666"/>
+                </a:solidFill>
+                <a:latin typeface="Courier" pitchFamily="2" charset="0"/>
+              </a:rPr>
+              <a:t>=</a:t>
+            </a:r>
+            <a:r>
+              <a:rPr lang="en-US" sz="2000" dirty="0">
+                <a:solidFill>
+                  <a:prstClr val="black"/>
+                </a:solidFill>
+                <a:latin typeface="Courier" pitchFamily="2" charset="0"/>
+              </a:rPr>
+              <a:t> </a:t>
+            </a:r>
+            <a:r>
+              <a:rPr lang="en-US" sz="2000" dirty="0">
+                <a:solidFill>
+                  <a:srgbClr val="666666"/>
+                </a:solidFill>
+                <a:latin typeface="Courier" pitchFamily="2" charset="0"/>
+              </a:rPr>
+              <a:t>*</a:t>
+            </a:r>
+            <a:r>
+              <a:rPr lang="en-US" sz="2000" dirty="0">
+                <a:solidFill>
+                  <a:prstClr val="black"/>
+                </a:solidFill>
+                <a:latin typeface="Courier" pitchFamily="2" charset="0"/>
+              </a:rPr>
+              <a:t>from</a:t>
+            </a:r>
+            <a:r>
+              <a:rPr lang="en-US" sz="2000" dirty="0">
+                <a:solidFill>
+                  <a:srgbClr val="666666"/>
+                </a:solidFill>
+                <a:latin typeface="Courier" pitchFamily="2" charset="0"/>
+              </a:rPr>
+              <a:t>++</a:t>
+            </a:r>
+            <a:r>
+              <a:rPr lang="en-US" sz="2000" dirty="0">
+                <a:solidFill>
+                  <a:prstClr val="black"/>
+                </a:solidFill>
+                <a:latin typeface="Courier" pitchFamily="2" charset="0"/>
+              </a:rPr>
+              <a:t>;</a:t>
+            </a:r>
+          </a:p>
+          <a:p>
+            <a:r>
+              <a:rPr lang="en-US" sz="2000" dirty="0">
+                <a:solidFill>
+                  <a:prstClr val="black"/>
+                </a:solidFill>
+                <a:latin typeface="Courier" pitchFamily="2" charset="0"/>
+              </a:rPr>
+              <a:t>		  } </a:t>
+            </a:r>
+            <a:r>
+              <a:rPr lang="en-US" sz="2000" b="1" dirty="0">
+                <a:solidFill>
+                  <a:srgbClr val="008000"/>
+                </a:solidFill>
+                <a:latin typeface="Courier-Bold" pitchFamily="2" charset="0"/>
+              </a:rPr>
+              <a:t>while</a:t>
+            </a:r>
+            <a:r>
+              <a:rPr lang="en-US" sz="2000" dirty="0">
+                <a:solidFill>
+                  <a:prstClr val="black"/>
+                </a:solidFill>
+                <a:latin typeface="Courier" pitchFamily="2" charset="0"/>
+              </a:rPr>
+              <a:t>(--n </a:t>
+            </a:r>
+            <a:r>
+              <a:rPr lang="en-US" sz="2000" dirty="0">
+                <a:solidFill>
+                  <a:srgbClr val="666666"/>
+                </a:solidFill>
+                <a:latin typeface="Courier" pitchFamily="2" charset="0"/>
+              </a:rPr>
+              <a:t>&gt;</a:t>
+            </a:r>
+            <a:r>
+              <a:rPr lang="en-US" sz="2000" dirty="0">
+                <a:solidFill>
+                  <a:prstClr val="black"/>
+                </a:solidFill>
+                <a:latin typeface="Courier" pitchFamily="2" charset="0"/>
+              </a:rPr>
+              <a:t> </a:t>
+            </a:r>
+            <a:r>
+              <a:rPr lang="en-US" sz="2000" dirty="0">
+                <a:solidFill>
+                  <a:srgbClr val="666666"/>
+                </a:solidFill>
+                <a:latin typeface="Courier" pitchFamily="2" charset="0"/>
+              </a:rPr>
+              <a:t>0</a:t>
+            </a:r>
+            <a:r>
+              <a:rPr lang="en-US" sz="2000" dirty="0">
+                <a:solidFill>
+                  <a:prstClr val="black"/>
+                </a:solidFill>
+                <a:latin typeface="Courier" pitchFamily="2" charset="0"/>
+              </a:rPr>
+              <a:t>);  </a:t>
+            </a:r>
+          </a:p>
+          <a:p>
+            <a:r>
+              <a:rPr lang="en-US" sz="2000" dirty="0">
+                <a:solidFill>
+                  <a:prstClr val="black"/>
+                </a:solidFill>
+                <a:latin typeface="Courier" pitchFamily="2" charset="0"/>
+              </a:rPr>
+              <a:t>	}</a:t>
+            </a:r>
+          </a:p>
+          <a:p>
+            <a:r>
+              <a:rPr lang="en-US" sz="2000" dirty="0">
+                <a:solidFill>
+                  <a:prstClr val="black"/>
+                </a:solidFill>
+                <a:latin typeface="Courier" pitchFamily="2" charset="0"/>
+              </a:rPr>
+              <a:t>}</a:t>
+            </a:r>
+            <a:endParaRPr lang="en-US" sz="2000" dirty="0"/>
+          </a:p>
+        </p:txBody>
+      </p:sp>
+      <p:sp>
+        <p:nvSpPr>
+          <p:cNvPr id="4" name="Slide Number Placeholder 3">
+            <a:extLst>
+              <a:ext uri="{FF2B5EF4-FFF2-40B4-BE49-F238E27FC236}">
+                <a16:creationId xmlns:a16="http://schemas.microsoft.com/office/drawing/2014/main" id="{8E1F2FB9-BABD-F242-85B1-6DC85958C53C}"/>
+              </a:ext>
+            </a:extLst>
+          </p:cNvPr>
+          <p:cNvSpPr>
+            <a:spLocks noGrp="1"/>
+          </p:cNvSpPr>
+          <p:nvPr>
+            <p:ph type="sldNum" sz="quarter" idx="12"/>
+          </p:nvPr>
+        </p:nvSpPr>
+        <p:spPr>
+          <a:xfrm>
+            <a:off x="8472457" y="4663217"/>
+            <a:ext cx="548700" cy="393525"/>
+          </a:xfrm>
+          <a:prstGeom prst="rect">
+            <a:avLst/>
+          </a:prstGeom>
+        </p:spPr>
+        <p:txBody>
+          <a:bodyPr/>
+          <a:lstStyle/>
+          <a:p>
+            <a:fld id="{00000000-1234-1234-1234-123412341234}" type="slidenum">
+              <a:rPr lang="en-US" smtClean="0"/>
+              <a:pPr/>
+              <a:t>12</a:t>
+            </a:fld>
+            <a:endParaRPr lang="en-US"/>
+          </a:p>
+        </p:txBody>
+      </p:sp>
+    </p:spTree>
+    <p:extLst>
+      <p:ext uri="{BB962C8B-B14F-4D97-AF65-F5344CB8AC3E}">
+        <p14:creationId xmlns:p14="http://schemas.microsoft.com/office/powerpoint/2010/main" val="271732955"/>
+      </p:ext>
+    </p:extLst>
+  </p:cSld>
+  <p:clrMapOvr>
+    <a:masterClrMapping/>
+  </p:clrMapOvr>
+</p:sld>
+</file>
+
+<file path=ppt/slides/slide13.xml><?xml version="1.0" encoding="utf-8"?>
+<p:sld xmlns:a="http://schemas.openxmlformats.org/drawingml/2006/main" xmlns:r="http://schemas.openxmlformats.org/officeDocument/2006/relationships" xmlns:p="http://schemas.openxmlformats.org/presentationml/2006/main">
+  <p:cSld>
+    <p:spTree>
+      <p:nvGrpSpPr>
+        <p:cNvPr id="1" name=""/>
+        <p:cNvGrpSpPr/>
+        <p:nvPr/>
+      </p:nvGrpSpPr>
+      <p:grpSpPr>
+        <a:xfrm>
+          <a:off x="0" y="0"/>
+          <a:ext cx="0" cy="0"/>
+          <a:chOff x="0" y="0"/>
+          <a:chExt cx="0" cy="0"/>
+        </a:xfrm>
+      </p:grpSpPr>
+      <p:sp>
+        <p:nvSpPr>
+          <p:cNvPr id="2" name="Title 1">
+            <a:extLst>
+              <a:ext uri="{FF2B5EF4-FFF2-40B4-BE49-F238E27FC236}">
                 <a16:creationId xmlns:a16="http://schemas.microsoft.com/office/drawing/2014/main" id="{0C2819D6-6A29-7243-BA20-A6D002ED86D9}"/>
               </a:ext>
             </a:extLst>
@@ -6761,7 +7572,7 @@
               <a:pPr algn="r">
                 <a:buSzPct val="25000"/>
               </a:pPr>
-              <a:t>11</a:t>
+              <a:t>13</a:t>
             </a:fld>
             <a:endParaRPr lang="en-US" sz="900">
               <a:solidFill>
@@ -6919,7 +7730,7 @@
 </p:sld>
 </file>
 
-<file path=ppt/slides/slide12.xml><?xml version="1.0" encoding="utf-8"?>
+<file path=ppt/slides/slide14.xml><?xml version="1.0" encoding="utf-8"?>
 <p:sld xmlns:a="http://schemas.openxmlformats.org/drawingml/2006/main" xmlns:r="http://schemas.openxmlformats.org/officeDocument/2006/relationships" xmlns:p="http://schemas.openxmlformats.org/presentationml/2006/main">
   <p:cSld>
     <p:spTree>
@@ -7059,7 +7870,7 @@
               <a:pPr algn="r">
                 <a:buSzPct val="25000"/>
               </a:pPr>
-              <a:t>12</a:t>
+              <a:t>14</a:t>
             </a:fld>
             <a:endParaRPr lang="en-US" sz="900">
               <a:solidFill>
@@ -7266,7 +8077,7 @@
 </p:sld>
 </file>
 
-<file path=ppt/slides/slide13.xml><?xml version="1.0" encoding="utf-8"?>
+<file path=ppt/slides/slide15.xml><?xml version="1.0" encoding="utf-8"?>
 <p:sld xmlns:a="http://schemas.openxmlformats.org/drawingml/2006/main" xmlns:r="http://schemas.openxmlformats.org/officeDocument/2006/relationships" xmlns:p="http://schemas.openxmlformats.org/presentationml/2006/main">
   <p:cSld>
     <p:spTree>
@@ -7410,7 +8221,7 @@
               <a:pPr algn="r">
                 <a:buSzPct val="25000"/>
               </a:pPr>
-              <a:t>13</a:t>
+              <a:t>15</a:t>
             </a:fld>
             <a:endParaRPr lang="en-US" sz="900">
               <a:solidFill>
@@ -7666,261 +8477,6 @@
 </p:sld>
 </file>
 
-<file path=ppt/slides/slide14.xml><?xml version="1.0" encoding="utf-8"?>
-<p:sld xmlns:a="http://schemas.openxmlformats.org/drawingml/2006/main" xmlns:r="http://schemas.openxmlformats.org/officeDocument/2006/relationships" xmlns:p="http://schemas.openxmlformats.org/presentationml/2006/main">
-  <p:cSld>
-    <p:spTree>
-      <p:nvGrpSpPr>
-        <p:cNvPr id="1" name=""/>
-        <p:cNvGrpSpPr/>
-        <p:nvPr/>
-      </p:nvGrpSpPr>
-      <p:grpSpPr>
-        <a:xfrm>
-          <a:off x="0" y="0"/>
-          <a:ext cx="0" cy="0"/>
-          <a:chOff x="0" y="0"/>
-          <a:chExt cx="0" cy="0"/>
-        </a:xfrm>
-      </p:grpSpPr>
-      <p:sp>
-        <p:nvSpPr>
-          <p:cNvPr id="2" name="Title 1">
-            <a:extLst>
-              <a:ext uri="{FF2B5EF4-FFF2-40B4-BE49-F238E27FC236}">
-                <a16:creationId xmlns:a16="http://schemas.microsoft.com/office/drawing/2014/main" id="{44ADDCE8-B901-404D-B1FE-F95B8E854F9B}"/>
-              </a:ext>
-            </a:extLst>
-          </p:cNvPr>
-          <p:cNvSpPr>
-            <a:spLocks noGrp="1"/>
-          </p:cNvSpPr>
-          <p:nvPr>
-            <p:ph type="title"/>
-          </p:nvPr>
-        </p:nvSpPr>
-        <p:spPr/>
-        <p:txBody>
-          <a:bodyPr/>
-          <a:lstStyle/>
-          <a:p>
-            <a:r>
-              <a:rPr lang="en-US" dirty="0"/>
-              <a:t>Extra Slides</a:t>
-            </a:r>
-          </a:p>
-        </p:txBody>
-      </p:sp>
-      <p:sp>
-        <p:nvSpPr>
-          <p:cNvPr id="3" name="Slide Number Placeholder 2">
-            <a:extLst>
-              <a:ext uri="{FF2B5EF4-FFF2-40B4-BE49-F238E27FC236}">
-                <a16:creationId xmlns:a16="http://schemas.microsoft.com/office/drawing/2014/main" id="{D85F7917-6086-2544-88B5-D896FEF3DE67}"/>
-              </a:ext>
-            </a:extLst>
-          </p:cNvPr>
-          <p:cNvSpPr>
-            <a:spLocks noGrp="1"/>
-          </p:cNvSpPr>
-          <p:nvPr>
-            <p:ph type="sldNum" idx="4294967295"/>
-          </p:nvPr>
-        </p:nvSpPr>
-        <p:spPr>
-          <a:xfrm>
-            <a:off x="8594725" y="4662488"/>
-            <a:ext cx="549275" cy="393700"/>
-          </a:xfrm>
-          <a:prstGeom prst="rect">
-            <a:avLst/>
-          </a:prstGeom>
-        </p:spPr>
-        <p:txBody>
-          <a:bodyPr/>
-          <a:lstStyle/>
-          <a:p>
-            <a:fld id="{00000000-1234-1234-1234-123412341234}" type="slidenum">
-              <a:rPr lang="en-US" smtClean="0"/>
-              <a:pPr/>
-              <a:t>14</a:t>
-            </a:fld>
-            <a:endParaRPr lang="en-US" dirty="0"/>
-          </a:p>
-        </p:txBody>
-      </p:sp>
-    </p:spTree>
-    <p:extLst>
-      <p:ext uri="{BB962C8B-B14F-4D97-AF65-F5344CB8AC3E}">
-        <p14:creationId xmlns:p14="http://schemas.microsoft.com/office/powerpoint/2010/main" val="2250977745"/>
-      </p:ext>
-    </p:extLst>
-  </p:cSld>
-  <p:clrMapOvr>
-    <a:masterClrMapping/>
-  </p:clrMapOvr>
-</p:sld>
-</file>
-
-<file path=ppt/slides/slide15.xml><?xml version="1.0" encoding="utf-8"?>
-<p:sld xmlns:a="http://schemas.openxmlformats.org/drawingml/2006/main" xmlns:r="http://schemas.openxmlformats.org/officeDocument/2006/relationships" xmlns:p="http://schemas.openxmlformats.org/presentationml/2006/main">
-  <p:cSld>
-    <p:spTree>
-      <p:nvGrpSpPr>
-        <p:cNvPr id="1" name=""/>
-        <p:cNvGrpSpPr/>
-        <p:nvPr/>
-      </p:nvGrpSpPr>
-      <p:grpSpPr>
-        <a:xfrm>
-          <a:off x="0" y="0"/>
-          <a:ext cx="0" cy="0"/>
-          <a:chOff x="0" y="0"/>
-          <a:chExt cx="0" cy="0"/>
-        </a:xfrm>
-      </p:grpSpPr>
-      <p:sp>
-        <p:nvSpPr>
-          <p:cNvPr id="2" name="Title 1">
-            <a:extLst>
-              <a:ext uri="{FF2B5EF4-FFF2-40B4-BE49-F238E27FC236}">
-                <a16:creationId xmlns:a16="http://schemas.microsoft.com/office/drawing/2014/main" id="{0C2819D6-6A29-7243-BA20-A6D002ED86D9}"/>
-              </a:ext>
-            </a:extLst>
-          </p:cNvPr>
-          <p:cNvSpPr>
-            <a:spLocks noGrp="1"/>
-          </p:cNvSpPr>
-          <p:nvPr>
-            <p:ph type="title"/>
-          </p:nvPr>
-        </p:nvSpPr>
-        <p:spPr/>
-        <p:txBody>
-          <a:bodyPr/>
-          <a:lstStyle/>
-          <a:p>
-            <a:r>
-              <a:rPr lang="en-US" dirty="0"/>
-              <a:t>Compare send and send2</a:t>
-            </a:r>
-          </a:p>
-        </p:txBody>
-      </p:sp>
-      <p:sp>
-        <p:nvSpPr>
-          <p:cNvPr id="3" name="Text Placeholder 2">
-            <a:extLst>
-              <a:ext uri="{FF2B5EF4-FFF2-40B4-BE49-F238E27FC236}">
-                <a16:creationId xmlns:a16="http://schemas.microsoft.com/office/drawing/2014/main" id="{601F5517-35AB-F041-BCC8-01057E04A342}"/>
-              </a:ext>
-            </a:extLst>
-          </p:cNvPr>
-          <p:cNvSpPr>
-            <a:spLocks noGrp="1"/>
-          </p:cNvSpPr>
-          <p:nvPr>
-            <p:ph idx="1"/>
-          </p:nvPr>
-        </p:nvSpPr>
-        <p:spPr/>
-        <p:txBody>
-          <a:bodyPr/>
-          <a:lstStyle/>
-          <a:p>
-            <a:r>
-              <a:rPr lang="en-US" dirty="0"/>
-              <a:t> Q1: Is this valid C syntax?</a:t>
-            </a:r>
-          </a:p>
-          <a:p>
-            <a:pPr lvl="1"/>
-            <a:r>
-              <a:rPr lang="en-US" dirty="0"/>
-              <a:t> Write down send2 with a main function and compile it. Does it work?</a:t>
-            </a:r>
-          </a:p>
-          <a:p>
-            <a:pPr lvl="1"/>
-            <a:r>
-              <a:rPr lang="en-US" dirty="0"/>
-              <a:t> Examine the C language specification for switch and while loops. Does the code match the specification?</a:t>
-            </a:r>
-          </a:p>
-        </p:txBody>
-      </p:sp>
-      <p:sp>
-        <p:nvSpPr>
-          <p:cNvPr id="5" name="Slide Number Placeholder 4">
-            <a:extLst>
-              <a:ext uri="{FF2B5EF4-FFF2-40B4-BE49-F238E27FC236}">
-                <a16:creationId xmlns:a16="http://schemas.microsoft.com/office/drawing/2014/main" id="{9D470F4E-3B2D-4846-8D2E-AA691CDBBAD4}"/>
-              </a:ext>
-            </a:extLst>
-          </p:cNvPr>
-          <p:cNvSpPr>
-            <a:spLocks noGrp="1"/>
-          </p:cNvSpPr>
-          <p:nvPr>
-            <p:ph type="sldNum" sz="quarter" idx="12"/>
-          </p:nvPr>
-        </p:nvSpPr>
-        <p:spPr>
-          <a:xfrm>
-            <a:off x="6553200" y="4767263"/>
-            <a:ext cx="2133600" cy="273825"/>
-          </a:xfrm>
-          <a:prstGeom prst="rect">
-            <a:avLst/>
-          </a:prstGeom>
-        </p:spPr>
-        <p:txBody>
-          <a:bodyPr/>
-          <a:lstStyle/>
-          <a:p>
-            <a:pPr algn="r">
-              <a:buSzPct val="25000"/>
-            </a:pPr>
-            <a:fld id="{00000000-1234-1234-1234-123412341234}" type="slidenum">
-              <a:rPr lang="en-US" sz="900" smtClean="0">
-                <a:solidFill>
-                  <a:srgbClr val="888888"/>
-                </a:solidFill>
-                <a:latin typeface="Calibri"/>
-                <a:ea typeface="Calibri"/>
-                <a:cs typeface="Calibri"/>
-                <a:sym typeface="Calibri"/>
-              </a:rPr>
-              <a:pPr algn="r">
-                <a:buSzPct val="25000"/>
-              </a:pPr>
-              <a:t>15</a:t>
-            </a:fld>
-            <a:endParaRPr lang="en-US" sz="900">
-              <a:solidFill>
-                <a:srgbClr val="888888"/>
-              </a:solidFill>
-              <a:latin typeface="Calibri"/>
-              <a:ea typeface="Calibri"/>
-              <a:cs typeface="Calibri"/>
-              <a:sym typeface="Calibri"/>
-            </a:endParaRPr>
-          </a:p>
-        </p:txBody>
-      </p:sp>
-    </p:spTree>
-    <p:extLst>
-      <p:ext uri="{BB962C8B-B14F-4D97-AF65-F5344CB8AC3E}">
-        <p14:creationId xmlns:p14="http://schemas.microsoft.com/office/powerpoint/2010/main" val="294871608"/>
-      </p:ext>
-    </p:extLst>
-  </p:cSld>
-  <p:clrMapOvr>
-    <a:masterClrMapping/>
-  </p:clrMapOvr>
-</p:sld>
-</file>
-
 <file path=ppt/slides/slide16.xml><?xml version="1.0" encoding="utf-8"?>
 <p:sld xmlns:a="http://schemas.openxmlformats.org/drawingml/2006/main" xmlns:r="http://schemas.openxmlformats.org/officeDocument/2006/relationships" xmlns:p="http://schemas.openxmlformats.org/presentationml/2006/main">
   <p:cSld>
@@ -7943,7 +8499,7 @@
           <p:cNvPr id="2" name="Title 1">
             <a:extLst>
               <a:ext uri="{FF2B5EF4-FFF2-40B4-BE49-F238E27FC236}">
-                <a16:creationId xmlns:a16="http://schemas.microsoft.com/office/drawing/2014/main" id="{0C2819D6-6A29-7243-BA20-A6D002ED86D9}"/>
+                <a16:creationId xmlns:a16="http://schemas.microsoft.com/office/drawing/2014/main" id="{44ADDCE8-B901-404D-B1FE-F95B8E854F9B}"/>
               </a:ext>
             </a:extLst>
           </p:cNvPr>
@@ -7961,17 +8517,17 @@
           <a:p>
             <a:r>
               <a:rPr lang="en-US" dirty="0"/>
-              <a:t>Compare send and send2</a:t>
-            </a:r>
-          </a:p>
-        </p:txBody>
-      </p:sp>
-      <p:sp>
-        <p:nvSpPr>
-          <p:cNvPr id="3" name="Text Placeholder 2">
+              <a:t>Extra Slides</a:t>
+            </a:r>
+          </a:p>
+        </p:txBody>
+      </p:sp>
+      <p:sp>
+        <p:nvSpPr>
+          <p:cNvPr id="3" name="Slide Number Placeholder 2">
             <a:extLst>
               <a:ext uri="{FF2B5EF4-FFF2-40B4-BE49-F238E27FC236}">
-                <a16:creationId xmlns:a16="http://schemas.microsoft.com/office/drawing/2014/main" id="{601F5517-35AB-F041-BCC8-01057E04A342}"/>
+                <a16:creationId xmlns:a16="http://schemas.microsoft.com/office/drawing/2014/main" id="{D85F7917-6086-2544-88B5-D896FEF3DE67}"/>
               </a:ext>
             </a:extLst>
           </p:cNvPr>
@@ -7979,48 +8535,13 @@
             <a:spLocks noGrp="1"/>
           </p:cNvSpPr>
           <p:nvPr>
-            <p:ph idx="1"/>
-          </p:nvPr>
-        </p:nvSpPr>
-        <p:spPr/>
-        <p:txBody>
-          <a:bodyPr/>
-          <a:lstStyle/>
-          <a:p>
-            <a:r>
-              <a:rPr lang="en-US" dirty="0"/>
-              <a:t> Q1: Is this valid C syntax?</a:t>
-            </a:r>
-          </a:p>
-          <a:p>
-            <a:pPr lvl="1"/>
-            <a:r>
-              <a:rPr lang="en-US" dirty="0"/>
-              <a:t> C language specification</a:t>
-            </a:r>
-          </a:p>
-        </p:txBody>
-      </p:sp>
-      <p:sp>
-        <p:nvSpPr>
-          <p:cNvPr id="6" name="Slide Number Placeholder 5">
-            <a:extLst>
-              <a:ext uri="{FF2B5EF4-FFF2-40B4-BE49-F238E27FC236}">
-                <a16:creationId xmlns:a16="http://schemas.microsoft.com/office/drawing/2014/main" id="{48228A5F-2A66-ED45-A2A6-972532B0A998}"/>
-              </a:ext>
-            </a:extLst>
-          </p:cNvPr>
-          <p:cNvSpPr>
-            <a:spLocks noGrp="1"/>
-          </p:cNvSpPr>
-          <p:nvPr>
-            <p:ph type="sldNum" sz="quarter" idx="12"/>
+            <p:ph type="sldNum" idx="4294967295"/>
           </p:nvPr>
         </p:nvSpPr>
         <p:spPr>
           <a:xfrm>
-            <a:off x="6553200" y="4767263"/>
-            <a:ext cx="2133600" cy="273825"/>
+            <a:off x="8594725" y="4662488"/>
+            <a:ext cx="549275" cy="393700"/>
           </a:xfrm>
           <a:prstGeom prst="rect">
             <a:avLst/>
@@ -8030,141 +8551,19 @@
           <a:bodyPr/>
           <a:lstStyle/>
           <a:p>
-            <a:pPr algn="r">
-              <a:buSzPct val="25000"/>
-            </a:pPr>
             <a:fld id="{00000000-1234-1234-1234-123412341234}" type="slidenum">
-              <a:rPr lang="en-US" sz="900" smtClean="0">
-                <a:solidFill>
-                  <a:srgbClr val="888888"/>
-                </a:solidFill>
-                <a:latin typeface="Calibri"/>
-                <a:ea typeface="Calibri"/>
-                <a:cs typeface="Calibri"/>
-                <a:sym typeface="Calibri"/>
-              </a:rPr>
-              <a:pPr algn="r">
-                <a:buSzPct val="25000"/>
-              </a:pPr>
+              <a:rPr lang="en-US" smtClean="0"/>
+              <a:pPr/>
               <a:t>16</a:t>
             </a:fld>
-            <a:endParaRPr lang="en-US" sz="900">
-              <a:solidFill>
-                <a:srgbClr val="888888"/>
-              </a:solidFill>
-              <a:latin typeface="Calibri"/>
-              <a:ea typeface="Calibri"/>
-              <a:cs typeface="Calibri"/>
-              <a:sym typeface="Calibri"/>
-            </a:endParaRPr>
-          </a:p>
-        </p:txBody>
-      </p:sp>
-      <p:sp>
-        <p:nvSpPr>
-          <p:cNvPr id="5" name="TextBox 4">
-            <a:extLst>
-              <a:ext uri="{FF2B5EF4-FFF2-40B4-BE49-F238E27FC236}">
-                <a16:creationId xmlns:a16="http://schemas.microsoft.com/office/drawing/2014/main" id="{6913716C-A1D5-5A43-B7D1-C88B6EE603FF}"/>
-              </a:ext>
-            </a:extLst>
-          </p:cNvPr>
-          <p:cNvSpPr txBox="1"/>
-          <p:nvPr/>
-        </p:nvSpPr>
-        <p:spPr>
-          <a:xfrm>
-            <a:off x="1126714" y="2425147"/>
-            <a:ext cx="5178021" cy="2031325"/>
-          </a:xfrm>
-          <a:prstGeom prst="rect">
-            <a:avLst/>
-          </a:prstGeom>
-          <a:solidFill>
-            <a:schemeClr val="accent5">
-              <a:lumMod val="40000"/>
-              <a:lumOff val="60000"/>
-            </a:schemeClr>
-          </a:solidFill>
-        </p:spPr>
-        <p:txBody>
-          <a:bodyPr wrap="none" rtlCol="0">
-            <a:spAutoFit/>
-          </a:bodyPr>
-          <a:lstStyle/>
-          <a:p>
-            <a:r>
-              <a:rPr lang="en-US" dirty="0" err="1"/>
-              <a:t>selection_statement</a:t>
-            </a:r>
-            <a:r>
-              <a:rPr lang="en-US" dirty="0"/>
-              <a:t> -&gt; SWITCH '(' expression ')' statement</a:t>
-            </a:r>
-          </a:p>
-          <a:p>
             <a:endParaRPr lang="en-US" dirty="0"/>
-          </a:p>
-          <a:p>
-            <a:r>
-              <a:rPr lang="en-US" dirty="0" err="1"/>
-              <a:t>iteration_statement</a:t>
-            </a:r>
-            <a:r>
-              <a:rPr lang="en-US" dirty="0"/>
-              <a:t> -&gt; WHILE '(' expression ')' statement  </a:t>
-            </a:r>
-          </a:p>
-          <a:p>
-            <a:endParaRPr lang="en-US" dirty="0"/>
-          </a:p>
-          <a:p>
-            <a:r>
-              <a:rPr lang="en-US" dirty="0"/>
-              <a:t>                                  | DO statement WHILE '(' expression ')' ';'</a:t>
-            </a:r>
-          </a:p>
-          <a:p>
-            <a:endParaRPr lang="en-US" dirty="0"/>
-          </a:p>
-          <a:p>
-            <a:r>
-              <a:rPr lang="en-US" dirty="0"/>
-              <a:t>statement -&gt; </a:t>
-            </a:r>
-            <a:r>
-              <a:rPr lang="en-US" dirty="0" err="1"/>
-              <a:t>labeled_statement</a:t>
-            </a:r>
-            <a:endParaRPr lang="en-US" dirty="0"/>
-          </a:p>
-          <a:p>
-            <a:endParaRPr lang="en-US" dirty="0"/>
-          </a:p>
-          <a:p>
-            <a:r>
-              <a:rPr lang="en-US" dirty="0" err="1"/>
-              <a:t>labeled_statement</a:t>
-            </a:r>
-            <a:r>
-              <a:rPr lang="en-US" dirty="0"/>
-              <a:t> -&gt; CASE </a:t>
-            </a:r>
-            <a:r>
-              <a:rPr lang="en-US" dirty="0" err="1"/>
-              <a:t>constant_expression</a:t>
-            </a:r>
-            <a:r>
-              <a:rPr lang="en-US" dirty="0"/>
-              <a:t> ':' statement</a:t>
-            </a:r>
           </a:p>
         </p:txBody>
       </p:sp>
     </p:spTree>
     <p:extLst>
       <p:ext uri="{BB962C8B-B14F-4D97-AF65-F5344CB8AC3E}">
-        <p14:creationId xmlns:p14="http://schemas.microsoft.com/office/powerpoint/2010/main" val="2706087329"/>
+        <p14:creationId xmlns:p14="http://schemas.microsoft.com/office/powerpoint/2010/main" val="2250977745"/>
       </p:ext>
     </p:extLst>
   </p:cSld>
@@ -8237,42 +8636,26 @@
         </p:nvSpPr>
         <p:spPr/>
         <p:txBody>
-          <a:bodyPr>
-            <a:normAutofit/>
-          </a:bodyPr>
+          <a:bodyPr/>
           <a:lstStyle/>
           <a:p>
             <a:r>
               <a:rPr lang="en-US" dirty="0"/>
-              <a:t> Q2: Why re-write send (2 lines of code) as send2 (10 lines of code). Is there a reasonable purpose behind send2?</a:t>
+              <a:t> Q1: Is this valid C syntax?</a:t>
             </a:r>
           </a:p>
           <a:p>
             <a:pPr lvl="1"/>
             <a:r>
               <a:rPr lang="en-US" dirty="0"/>
-              <a:t> Compile and run two programs: one with send and one with send2</a:t>
+              <a:t> Write down send2 with a main function and compile it. Does it work?</a:t>
             </a:r>
           </a:p>
           <a:p>
             <a:pPr lvl="1"/>
             <a:r>
               <a:rPr lang="en-US" dirty="0"/>
-              <a:t> Are they executing the same instructions?</a:t>
-            </a:r>
-          </a:p>
-          <a:p>
-            <a:pPr lvl="1"/>
-            <a:r>
-              <a:rPr lang="en-US" dirty="0"/>
-              <a:t> Are they executing the instructions the same number of times?</a:t>
-            </a:r>
-          </a:p>
-          <a:p>
-            <a:pPr lvl="1"/>
-            <a:r>
-              <a:rPr lang="en-US" dirty="0"/>
-              <a:t> Is one faster than the other?</a:t>
+              <a:t> Examine the C language specification for switch and while loops. Does the code match the specification?</a:t>
             </a:r>
           </a:p>
         </p:txBody>
@@ -8282,7 +8665,7 @@
           <p:cNvPr id="5" name="Slide Number Placeholder 4">
             <a:extLst>
               <a:ext uri="{FF2B5EF4-FFF2-40B4-BE49-F238E27FC236}">
-                <a16:creationId xmlns:a16="http://schemas.microsoft.com/office/drawing/2014/main" id="{FE28D017-779D-C045-8C55-E26151311067}"/>
+                <a16:creationId xmlns:a16="http://schemas.microsoft.com/office/drawing/2014/main" id="{9D470F4E-3B2D-4846-8D2E-AA691CDBBAD4}"/>
               </a:ext>
             </a:extLst>
           </p:cNvPr>
@@ -8339,6 +8722,434 @@
     </p:spTree>
     <p:extLst>
       <p:ext uri="{BB962C8B-B14F-4D97-AF65-F5344CB8AC3E}">
+        <p14:creationId xmlns:p14="http://schemas.microsoft.com/office/powerpoint/2010/main" val="294871608"/>
+      </p:ext>
+    </p:extLst>
+  </p:cSld>
+  <p:clrMapOvr>
+    <a:masterClrMapping/>
+  </p:clrMapOvr>
+</p:sld>
+</file>
+
+<file path=ppt/slides/slide18.xml><?xml version="1.0" encoding="utf-8"?>
+<p:sld xmlns:a="http://schemas.openxmlformats.org/drawingml/2006/main" xmlns:r="http://schemas.openxmlformats.org/officeDocument/2006/relationships" xmlns:p="http://schemas.openxmlformats.org/presentationml/2006/main">
+  <p:cSld>
+    <p:spTree>
+      <p:nvGrpSpPr>
+        <p:cNvPr id="1" name=""/>
+        <p:cNvGrpSpPr/>
+        <p:nvPr/>
+      </p:nvGrpSpPr>
+      <p:grpSpPr>
+        <a:xfrm>
+          <a:off x="0" y="0"/>
+          <a:ext cx="0" cy="0"/>
+          <a:chOff x="0" y="0"/>
+          <a:chExt cx="0" cy="0"/>
+        </a:xfrm>
+      </p:grpSpPr>
+      <p:sp>
+        <p:nvSpPr>
+          <p:cNvPr id="2" name="Title 1">
+            <a:extLst>
+              <a:ext uri="{FF2B5EF4-FFF2-40B4-BE49-F238E27FC236}">
+                <a16:creationId xmlns:a16="http://schemas.microsoft.com/office/drawing/2014/main" id="{0C2819D6-6A29-7243-BA20-A6D002ED86D9}"/>
+              </a:ext>
+            </a:extLst>
+          </p:cNvPr>
+          <p:cNvSpPr>
+            <a:spLocks noGrp="1"/>
+          </p:cNvSpPr>
+          <p:nvPr>
+            <p:ph type="title"/>
+          </p:nvPr>
+        </p:nvSpPr>
+        <p:spPr/>
+        <p:txBody>
+          <a:bodyPr/>
+          <a:lstStyle/>
+          <a:p>
+            <a:r>
+              <a:rPr lang="en-US" dirty="0"/>
+              <a:t>Compare send and send2</a:t>
+            </a:r>
+          </a:p>
+        </p:txBody>
+      </p:sp>
+      <p:sp>
+        <p:nvSpPr>
+          <p:cNvPr id="3" name="Text Placeholder 2">
+            <a:extLst>
+              <a:ext uri="{FF2B5EF4-FFF2-40B4-BE49-F238E27FC236}">
+                <a16:creationId xmlns:a16="http://schemas.microsoft.com/office/drawing/2014/main" id="{601F5517-35AB-F041-BCC8-01057E04A342}"/>
+              </a:ext>
+            </a:extLst>
+          </p:cNvPr>
+          <p:cNvSpPr>
+            <a:spLocks noGrp="1"/>
+          </p:cNvSpPr>
+          <p:nvPr>
+            <p:ph idx="1"/>
+          </p:nvPr>
+        </p:nvSpPr>
+        <p:spPr/>
+        <p:txBody>
+          <a:bodyPr/>
+          <a:lstStyle/>
+          <a:p>
+            <a:r>
+              <a:rPr lang="en-US" dirty="0"/>
+              <a:t> Q1: Is this valid C syntax?</a:t>
+            </a:r>
+          </a:p>
+          <a:p>
+            <a:pPr lvl="1"/>
+            <a:r>
+              <a:rPr lang="en-US" dirty="0"/>
+              <a:t> C language specification</a:t>
+            </a:r>
+          </a:p>
+        </p:txBody>
+      </p:sp>
+      <p:sp>
+        <p:nvSpPr>
+          <p:cNvPr id="6" name="Slide Number Placeholder 5">
+            <a:extLst>
+              <a:ext uri="{FF2B5EF4-FFF2-40B4-BE49-F238E27FC236}">
+                <a16:creationId xmlns:a16="http://schemas.microsoft.com/office/drawing/2014/main" id="{48228A5F-2A66-ED45-A2A6-972532B0A998}"/>
+              </a:ext>
+            </a:extLst>
+          </p:cNvPr>
+          <p:cNvSpPr>
+            <a:spLocks noGrp="1"/>
+          </p:cNvSpPr>
+          <p:nvPr>
+            <p:ph type="sldNum" sz="quarter" idx="12"/>
+          </p:nvPr>
+        </p:nvSpPr>
+        <p:spPr>
+          <a:xfrm>
+            <a:off x="6553200" y="4767263"/>
+            <a:ext cx="2133600" cy="273825"/>
+          </a:xfrm>
+          <a:prstGeom prst="rect">
+            <a:avLst/>
+          </a:prstGeom>
+        </p:spPr>
+        <p:txBody>
+          <a:bodyPr/>
+          <a:lstStyle/>
+          <a:p>
+            <a:pPr algn="r">
+              <a:buSzPct val="25000"/>
+            </a:pPr>
+            <a:fld id="{00000000-1234-1234-1234-123412341234}" type="slidenum">
+              <a:rPr lang="en-US" sz="900" smtClean="0">
+                <a:solidFill>
+                  <a:srgbClr val="888888"/>
+                </a:solidFill>
+                <a:latin typeface="Calibri"/>
+                <a:ea typeface="Calibri"/>
+                <a:cs typeface="Calibri"/>
+                <a:sym typeface="Calibri"/>
+              </a:rPr>
+              <a:pPr algn="r">
+                <a:buSzPct val="25000"/>
+              </a:pPr>
+              <a:t>18</a:t>
+            </a:fld>
+            <a:endParaRPr lang="en-US" sz="900">
+              <a:solidFill>
+                <a:srgbClr val="888888"/>
+              </a:solidFill>
+              <a:latin typeface="Calibri"/>
+              <a:ea typeface="Calibri"/>
+              <a:cs typeface="Calibri"/>
+              <a:sym typeface="Calibri"/>
+            </a:endParaRPr>
+          </a:p>
+        </p:txBody>
+      </p:sp>
+      <p:sp>
+        <p:nvSpPr>
+          <p:cNvPr id="5" name="TextBox 4">
+            <a:extLst>
+              <a:ext uri="{FF2B5EF4-FFF2-40B4-BE49-F238E27FC236}">
+                <a16:creationId xmlns:a16="http://schemas.microsoft.com/office/drawing/2014/main" id="{6913716C-A1D5-5A43-B7D1-C88B6EE603FF}"/>
+              </a:ext>
+            </a:extLst>
+          </p:cNvPr>
+          <p:cNvSpPr txBox="1"/>
+          <p:nvPr/>
+        </p:nvSpPr>
+        <p:spPr>
+          <a:xfrm>
+            <a:off x="1126714" y="2425147"/>
+            <a:ext cx="5178021" cy="2031325"/>
+          </a:xfrm>
+          <a:prstGeom prst="rect">
+            <a:avLst/>
+          </a:prstGeom>
+          <a:solidFill>
+            <a:schemeClr val="accent5">
+              <a:lumMod val="40000"/>
+              <a:lumOff val="60000"/>
+            </a:schemeClr>
+          </a:solidFill>
+        </p:spPr>
+        <p:txBody>
+          <a:bodyPr wrap="none" rtlCol="0">
+            <a:spAutoFit/>
+          </a:bodyPr>
+          <a:lstStyle/>
+          <a:p>
+            <a:r>
+              <a:rPr lang="en-US" dirty="0" err="1"/>
+              <a:t>selection_statement</a:t>
+            </a:r>
+            <a:r>
+              <a:rPr lang="en-US" dirty="0"/>
+              <a:t> -&gt; SWITCH '(' expression ')' statement</a:t>
+            </a:r>
+          </a:p>
+          <a:p>
+            <a:endParaRPr lang="en-US" dirty="0"/>
+          </a:p>
+          <a:p>
+            <a:r>
+              <a:rPr lang="en-US" dirty="0" err="1"/>
+              <a:t>iteration_statement</a:t>
+            </a:r>
+            <a:r>
+              <a:rPr lang="en-US" dirty="0"/>
+              <a:t> -&gt; WHILE '(' expression ')' statement  </a:t>
+            </a:r>
+          </a:p>
+          <a:p>
+            <a:endParaRPr lang="en-US" dirty="0"/>
+          </a:p>
+          <a:p>
+            <a:r>
+              <a:rPr lang="en-US" dirty="0"/>
+              <a:t>                                  | DO statement WHILE '(' expression ')' ';'</a:t>
+            </a:r>
+          </a:p>
+          <a:p>
+            <a:endParaRPr lang="en-US" dirty="0"/>
+          </a:p>
+          <a:p>
+            <a:r>
+              <a:rPr lang="en-US" dirty="0"/>
+              <a:t>statement -&gt; </a:t>
+            </a:r>
+            <a:r>
+              <a:rPr lang="en-US" dirty="0" err="1"/>
+              <a:t>labeled_statement</a:t>
+            </a:r>
+            <a:endParaRPr lang="en-US" dirty="0"/>
+          </a:p>
+          <a:p>
+            <a:endParaRPr lang="en-US" dirty="0"/>
+          </a:p>
+          <a:p>
+            <a:r>
+              <a:rPr lang="en-US" dirty="0" err="1"/>
+              <a:t>labeled_statement</a:t>
+            </a:r>
+            <a:r>
+              <a:rPr lang="en-US" dirty="0"/>
+              <a:t> -&gt; CASE </a:t>
+            </a:r>
+            <a:r>
+              <a:rPr lang="en-US" dirty="0" err="1"/>
+              <a:t>constant_expression</a:t>
+            </a:r>
+            <a:r>
+              <a:rPr lang="en-US" dirty="0"/>
+              <a:t> ':' statement</a:t>
+            </a:r>
+          </a:p>
+        </p:txBody>
+      </p:sp>
+    </p:spTree>
+    <p:extLst>
+      <p:ext uri="{BB962C8B-B14F-4D97-AF65-F5344CB8AC3E}">
+        <p14:creationId xmlns:p14="http://schemas.microsoft.com/office/powerpoint/2010/main" val="2706087329"/>
+      </p:ext>
+    </p:extLst>
+  </p:cSld>
+  <p:clrMapOvr>
+    <a:masterClrMapping/>
+  </p:clrMapOvr>
+</p:sld>
+</file>
+
+<file path=ppt/slides/slide19.xml><?xml version="1.0" encoding="utf-8"?>
+<p:sld xmlns:a="http://schemas.openxmlformats.org/drawingml/2006/main" xmlns:r="http://schemas.openxmlformats.org/officeDocument/2006/relationships" xmlns:p="http://schemas.openxmlformats.org/presentationml/2006/main">
+  <p:cSld>
+    <p:spTree>
+      <p:nvGrpSpPr>
+        <p:cNvPr id="1" name=""/>
+        <p:cNvGrpSpPr/>
+        <p:nvPr/>
+      </p:nvGrpSpPr>
+      <p:grpSpPr>
+        <a:xfrm>
+          <a:off x="0" y="0"/>
+          <a:ext cx="0" cy="0"/>
+          <a:chOff x="0" y="0"/>
+          <a:chExt cx="0" cy="0"/>
+        </a:xfrm>
+      </p:grpSpPr>
+      <p:sp>
+        <p:nvSpPr>
+          <p:cNvPr id="2" name="Title 1">
+            <a:extLst>
+              <a:ext uri="{FF2B5EF4-FFF2-40B4-BE49-F238E27FC236}">
+                <a16:creationId xmlns:a16="http://schemas.microsoft.com/office/drawing/2014/main" id="{0C2819D6-6A29-7243-BA20-A6D002ED86D9}"/>
+              </a:ext>
+            </a:extLst>
+          </p:cNvPr>
+          <p:cNvSpPr>
+            <a:spLocks noGrp="1"/>
+          </p:cNvSpPr>
+          <p:nvPr>
+            <p:ph type="title"/>
+          </p:nvPr>
+        </p:nvSpPr>
+        <p:spPr/>
+        <p:txBody>
+          <a:bodyPr/>
+          <a:lstStyle/>
+          <a:p>
+            <a:r>
+              <a:rPr lang="en-US" dirty="0"/>
+              <a:t>Compare send and send2</a:t>
+            </a:r>
+          </a:p>
+        </p:txBody>
+      </p:sp>
+      <p:sp>
+        <p:nvSpPr>
+          <p:cNvPr id="3" name="Text Placeholder 2">
+            <a:extLst>
+              <a:ext uri="{FF2B5EF4-FFF2-40B4-BE49-F238E27FC236}">
+                <a16:creationId xmlns:a16="http://schemas.microsoft.com/office/drawing/2014/main" id="{601F5517-35AB-F041-BCC8-01057E04A342}"/>
+              </a:ext>
+            </a:extLst>
+          </p:cNvPr>
+          <p:cNvSpPr>
+            <a:spLocks noGrp="1"/>
+          </p:cNvSpPr>
+          <p:nvPr>
+            <p:ph idx="1"/>
+          </p:nvPr>
+        </p:nvSpPr>
+        <p:spPr/>
+        <p:txBody>
+          <a:bodyPr>
+            <a:normAutofit/>
+          </a:bodyPr>
+          <a:lstStyle/>
+          <a:p>
+            <a:r>
+              <a:rPr lang="en-US" dirty="0"/>
+              <a:t> Q2: Why re-write send (2 lines of code) as send2 (10 lines of code). Is there a reasonable purpose behind send2?</a:t>
+            </a:r>
+          </a:p>
+          <a:p>
+            <a:pPr lvl="1"/>
+            <a:r>
+              <a:rPr lang="en-US" dirty="0"/>
+              <a:t> Compile and run two programs: one with send and one with send2</a:t>
+            </a:r>
+          </a:p>
+          <a:p>
+            <a:pPr lvl="1"/>
+            <a:r>
+              <a:rPr lang="en-US" dirty="0"/>
+              <a:t> Are they executing the same instructions?</a:t>
+            </a:r>
+          </a:p>
+          <a:p>
+            <a:pPr lvl="1"/>
+            <a:r>
+              <a:rPr lang="en-US" dirty="0"/>
+              <a:t> Are they executing the instructions the same number of times?</a:t>
+            </a:r>
+          </a:p>
+          <a:p>
+            <a:pPr lvl="1"/>
+            <a:r>
+              <a:rPr lang="en-US" dirty="0"/>
+              <a:t> Is one faster than the other?</a:t>
+            </a:r>
+          </a:p>
+        </p:txBody>
+      </p:sp>
+      <p:sp>
+        <p:nvSpPr>
+          <p:cNvPr id="5" name="Slide Number Placeholder 4">
+            <a:extLst>
+              <a:ext uri="{FF2B5EF4-FFF2-40B4-BE49-F238E27FC236}">
+                <a16:creationId xmlns:a16="http://schemas.microsoft.com/office/drawing/2014/main" id="{FE28D017-779D-C045-8C55-E26151311067}"/>
+              </a:ext>
+            </a:extLst>
+          </p:cNvPr>
+          <p:cNvSpPr>
+            <a:spLocks noGrp="1"/>
+          </p:cNvSpPr>
+          <p:nvPr>
+            <p:ph type="sldNum" sz="quarter" idx="12"/>
+          </p:nvPr>
+        </p:nvSpPr>
+        <p:spPr>
+          <a:xfrm>
+            <a:off x="6553200" y="4767263"/>
+            <a:ext cx="2133600" cy="273825"/>
+          </a:xfrm>
+          <a:prstGeom prst="rect">
+            <a:avLst/>
+          </a:prstGeom>
+        </p:spPr>
+        <p:txBody>
+          <a:bodyPr/>
+          <a:lstStyle/>
+          <a:p>
+            <a:pPr algn="r">
+              <a:buSzPct val="25000"/>
+            </a:pPr>
+            <a:fld id="{00000000-1234-1234-1234-123412341234}" type="slidenum">
+              <a:rPr lang="en-US" sz="900" smtClean="0">
+                <a:solidFill>
+                  <a:srgbClr val="888888"/>
+                </a:solidFill>
+                <a:latin typeface="Calibri"/>
+                <a:ea typeface="Calibri"/>
+                <a:cs typeface="Calibri"/>
+                <a:sym typeface="Calibri"/>
+              </a:rPr>
+              <a:pPr algn="r">
+                <a:buSzPct val="25000"/>
+              </a:pPr>
+              <a:t>19</a:t>
+            </a:fld>
+            <a:endParaRPr lang="en-US" sz="900">
+              <a:solidFill>
+                <a:srgbClr val="888888"/>
+              </a:solidFill>
+              <a:latin typeface="Calibri"/>
+              <a:ea typeface="Calibri"/>
+              <a:cs typeface="Calibri"/>
+              <a:sym typeface="Calibri"/>
+            </a:endParaRPr>
+          </a:p>
+        </p:txBody>
+      </p:sp>
+    </p:spTree>
+    <p:extLst>
+      <p:ext uri="{BB962C8B-B14F-4D97-AF65-F5344CB8AC3E}">
         <p14:creationId xmlns:p14="http://schemas.microsoft.com/office/powerpoint/2010/main" val="1448309866"/>
       </p:ext>
     </p:extLst>
@@ -8349,7 +9160,242 @@
 </p:sld>
 </file>
 
-<file path=ppt/slides/slide18.xml><?xml version="1.0" encoding="utf-8"?>
+<file path=ppt/slides/slide2.xml><?xml version="1.0" encoding="utf-8"?>
+<p:sld xmlns:a="http://schemas.openxmlformats.org/drawingml/2006/main" xmlns:r="http://schemas.openxmlformats.org/officeDocument/2006/relationships" xmlns:p="http://schemas.openxmlformats.org/presentationml/2006/main">
+  <p:cSld>
+    <p:spTree>
+      <p:nvGrpSpPr>
+        <p:cNvPr id="1" name=""/>
+        <p:cNvGrpSpPr/>
+        <p:nvPr/>
+      </p:nvGrpSpPr>
+      <p:grpSpPr>
+        <a:xfrm>
+          <a:off x="0" y="0"/>
+          <a:ext cx="0" cy="0"/>
+          <a:chOff x="0" y="0"/>
+          <a:chExt cx="0" cy="0"/>
+        </a:xfrm>
+      </p:grpSpPr>
+      <p:sp>
+        <p:nvSpPr>
+          <p:cNvPr id="2" name="Title 1">
+            <a:extLst>
+              <a:ext uri="{FF2B5EF4-FFF2-40B4-BE49-F238E27FC236}">
+                <a16:creationId xmlns:a16="http://schemas.microsoft.com/office/drawing/2014/main" id="{61A18D56-F474-CD94-B821-B81FCFFA7129}"/>
+              </a:ext>
+            </a:extLst>
+          </p:cNvPr>
+          <p:cNvSpPr>
+            <a:spLocks noGrp="1"/>
+          </p:cNvSpPr>
+          <p:nvPr>
+            <p:ph type="title"/>
+          </p:nvPr>
+        </p:nvSpPr>
+        <p:spPr/>
+        <p:txBody>
+          <a:bodyPr/>
+          <a:lstStyle/>
+          <a:p>
+            <a:r>
+              <a:rPr lang="en-US" dirty="0"/>
+              <a:t>High Level Programming Languages</a:t>
+            </a:r>
+          </a:p>
+        </p:txBody>
+      </p:sp>
+      <p:sp>
+        <p:nvSpPr>
+          <p:cNvPr id="3" name="Slide Number Placeholder 2">
+            <a:extLst>
+              <a:ext uri="{FF2B5EF4-FFF2-40B4-BE49-F238E27FC236}">
+                <a16:creationId xmlns:a16="http://schemas.microsoft.com/office/drawing/2014/main" id="{D6F64EEB-F3F4-046A-AC97-C40BFA2CFBA3}"/>
+              </a:ext>
+            </a:extLst>
+          </p:cNvPr>
+          <p:cNvSpPr>
+            <a:spLocks noGrp="1"/>
+          </p:cNvSpPr>
+          <p:nvPr>
+            <p:ph type="sldNum" sz="quarter" idx="12"/>
+          </p:nvPr>
+        </p:nvSpPr>
+        <p:spPr/>
+        <p:txBody>
+          <a:bodyPr/>
+          <a:lstStyle/>
+          <a:p>
+            <a:fld id="{7B252BF6-6A9C-D04A-BBE8-37A07D64A1C3}" type="slidenum">
+              <a:rPr lang="en-US" smtClean="0"/>
+              <a:t>2</a:t>
+            </a:fld>
+            <a:endParaRPr lang="en-US"/>
+          </a:p>
+        </p:txBody>
+      </p:sp>
+      <p:sp>
+        <p:nvSpPr>
+          <p:cNvPr id="4" name="Rounded Rectangle 3">
+            <a:extLst>
+              <a:ext uri="{FF2B5EF4-FFF2-40B4-BE49-F238E27FC236}">
+                <a16:creationId xmlns:a16="http://schemas.microsoft.com/office/drawing/2014/main" id="{CF08B0F2-8E7F-18B5-F7B2-EA96B9E9A909}"/>
+              </a:ext>
+            </a:extLst>
+          </p:cNvPr>
+          <p:cNvSpPr/>
+          <p:nvPr/>
+        </p:nvSpPr>
+        <p:spPr>
+          <a:xfrm>
+            <a:off x="775606" y="1502229"/>
+            <a:ext cx="3396343" cy="914400"/>
+          </a:xfrm>
+          <a:prstGeom prst="roundRect">
+            <a:avLst/>
+          </a:prstGeom>
+        </p:spPr>
+        <p:style>
+          <a:lnRef idx="2">
+            <a:schemeClr val="accent1">
+              <a:shade val="15000"/>
+            </a:schemeClr>
+          </a:lnRef>
+          <a:fillRef idx="1">
+            <a:schemeClr val="accent1"/>
+          </a:fillRef>
+          <a:effectRef idx="0">
+            <a:schemeClr val="accent1"/>
+          </a:effectRef>
+          <a:fontRef idx="minor">
+            <a:schemeClr val="lt1"/>
+          </a:fontRef>
+        </p:style>
+        <p:txBody>
+          <a:bodyPr rtlCol="0" anchor="ctr"/>
+          <a:lstStyle/>
+          <a:p>
+            <a:pPr algn="ctr"/>
+            <a:r>
+              <a:rPr lang="en-US" sz="2400" dirty="0"/>
+              <a:t>Programming Languages</a:t>
+            </a:r>
+          </a:p>
+          <a:p>
+            <a:pPr algn="ctr"/>
+            <a:r>
+              <a:rPr lang="en-US" dirty="0"/>
+              <a:t>C, C++, Python, Java, …</a:t>
+            </a:r>
+          </a:p>
+        </p:txBody>
+      </p:sp>
+      <p:sp>
+        <p:nvSpPr>
+          <p:cNvPr id="5" name="Rounded Rectangle 4">
+            <a:extLst>
+              <a:ext uri="{FF2B5EF4-FFF2-40B4-BE49-F238E27FC236}">
+                <a16:creationId xmlns:a16="http://schemas.microsoft.com/office/drawing/2014/main" id="{D7BDFD86-92A8-DEC3-0A43-3C930C6B2F94}"/>
+              </a:ext>
+            </a:extLst>
+          </p:cNvPr>
+          <p:cNvSpPr/>
+          <p:nvPr/>
+        </p:nvSpPr>
+        <p:spPr>
+          <a:xfrm>
+            <a:off x="775606" y="3232888"/>
+            <a:ext cx="3396343" cy="914400"/>
+          </a:xfrm>
+          <a:prstGeom prst="roundRect">
+            <a:avLst/>
+          </a:prstGeom>
+        </p:spPr>
+        <p:style>
+          <a:lnRef idx="2">
+            <a:schemeClr val="accent1">
+              <a:shade val="15000"/>
+            </a:schemeClr>
+          </a:lnRef>
+          <a:fillRef idx="1">
+            <a:schemeClr val="accent1"/>
+          </a:fillRef>
+          <a:effectRef idx="0">
+            <a:schemeClr val="accent1"/>
+          </a:effectRef>
+          <a:fontRef idx="minor">
+            <a:schemeClr val="lt1"/>
+          </a:fontRef>
+        </p:style>
+        <p:txBody>
+          <a:bodyPr rtlCol="0" anchor="ctr"/>
+          <a:lstStyle/>
+          <a:p>
+            <a:pPr algn="ctr"/>
+            <a:r>
+              <a:rPr lang="en-US" sz="2400" dirty="0"/>
+              <a:t>Natural Languages</a:t>
+            </a:r>
+          </a:p>
+          <a:p>
+            <a:pPr algn="ctr"/>
+            <a:r>
+              <a:rPr lang="en-US" dirty="0"/>
+              <a:t>English, Korean, Tagalog, Warlpiri, …</a:t>
+            </a:r>
+          </a:p>
+        </p:txBody>
+      </p:sp>
+      <p:cxnSp>
+        <p:nvCxnSpPr>
+          <p:cNvPr id="12" name="Straight Connector 11">
+            <a:extLst>
+              <a:ext uri="{FF2B5EF4-FFF2-40B4-BE49-F238E27FC236}">
+                <a16:creationId xmlns:a16="http://schemas.microsoft.com/office/drawing/2014/main" id="{BA3BCD1E-102F-FB9F-847C-0FABF518D64D}"/>
+              </a:ext>
+            </a:extLst>
+          </p:cNvPr>
+          <p:cNvCxnSpPr/>
+          <p:nvPr/>
+        </p:nvCxnSpPr>
+        <p:spPr>
+          <a:xfrm>
+            <a:off x="277586" y="2833007"/>
+            <a:ext cx="8433707" cy="0"/>
+          </a:xfrm>
+          <a:prstGeom prst="line">
+            <a:avLst/>
+          </a:prstGeom>
+        </p:spPr>
+        <p:style>
+          <a:lnRef idx="1">
+            <a:schemeClr val="accent1"/>
+          </a:lnRef>
+          <a:fillRef idx="0">
+            <a:schemeClr val="accent1"/>
+          </a:fillRef>
+          <a:effectRef idx="0">
+            <a:schemeClr val="accent1"/>
+          </a:effectRef>
+          <a:fontRef idx="minor">
+            <a:schemeClr val="tx1"/>
+          </a:fontRef>
+        </p:style>
+      </p:cxnSp>
+    </p:spTree>
+    <p:extLst>
+      <p:ext uri="{BB962C8B-B14F-4D97-AF65-F5344CB8AC3E}">
+        <p14:creationId xmlns:p14="http://schemas.microsoft.com/office/powerpoint/2010/main" val="857509715"/>
+      </p:ext>
+    </p:extLst>
+  </p:cSld>
+  <p:clrMapOvr>
+    <a:masterClrMapping/>
+  </p:clrMapOvr>
+</p:sld>
+</file>
+
+<file path=ppt/slides/slide20.xml><?xml version="1.0" encoding="utf-8"?>
 <p:sld xmlns:a="http://schemas.openxmlformats.org/drawingml/2006/main" xmlns:r="http://schemas.openxmlformats.org/officeDocument/2006/relationships" xmlns:p="http://schemas.openxmlformats.org/presentationml/2006/main">
   <p:cSld>
     <p:spTree>
@@ -8438,7 +9484,7 @@
             <a:fld id="{00000000-1234-1234-1234-123412341234}" type="slidenum">
               <a:rPr lang="en-US" smtClean="0"/>
               <a:pPr/>
-              <a:t>18</a:t>
+              <a:t>20</a:t>
             </a:fld>
             <a:endParaRPr lang="en-US"/>
           </a:p>
@@ -8822,7 +9868,7 @@
 </p:sld>
 </file>
 
-<file path=ppt/slides/slide19.xml><?xml version="1.0" encoding="utf-8"?>
+<file path=ppt/slides/slide21.xml><?xml version="1.0" encoding="utf-8"?>
 <p:sld xmlns:a="http://schemas.openxmlformats.org/drawingml/2006/main" xmlns:r="http://schemas.openxmlformats.org/officeDocument/2006/relationships" xmlns:p="http://schemas.openxmlformats.org/presentationml/2006/main">
   <p:cSld>
     <p:spTree>
@@ -8959,7 +10005,7 @@
             <a:fld id="{00000000-1234-1234-1234-123412341234}" type="slidenum">
               <a:rPr lang="en-US" smtClean="0"/>
               <a:pPr/>
-              <a:t>19</a:t>
+              <a:t>21</a:t>
             </a:fld>
             <a:endParaRPr lang="en-US"/>
           </a:p>
@@ -8973,7 +10019,883 @@
 </p:sld>
 </file>
 
-<file path=ppt/slides/slide2.xml><?xml version="1.0" encoding="utf-8"?>
+<file path=ppt/slides/slide22.xml><?xml version="1.0" encoding="utf-8"?>
+<p:sld xmlns:a="http://schemas.openxmlformats.org/drawingml/2006/main" xmlns:r="http://schemas.openxmlformats.org/officeDocument/2006/relationships" xmlns:p="http://schemas.openxmlformats.org/presentationml/2006/main">
+  <p:cSld>
+    <p:spTree>
+      <p:nvGrpSpPr>
+        <p:cNvPr id="1" name=""/>
+        <p:cNvGrpSpPr/>
+        <p:nvPr/>
+      </p:nvGrpSpPr>
+      <p:grpSpPr>
+        <a:xfrm>
+          <a:off x="0" y="0"/>
+          <a:ext cx="0" cy="0"/>
+          <a:chOff x="0" y="0"/>
+          <a:chExt cx="0" cy="0"/>
+        </a:xfrm>
+      </p:grpSpPr>
+      <p:sp>
+        <p:nvSpPr>
+          <p:cNvPr id="2" name="Title 1">
+            <a:extLst>
+              <a:ext uri="{FF2B5EF4-FFF2-40B4-BE49-F238E27FC236}">
+                <a16:creationId xmlns:a16="http://schemas.microsoft.com/office/drawing/2014/main" id="{FB001243-385E-794A-9037-9F40B9A057ED}"/>
+              </a:ext>
+            </a:extLst>
+          </p:cNvPr>
+          <p:cNvSpPr>
+            <a:spLocks noGrp="1"/>
+          </p:cNvSpPr>
+          <p:nvPr>
+            <p:ph type="title"/>
+          </p:nvPr>
+        </p:nvSpPr>
+        <p:spPr/>
+        <p:txBody>
+          <a:bodyPr>
+            <a:normAutofit/>
+          </a:bodyPr>
+          <a:lstStyle/>
+          <a:p>
+            <a:r>
+              <a:rPr lang="en-US" dirty="0">
+                <a:latin typeface="Calibri"/>
+                <a:ea typeface="Calibri"/>
+                <a:cs typeface="Calibri"/>
+                <a:sym typeface="Calibri"/>
+              </a:rPr>
+              <a:t>Rich Programmer Food (Steve </a:t>
+            </a:r>
+            <a:r>
+              <a:rPr lang="en-US" dirty="0" err="1">
+                <a:latin typeface="Calibri"/>
+                <a:ea typeface="Calibri"/>
+                <a:cs typeface="Calibri"/>
+                <a:sym typeface="Calibri"/>
+              </a:rPr>
+              <a:t>Yegge</a:t>
+            </a:r>
+            <a:r>
+              <a:rPr lang="en-US" dirty="0">
+                <a:latin typeface="Calibri"/>
+                <a:ea typeface="Calibri"/>
+                <a:cs typeface="Calibri"/>
+                <a:sym typeface="Calibri"/>
+              </a:rPr>
+              <a:t>)</a:t>
+            </a:r>
+            <a:endParaRPr lang="en-US" dirty="0"/>
+          </a:p>
+        </p:txBody>
+      </p:sp>
+      <p:sp>
+        <p:nvSpPr>
+          <p:cNvPr id="3" name="Slide Number Placeholder 2">
+            <a:extLst>
+              <a:ext uri="{FF2B5EF4-FFF2-40B4-BE49-F238E27FC236}">
+                <a16:creationId xmlns:a16="http://schemas.microsoft.com/office/drawing/2014/main" id="{1E5EE2B8-BD09-3E45-927D-FE24B7116F31}"/>
+              </a:ext>
+            </a:extLst>
+          </p:cNvPr>
+          <p:cNvSpPr>
+            <a:spLocks noGrp="1"/>
+          </p:cNvSpPr>
+          <p:nvPr>
+            <p:ph type="sldNum" sz="quarter" idx="12"/>
+          </p:nvPr>
+        </p:nvSpPr>
+        <p:spPr>
+          <a:xfrm>
+            <a:off x="8472457" y="4663217"/>
+            <a:ext cx="548700" cy="393525"/>
+          </a:xfrm>
+          <a:prstGeom prst="rect">
+            <a:avLst/>
+          </a:prstGeom>
+        </p:spPr>
+        <p:txBody>
+          <a:bodyPr/>
+          <a:lstStyle/>
+          <a:p>
+            <a:fld id="{00000000-1234-1234-1234-123412341234}" type="slidenum">
+              <a:rPr lang="en-US" smtClean="0"/>
+              <a:pPr/>
+              <a:t>22</a:t>
+            </a:fld>
+            <a:endParaRPr lang="en-US"/>
+          </a:p>
+        </p:txBody>
+      </p:sp>
+      <p:sp>
+        <p:nvSpPr>
+          <p:cNvPr id="4" name="Shape 78">
+            <a:extLst>
+              <a:ext uri="{FF2B5EF4-FFF2-40B4-BE49-F238E27FC236}">
+                <a16:creationId xmlns:a16="http://schemas.microsoft.com/office/drawing/2014/main" id="{F0EDCED3-7685-2B4E-9F10-7F3E3B163731}"/>
+              </a:ext>
+            </a:extLst>
+          </p:cNvPr>
+          <p:cNvSpPr txBox="1"/>
+          <p:nvPr/>
+        </p:nvSpPr>
+        <p:spPr>
+          <a:xfrm>
+            <a:off x="397565" y="1673352"/>
+            <a:ext cx="8074892" cy="1459462"/>
+          </a:xfrm>
+          <a:prstGeom prst="rect">
+            <a:avLst/>
+          </a:prstGeom>
+          <a:noFill/>
+          <a:ln>
+            <a:noFill/>
+          </a:ln>
+        </p:spPr>
+        <p:txBody>
+          <a:bodyPr lIns="68569" tIns="34275" rIns="68569" bIns="34275" anchor="t" anchorCtr="0">
+            <a:noAutofit/>
+          </a:bodyPr>
+          <a:lstStyle/>
+          <a:p>
+            <a:pPr>
+              <a:buSzPct val="25000"/>
+            </a:pPr>
+            <a:r>
+              <a:rPr lang="en-US" sz="2400" dirty="0">
+                <a:solidFill>
+                  <a:schemeClr val="dk1"/>
+                </a:solidFill>
+                <a:latin typeface="Calibri"/>
+                <a:ea typeface="Calibri"/>
+                <a:cs typeface="Calibri"/>
+                <a:sym typeface="Calibri"/>
+              </a:rPr>
+              <a:t>“</a:t>
+            </a:r>
+            <a:r>
+              <a:rPr lang="en-US" sz="2400" dirty="0">
+                <a:solidFill>
+                  <a:schemeClr val="dk2"/>
+                </a:solidFill>
+                <a:latin typeface="Calibri"/>
+                <a:ea typeface="Calibri"/>
+                <a:cs typeface="Calibri"/>
+                <a:sym typeface="Calibri"/>
+              </a:rPr>
+              <a:t>In fact, Compiler Construction </a:t>
+            </a:r>
+            <a:r>
+              <a:rPr lang="en-US" sz="2400" dirty="0">
+                <a:solidFill>
+                  <a:schemeClr val="dk1"/>
+                </a:solidFill>
+                <a:latin typeface="Calibri"/>
+                <a:ea typeface="Calibri"/>
+                <a:cs typeface="Calibri"/>
+                <a:sym typeface="Calibri"/>
+              </a:rPr>
+              <a:t>is, </a:t>
+            </a:r>
+            <a:r>
+              <a:rPr lang="en-US" sz="2100" dirty="0">
+                <a:solidFill>
+                  <a:schemeClr val="dk1"/>
+                </a:solidFill>
+                <a:latin typeface="Calibri"/>
+                <a:ea typeface="Calibri"/>
+                <a:cs typeface="Calibri"/>
+                <a:sym typeface="Calibri"/>
+              </a:rPr>
+              <a:t>in my own humble and probably embarrassingly wrong opinion</a:t>
+            </a:r>
+            <a:r>
+              <a:rPr lang="en-US" sz="2400" dirty="0">
+                <a:solidFill>
+                  <a:schemeClr val="dk1"/>
+                </a:solidFill>
+                <a:latin typeface="Calibri"/>
+                <a:ea typeface="Calibri"/>
+                <a:cs typeface="Calibri"/>
+                <a:sym typeface="Calibri"/>
+              </a:rPr>
+              <a:t>, </a:t>
+            </a:r>
+            <a:r>
+              <a:rPr lang="en-US" sz="2400" dirty="0">
+                <a:solidFill>
+                  <a:srgbClr val="1F497D"/>
+                </a:solidFill>
+                <a:latin typeface="Calibri"/>
+                <a:ea typeface="Calibri"/>
+                <a:cs typeface="Calibri"/>
+                <a:sym typeface="Calibri"/>
+              </a:rPr>
+              <a:t>the second most important CS class you can take in an undergraduate computer science program</a:t>
+            </a:r>
+            <a:r>
+              <a:rPr lang="en-US" sz="2400" dirty="0">
+                <a:solidFill>
+                  <a:schemeClr val="dk1"/>
+                </a:solidFill>
+                <a:latin typeface="Calibri"/>
+                <a:ea typeface="Calibri"/>
+                <a:cs typeface="Calibri"/>
+                <a:sym typeface="Calibri"/>
+              </a:rPr>
+              <a:t>.”</a:t>
+            </a:r>
+          </a:p>
+        </p:txBody>
+      </p:sp>
+      <p:sp>
+        <p:nvSpPr>
+          <p:cNvPr id="5" name="Shape 183">
+            <a:extLst>
+              <a:ext uri="{FF2B5EF4-FFF2-40B4-BE49-F238E27FC236}">
+                <a16:creationId xmlns:a16="http://schemas.microsoft.com/office/drawing/2014/main" id="{50271DE4-8FA6-D748-A9E2-6DFC785A1FF4}"/>
+              </a:ext>
+            </a:extLst>
+          </p:cNvPr>
+          <p:cNvSpPr txBox="1"/>
+          <p:nvPr/>
+        </p:nvSpPr>
+        <p:spPr>
+          <a:xfrm>
+            <a:off x="3981892" y="3460396"/>
+            <a:ext cx="4490566" cy="807913"/>
+          </a:xfrm>
+          <a:prstGeom prst="rect">
+            <a:avLst/>
+          </a:prstGeom>
+          <a:noFill/>
+          <a:ln>
+            <a:noFill/>
+          </a:ln>
+        </p:spPr>
+        <p:txBody>
+          <a:bodyPr lIns="68569" tIns="34275" rIns="68569" bIns="34275" anchor="t" anchorCtr="0">
+            <a:noAutofit/>
+          </a:bodyPr>
+          <a:lstStyle/>
+          <a:p>
+            <a:pPr>
+              <a:buSzPct val="25000"/>
+            </a:pPr>
+            <a:r>
+              <a:rPr lang="en-US" sz="2400" dirty="0">
+                <a:solidFill>
+                  <a:schemeClr val="dk1"/>
+                </a:solidFill>
+                <a:latin typeface="Calibri"/>
+                <a:ea typeface="Calibri"/>
+                <a:cs typeface="Calibri"/>
+                <a:sym typeface="Calibri"/>
+              </a:rPr>
+              <a:t>Steve’s most important CS class: </a:t>
+            </a:r>
+          </a:p>
+          <a:p>
+            <a:pPr>
+              <a:buSzPct val="25000"/>
+            </a:pPr>
+            <a:r>
+              <a:rPr lang="en-US" sz="2400" dirty="0">
+                <a:solidFill>
+                  <a:schemeClr val="dk1"/>
+                </a:solidFill>
+                <a:latin typeface="Calibri"/>
+                <a:ea typeface="Calibri"/>
+                <a:cs typeface="Calibri"/>
+                <a:sym typeface="Calibri"/>
+              </a:rPr>
+              <a:t>“</a:t>
+            </a:r>
+            <a:r>
+              <a:rPr lang="en-US" sz="2400" dirty="0">
+                <a:solidFill>
+                  <a:schemeClr val="dk2"/>
+                </a:solidFill>
+                <a:latin typeface="Calibri"/>
+                <a:ea typeface="Calibri"/>
+                <a:cs typeface="Calibri"/>
+                <a:sym typeface="Calibri"/>
+              </a:rPr>
+              <a:t>Typing 101. Duh</a:t>
+            </a:r>
+            <a:r>
+              <a:rPr lang="en-US" sz="2400" dirty="0">
+                <a:solidFill>
+                  <a:schemeClr val="dk1"/>
+                </a:solidFill>
+                <a:latin typeface="Calibri"/>
+                <a:ea typeface="Calibri"/>
+                <a:cs typeface="Calibri"/>
+                <a:sym typeface="Calibri"/>
+              </a:rPr>
+              <a:t>”</a:t>
+            </a:r>
+          </a:p>
+        </p:txBody>
+      </p:sp>
+    </p:spTree>
+    <p:extLst>
+      <p:ext uri="{BB962C8B-B14F-4D97-AF65-F5344CB8AC3E}">
+        <p14:creationId xmlns:p14="http://schemas.microsoft.com/office/powerpoint/2010/main" val="1707642495"/>
+      </p:ext>
+    </p:extLst>
+  </p:cSld>
+  <p:clrMapOvr>
+    <a:masterClrMapping/>
+  </p:clrMapOvr>
+</p:sld>
+</file>
+
+<file path=ppt/slides/slide3.xml><?xml version="1.0" encoding="utf-8"?>
+<p:sld xmlns:a="http://schemas.openxmlformats.org/drawingml/2006/main" xmlns:r="http://schemas.openxmlformats.org/officeDocument/2006/relationships" xmlns:p="http://schemas.openxmlformats.org/presentationml/2006/main" show="0">
+  <p:cSld>
+    <p:spTree>
+      <p:nvGrpSpPr>
+        <p:cNvPr id="1" name="">
+          <a:extLst>
+            <a:ext uri="{FF2B5EF4-FFF2-40B4-BE49-F238E27FC236}">
+              <a16:creationId xmlns:a16="http://schemas.microsoft.com/office/drawing/2014/main" id="{32B31251-BFBE-4386-3C31-976C5CC21AC7}"/>
+            </a:ext>
+          </a:extLst>
+        </p:cNvPr>
+        <p:cNvGrpSpPr/>
+        <p:nvPr/>
+      </p:nvGrpSpPr>
+      <p:grpSpPr>
+        <a:xfrm>
+          <a:off x="0" y="0"/>
+          <a:ext cx="0" cy="0"/>
+          <a:chOff x="0" y="0"/>
+          <a:chExt cx="0" cy="0"/>
+        </a:xfrm>
+      </p:grpSpPr>
+      <p:sp>
+        <p:nvSpPr>
+          <p:cNvPr id="2" name="Title 1">
+            <a:extLst>
+              <a:ext uri="{FF2B5EF4-FFF2-40B4-BE49-F238E27FC236}">
+                <a16:creationId xmlns:a16="http://schemas.microsoft.com/office/drawing/2014/main" id="{8EB6350C-4DFD-5A5D-2CCC-96FDF78624ED}"/>
+              </a:ext>
+            </a:extLst>
+          </p:cNvPr>
+          <p:cNvSpPr>
+            <a:spLocks noGrp="1"/>
+          </p:cNvSpPr>
+          <p:nvPr>
+            <p:ph type="title"/>
+          </p:nvPr>
+        </p:nvSpPr>
+        <p:spPr/>
+        <p:txBody>
+          <a:bodyPr/>
+          <a:lstStyle/>
+          <a:p>
+            <a:r>
+              <a:rPr lang="en-US" dirty="0"/>
+              <a:t>High Level Programming Languages</a:t>
+            </a:r>
+          </a:p>
+        </p:txBody>
+      </p:sp>
+      <p:sp>
+        <p:nvSpPr>
+          <p:cNvPr id="3" name="Slide Number Placeholder 2">
+            <a:extLst>
+              <a:ext uri="{FF2B5EF4-FFF2-40B4-BE49-F238E27FC236}">
+                <a16:creationId xmlns:a16="http://schemas.microsoft.com/office/drawing/2014/main" id="{9AC56B99-8CB1-63E3-6198-0AE508CD2EE8}"/>
+              </a:ext>
+            </a:extLst>
+          </p:cNvPr>
+          <p:cNvSpPr>
+            <a:spLocks noGrp="1"/>
+          </p:cNvSpPr>
+          <p:nvPr>
+            <p:ph type="sldNum" sz="quarter" idx="12"/>
+          </p:nvPr>
+        </p:nvSpPr>
+        <p:spPr/>
+        <p:txBody>
+          <a:bodyPr/>
+          <a:lstStyle/>
+          <a:p>
+            <a:fld id="{7B252BF6-6A9C-D04A-BBE8-37A07D64A1C3}" type="slidenum">
+              <a:rPr lang="en-US" smtClean="0"/>
+              <a:t>3</a:t>
+            </a:fld>
+            <a:endParaRPr lang="en-US"/>
+          </a:p>
+        </p:txBody>
+      </p:sp>
+      <p:sp>
+        <p:nvSpPr>
+          <p:cNvPr id="4" name="Rounded Rectangle 3">
+            <a:extLst>
+              <a:ext uri="{FF2B5EF4-FFF2-40B4-BE49-F238E27FC236}">
+                <a16:creationId xmlns:a16="http://schemas.microsoft.com/office/drawing/2014/main" id="{80C53224-B219-E9FF-706A-8B1EEA630076}"/>
+              </a:ext>
+            </a:extLst>
+          </p:cNvPr>
+          <p:cNvSpPr/>
+          <p:nvPr/>
+        </p:nvSpPr>
+        <p:spPr>
+          <a:xfrm>
+            <a:off x="775606" y="1502229"/>
+            <a:ext cx="3396343" cy="914400"/>
+          </a:xfrm>
+          <a:prstGeom prst="roundRect">
+            <a:avLst/>
+          </a:prstGeom>
+        </p:spPr>
+        <p:style>
+          <a:lnRef idx="2">
+            <a:schemeClr val="accent1">
+              <a:shade val="15000"/>
+            </a:schemeClr>
+          </a:lnRef>
+          <a:fillRef idx="1">
+            <a:schemeClr val="accent1"/>
+          </a:fillRef>
+          <a:effectRef idx="0">
+            <a:schemeClr val="accent1"/>
+          </a:effectRef>
+          <a:fontRef idx="minor">
+            <a:schemeClr val="lt1"/>
+          </a:fontRef>
+        </p:style>
+        <p:txBody>
+          <a:bodyPr rtlCol="0" anchor="ctr"/>
+          <a:lstStyle/>
+          <a:p>
+            <a:pPr algn="ctr"/>
+            <a:r>
+              <a:rPr lang="en-US" sz="2400" dirty="0"/>
+              <a:t>Programming Languages</a:t>
+            </a:r>
+          </a:p>
+          <a:p>
+            <a:pPr algn="ctr"/>
+            <a:r>
+              <a:rPr lang="en-US" dirty="0"/>
+              <a:t>C, C++, Python, Java, …</a:t>
+            </a:r>
+          </a:p>
+        </p:txBody>
+      </p:sp>
+      <p:sp>
+        <p:nvSpPr>
+          <p:cNvPr id="5" name="Rounded Rectangle 4">
+            <a:extLst>
+              <a:ext uri="{FF2B5EF4-FFF2-40B4-BE49-F238E27FC236}">
+                <a16:creationId xmlns:a16="http://schemas.microsoft.com/office/drawing/2014/main" id="{E9CD6617-30CD-2C21-B63A-F937B57AFEA6}"/>
+              </a:ext>
+            </a:extLst>
+          </p:cNvPr>
+          <p:cNvSpPr/>
+          <p:nvPr/>
+        </p:nvSpPr>
+        <p:spPr>
+          <a:xfrm>
+            <a:off x="775606" y="3232888"/>
+            <a:ext cx="3396343" cy="914400"/>
+          </a:xfrm>
+          <a:prstGeom prst="roundRect">
+            <a:avLst/>
+          </a:prstGeom>
+        </p:spPr>
+        <p:style>
+          <a:lnRef idx="2">
+            <a:schemeClr val="accent1">
+              <a:shade val="15000"/>
+            </a:schemeClr>
+          </a:lnRef>
+          <a:fillRef idx="1">
+            <a:schemeClr val="accent1"/>
+          </a:fillRef>
+          <a:effectRef idx="0">
+            <a:schemeClr val="accent1"/>
+          </a:effectRef>
+          <a:fontRef idx="minor">
+            <a:schemeClr val="lt1"/>
+          </a:fontRef>
+        </p:style>
+        <p:txBody>
+          <a:bodyPr rtlCol="0" anchor="ctr"/>
+          <a:lstStyle/>
+          <a:p>
+            <a:pPr algn="ctr"/>
+            <a:r>
+              <a:rPr lang="en-US" sz="2400" dirty="0"/>
+              <a:t>Natural Languages</a:t>
+            </a:r>
+          </a:p>
+          <a:p>
+            <a:pPr algn="ctr"/>
+            <a:r>
+              <a:rPr lang="en-US" dirty="0"/>
+              <a:t>English, Korean, Tagalog, Warlpiri, …</a:t>
+            </a:r>
+          </a:p>
+        </p:txBody>
+      </p:sp>
+      <p:sp>
+        <p:nvSpPr>
+          <p:cNvPr id="8" name="TextBox 7">
+            <a:extLst>
+              <a:ext uri="{FF2B5EF4-FFF2-40B4-BE49-F238E27FC236}">
+                <a16:creationId xmlns:a16="http://schemas.microsoft.com/office/drawing/2014/main" id="{A968E792-A7BD-3E93-6AE2-9174612DB95A}"/>
+              </a:ext>
+            </a:extLst>
+          </p:cNvPr>
+          <p:cNvSpPr txBox="1"/>
+          <p:nvPr/>
+        </p:nvSpPr>
+        <p:spPr>
+          <a:xfrm>
+            <a:off x="5127171" y="1308590"/>
+            <a:ext cx="2057399" cy="1384995"/>
+          </a:xfrm>
+          <a:prstGeom prst="rect">
+            <a:avLst/>
+          </a:prstGeom>
+          <a:noFill/>
+        </p:spPr>
+        <p:txBody>
+          <a:bodyPr wrap="square">
+            <a:spAutoFit/>
+          </a:bodyPr>
+          <a:lstStyle/>
+          <a:p>
+            <a:pPr marL="285750" indent="-285750">
+              <a:buFont typeface="Arial" panose="020B0604020202020204" pitchFamily="34" charset="0"/>
+              <a:buChar char="•"/>
+            </a:pPr>
+            <a:r>
+              <a:rPr lang="en-US" dirty="0"/>
+              <a:t>unambiguous</a:t>
+            </a:r>
+          </a:p>
+          <a:p>
+            <a:pPr marL="285750" indent="-285750">
+              <a:buFont typeface="Arial" panose="020B0604020202020204" pitchFamily="34" charset="0"/>
+              <a:buChar char="•"/>
+            </a:pPr>
+            <a:r>
+              <a:rPr lang="en-US" dirty="0"/>
+              <a:t>fixed (relatively)</a:t>
+            </a:r>
+          </a:p>
+          <a:p>
+            <a:pPr marL="285750" indent="-285750">
+              <a:buFont typeface="Arial" panose="020B0604020202020204" pitchFamily="34" charset="0"/>
+              <a:buChar char="•"/>
+            </a:pPr>
+            <a:r>
+              <a:rPr lang="en-US" dirty="0"/>
+              <a:t>designed</a:t>
+            </a:r>
+          </a:p>
+          <a:p>
+            <a:pPr marL="285750" indent="-285750">
+              <a:buFont typeface="Arial" panose="020B0604020202020204" pitchFamily="34" charset="0"/>
+              <a:buChar char="•"/>
+            </a:pPr>
+            <a:r>
+              <a:rPr lang="en-US" dirty="0"/>
+              <a:t>learnable?</a:t>
+            </a:r>
+          </a:p>
+          <a:p>
+            <a:pPr marL="285750" indent="-285750">
+              <a:buFont typeface="Arial" panose="020B0604020202020204" pitchFamily="34" charset="0"/>
+              <a:buChar char="•"/>
+            </a:pPr>
+            <a:r>
+              <a:rPr lang="en-US" dirty="0"/>
+              <a:t>known semantics</a:t>
+            </a:r>
+          </a:p>
+          <a:p>
+            <a:pPr marL="285750" indent="-285750">
+              <a:buFont typeface="Arial" panose="020B0604020202020204" pitchFamily="34" charset="0"/>
+              <a:buChar char="•"/>
+            </a:pPr>
+            <a:r>
+              <a:rPr lang="en-US" dirty="0"/>
+              <a:t>spoken/written</a:t>
+            </a:r>
+          </a:p>
+        </p:txBody>
+      </p:sp>
+      <p:sp>
+        <p:nvSpPr>
+          <p:cNvPr id="10" name="TextBox 9">
+            <a:extLst>
+              <a:ext uri="{FF2B5EF4-FFF2-40B4-BE49-F238E27FC236}">
+                <a16:creationId xmlns:a16="http://schemas.microsoft.com/office/drawing/2014/main" id="{ED0AE7AA-61D5-0B21-F995-E7A19B569090}"/>
+              </a:ext>
+            </a:extLst>
+          </p:cNvPr>
+          <p:cNvSpPr txBox="1"/>
+          <p:nvPr/>
+        </p:nvSpPr>
+        <p:spPr>
+          <a:xfrm>
+            <a:off x="5127172" y="3105312"/>
+            <a:ext cx="2057398" cy="1384995"/>
+          </a:xfrm>
+          <a:prstGeom prst="rect">
+            <a:avLst/>
+          </a:prstGeom>
+          <a:noFill/>
+        </p:spPr>
+        <p:txBody>
+          <a:bodyPr wrap="square">
+            <a:spAutoFit/>
+          </a:bodyPr>
+          <a:lstStyle/>
+          <a:p>
+            <a:pPr marL="285750" indent="-285750">
+              <a:buFont typeface="Arial" panose="020B0604020202020204" pitchFamily="34" charset="0"/>
+              <a:buChar char="•"/>
+            </a:pPr>
+            <a:r>
+              <a:rPr lang="en-US" dirty="0"/>
+              <a:t>ambiguous</a:t>
+            </a:r>
+          </a:p>
+          <a:p>
+            <a:pPr marL="285750" indent="-285750">
+              <a:buFont typeface="Arial" panose="020B0604020202020204" pitchFamily="34" charset="0"/>
+              <a:buChar char="•"/>
+            </a:pPr>
+            <a:r>
+              <a:rPr lang="en-US" dirty="0"/>
+              <a:t>evolving</a:t>
+            </a:r>
+          </a:p>
+          <a:p>
+            <a:pPr marL="285750" indent="-285750">
+              <a:buFont typeface="Arial" panose="020B0604020202020204" pitchFamily="34" charset="0"/>
+              <a:buChar char="•"/>
+            </a:pPr>
+            <a:r>
+              <a:rPr lang="en-US" dirty="0"/>
+              <a:t>transmitted</a:t>
+            </a:r>
+          </a:p>
+          <a:p>
+            <a:pPr marL="285750" indent="-285750">
+              <a:buFont typeface="Arial" panose="020B0604020202020204" pitchFamily="34" charset="0"/>
+              <a:buChar char="•"/>
+            </a:pPr>
+            <a:r>
+              <a:rPr lang="en-US" dirty="0"/>
+              <a:t>learnable</a:t>
+            </a:r>
+          </a:p>
+          <a:p>
+            <a:pPr marL="285750" indent="-285750">
+              <a:buFont typeface="Arial" panose="020B0604020202020204" pitchFamily="34" charset="0"/>
+              <a:buChar char="•"/>
+            </a:pPr>
+            <a:r>
+              <a:rPr lang="en-US" dirty="0"/>
+              <a:t>unknown semantics</a:t>
+            </a:r>
+          </a:p>
+          <a:p>
+            <a:pPr marL="285750" indent="-285750">
+              <a:buFont typeface="Arial" panose="020B0604020202020204" pitchFamily="34" charset="0"/>
+              <a:buChar char="•"/>
+            </a:pPr>
+            <a:r>
+              <a:rPr lang="en-US" dirty="0"/>
+              <a:t>written</a:t>
+            </a:r>
+          </a:p>
+        </p:txBody>
+      </p:sp>
+      <p:cxnSp>
+        <p:nvCxnSpPr>
+          <p:cNvPr id="12" name="Straight Connector 11">
+            <a:extLst>
+              <a:ext uri="{FF2B5EF4-FFF2-40B4-BE49-F238E27FC236}">
+                <a16:creationId xmlns:a16="http://schemas.microsoft.com/office/drawing/2014/main" id="{02020EAD-E76D-2FF9-558D-6B1E817E548D}"/>
+              </a:ext>
+            </a:extLst>
+          </p:cNvPr>
+          <p:cNvCxnSpPr/>
+          <p:nvPr/>
+        </p:nvCxnSpPr>
+        <p:spPr>
+          <a:xfrm>
+            <a:off x="277586" y="2833007"/>
+            <a:ext cx="8433707" cy="0"/>
+          </a:xfrm>
+          <a:prstGeom prst="line">
+            <a:avLst/>
+          </a:prstGeom>
+        </p:spPr>
+        <p:style>
+          <a:lnRef idx="1">
+            <a:schemeClr val="accent1"/>
+          </a:lnRef>
+          <a:fillRef idx="0">
+            <a:schemeClr val="accent1"/>
+          </a:fillRef>
+          <a:effectRef idx="0">
+            <a:schemeClr val="accent1"/>
+          </a:effectRef>
+          <a:fontRef idx="minor">
+            <a:schemeClr val="tx1"/>
+          </a:fontRef>
+        </p:style>
+      </p:cxnSp>
+    </p:spTree>
+    <p:extLst>
+      <p:ext uri="{BB962C8B-B14F-4D97-AF65-F5344CB8AC3E}">
+        <p14:creationId xmlns:p14="http://schemas.microsoft.com/office/powerpoint/2010/main" val="2875530832"/>
+      </p:ext>
+    </p:extLst>
+  </p:cSld>
+  <p:clrMapOvr>
+    <a:masterClrMapping/>
+  </p:clrMapOvr>
+  <p:timing>
+    <p:tnLst>
+      <p:par>
+        <p:cTn id="1" dur="indefinite" restart="never" nodeType="tmRoot">
+          <p:childTnLst>
+            <p:seq concurrent="1" nextAc="seek">
+              <p:cTn id="2" dur="indefinite" nodeType="mainSeq">
+                <p:childTnLst>
+                  <p:par>
+                    <p:cTn id="3" fill="hold">
+                      <p:stCondLst>
+                        <p:cond delay="indefinite"/>
+                      </p:stCondLst>
+                      <p:childTnLst>
+                        <p:par>
+                          <p:cTn id="4" fill="hold">
+                            <p:stCondLst>
+                              <p:cond delay="0"/>
+                            </p:stCondLst>
+                            <p:childTnLst>
+                              <p:par>
+                                <p:cTn id="5" presetID="1" presetClass="entr" presetSubtype="0" fill="hold" grpId="0" nodeType="clickEffect">
+                                  <p:stCondLst>
+                                    <p:cond delay="0"/>
+                                  </p:stCondLst>
+                                  <p:childTnLst>
+                                    <p:set>
+                                      <p:cBhvr>
+                                        <p:cTn id="6" dur="1" fill="hold">
+                                          <p:stCondLst>
+                                            <p:cond delay="0"/>
+                                          </p:stCondLst>
+                                        </p:cTn>
+                                        <p:tgtEl>
+                                          <p:spTgt spid="8"/>
+                                        </p:tgtEl>
+                                        <p:attrNameLst>
+                                          <p:attrName>style.visibility</p:attrName>
+                                        </p:attrNameLst>
+                                      </p:cBhvr>
+                                      <p:to>
+                                        <p:strVal val="visible"/>
+                                      </p:to>
+                                    </p:set>
+                                  </p:childTnLst>
+                                </p:cTn>
+                              </p:par>
+                            </p:childTnLst>
+                          </p:cTn>
+                        </p:par>
+                      </p:childTnLst>
+                    </p:cTn>
+                  </p:par>
+                  <p:par>
+                    <p:cTn id="7" fill="hold">
+                      <p:stCondLst>
+                        <p:cond delay="indefinite"/>
+                      </p:stCondLst>
+                      <p:childTnLst>
+                        <p:par>
+                          <p:cTn id="8" fill="hold">
+                            <p:stCondLst>
+                              <p:cond delay="0"/>
+                            </p:stCondLst>
+                            <p:childTnLst>
+                              <p:par>
+                                <p:cTn id="9" presetID="1" presetClass="entr" presetSubtype="0" fill="hold" grpId="0" nodeType="clickEffect">
+                                  <p:stCondLst>
+                                    <p:cond delay="0"/>
+                                  </p:stCondLst>
+                                  <p:childTnLst>
+                                    <p:set>
+                                      <p:cBhvr>
+                                        <p:cTn id="10" dur="1" fill="hold">
+                                          <p:stCondLst>
+                                            <p:cond delay="0"/>
+                                          </p:stCondLst>
+                                        </p:cTn>
+                                        <p:tgtEl>
+                                          <p:spTgt spid="10"/>
+                                        </p:tgtEl>
+                                        <p:attrNameLst>
+                                          <p:attrName>style.visibility</p:attrName>
+                                        </p:attrNameLst>
+                                      </p:cBhvr>
+                                      <p:to>
+                                        <p:strVal val="visible"/>
+                                      </p:to>
+                                    </p:set>
+                                  </p:childTnLst>
+                                </p:cTn>
+                              </p:par>
+                            </p:childTnLst>
+                          </p:cTn>
+                        </p:par>
+                      </p:childTnLst>
+                    </p:cTn>
+                  </p:par>
+                </p:childTnLst>
+              </p:cTn>
+              <p:prevCondLst>
+                <p:cond evt="onPrev" delay="0">
+                  <p:tgtEl>
+                    <p:sldTgt/>
+                  </p:tgtEl>
+                </p:cond>
+              </p:prevCondLst>
+              <p:nextCondLst>
+                <p:cond evt="onNext" delay="0">
+                  <p:tgtEl>
+                    <p:sldTgt/>
+                  </p:tgtEl>
+                </p:cond>
+              </p:nextCondLst>
+            </p:seq>
+          </p:childTnLst>
+        </p:cTn>
+      </p:par>
+    </p:tnLst>
+    <p:bldLst>
+      <p:bldP spid="8" grpId="0"/>
+      <p:bldP spid="10" grpId="0"/>
+    </p:bldLst>
+  </p:timing>
+</p:sld>
+</file>
+
+<file path=ppt/slides/slide4.xml><?xml version="1.0" encoding="utf-8"?>
 <p:sld xmlns:a="http://schemas.openxmlformats.org/drawingml/2006/main" xmlns:r="http://schemas.openxmlformats.org/officeDocument/2006/relationships" xmlns:p="http://schemas.openxmlformats.org/presentationml/2006/main">
   <p:cSld>
     <p:spTree>
@@ -9294,7 +11216,7 @@
             <a:fld id="{00000000-1234-1234-1234-123412341234}" type="slidenum">
               <a:rPr lang="en-US" smtClean="0"/>
               <a:pPr/>
-              <a:t>2</a:t>
+              <a:t>4</a:t>
             </a:fld>
             <a:endParaRPr lang="en-US"/>
           </a:p>
@@ -9432,7 +11354,7 @@
 </p:sld>
 </file>
 
-<file path=ppt/slides/slide20.xml><?xml version="1.0" encoding="utf-8"?>
+<file path=ppt/slides/slide5.xml><?xml version="1.0" encoding="utf-8"?>
 <p:sld xmlns:a="http://schemas.openxmlformats.org/drawingml/2006/main" xmlns:r="http://schemas.openxmlformats.org/officeDocument/2006/relationships" xmlns:p="http://schemas.openxmlformats.org/presentationml/2006/main">
   <p:cSld>
     <p:spTree>
@@ -9505,10 +11427,10 @@
       </p:sp>
       <p:sp>
         <p:nvSpPr>
-          <p:cNvPr id="3" name="Slide Number Placeholder 2">
+          <p:cNvPr id="5" name="Slide Number Placeholder 4">
             <a:extLst>
               <a:ext uri="{FF2B5EF4-FFF2-40B4-BE49-F238E27FC236}">
-                <a16:creationId xmlns:a16="http://schemas.microsoft.com/office/drawing/2014/main" id="{1E5EE2B8-BD09-3E45-927D-FE24B7116F31}"/>
+                <a16:creationId xmlns:a16="http://schemas.microsoft.com/office/drawing/2014/main" id="{957BA935-2249-BD45-B2C6-48CE6DAD1AE8}"/>
               </a:ext>
             </a:extLst>
           </p:cNvPr>
@@ -9535,9 +11457,9 @@
             <a:fld id="{00000000-1234-1234-1234-123412341234}" type="slidenum">
               <a:rPr lang="en-US" smtClean="0"/>
               <a:pPr/>
-              <a:t>20</a:t>
+              <a:t>5</a:t>
             </a:fld>
-            <a:endParaRPr lang="en-US"/>
+            <a:endParaRPr lang="en-US" dirty="0"/>
           </a:p>
         </p:txBody>
       </p:sp>
@@ -9662,100 +11584,10 @@
           </a:p>
         </p:txBody>
       </p:sp>
-      <p:sp>
-        <p:nvSpPr>
-          <p:cNvPr id="5" name="Shape 183">
-            <a:extLst>
-              <a:ext uri="{FF2B5EF4-FFF2-40B4-BE49-F238E27FC236}">
-                <a16:creationId xmlns:a16="http://schemas.microsoft.com/office/drawing/2014/main" id="{50271DE4-8FA6-D748-A9E2-6DFC785A1FF4}"/>
-              </a:ext>
-            </a:extLst>
-          </p:cNvPr>
-          <p:cNvSpPr txBox="1"/>
-          <p:nvPr/>
-        </p:nvSpPr>
-        <p:spPr>
-          <a:xfrm>
-            <a:off x="3981892" y="3460396"/>
-            <a:ext cx="4490566" cy="807913"/>
-          </a:xfrm>
-          <a:prstGeom prst="rect">
-            <a:avLst/>
-          </a:prstGeom>
-          <a:noFill/>
-          <a:ln>
-            <a:noFill/>
-          </a:ln>
-        </p:spPr>
-        <p:txBody>
-          <a:bodyPr lIns="68569" tIns="34275" rIns="68569" bIns="34275" anchor="t" anchorCtr="0">
-            <a:noAutofit/>
-          </a:bodyPr>
-          <a:lstStyle/>
-          <a:p>
-            <a:pPr>
-              <a:buSzPct val="25000"/>
-            </a:pPr>
-            <a:r>
-              <a:rPr lang="en-US" sz="2400" dirty="0">
-                <a:solidFill>
-                  <a:schemeClr val="dk1"/>
-                </a:solidFill>
-                <a:latin typeface="Calibri"/>
-                <a:ea typeface="Calibri"/>
-                <a:cs typeface="Calibri"/>
-                <a:sym typeface="Calibri"/>
-              </a:rPr>
-              <a:t>Steve’s most important CS class: </a:t>
-            </a:r>
-          </a:p>
-          <a:p>
-            <a:pPr>
-              <a:buSzPct val="25000"/>
-            </a:pPr>
-            <a:r>
-              <a:rPr lang="en-US" sz="2400" dirty="0">
-                <a:solidFill>
-                  <a:schemeClr val="dk1"/>
-                </a:solidFill>
-                <a:latin typeface="Calibri"/>
-                <a:ea typeface="Calibri"/>
-                <a:cs typeface="Calibri"/>
-                <a:sym typeface="Calibri"/>
-              </a:rPr>
-              <a:t>“</a:t>
-            </a:r>
-            <a:r>
-              <a:rPr lang="en-US" sz="2400" dirty="0">
-                <a:solidFill>
-                  <a:schemeClr val="dk2"/>
-                </a:solidFill>
-                <a:latin typeface="Calibri"/>
-                <a:ea typeface="Calibri"/>
-                <a:cs typeface="Calibri"/>
-                <a:sym typeface="Calibri"/>
-              </a:rPr>
-              <a:t>Typing 101. Duh</a:t>
-            </a:r>
-            <a:r>
-              <a:rPr lang="en-US" sz="2400" dirty="0">
-                <a:solidFill>
-                  <a:schemeClr val="dk1"/>
-                </a:solidFill>
-                <a:latin typeface="Calibri"/>
-                <a:ea typeface="Calibri"/>
-                <a:cs typeface="Calibri"/>
-                <a:sym typeface="Calibri"/>
-              </a:rPr>
-              <a:t>”</a:t>
-            </a:r>
-          </a:p>
-        </p:txBody>
-      </p:sp>
     </p:spTree>
     <p:extLst>
       <p:ext uri="{BB962C8B-B14F-4D97-AF65-F5344CB8AC3E}">
-        <p14:creationId xmlns:p14="http://schemas.microsoft.com/office/powerpoint/2010/main" val="1707642495"/>
+        <p14:creationId xmlns:p14="http://schemas.microsoft.com/office/powerpoint/2010/main" val="185110302"/>
       </p:ext>
     </p:extLst>
   </p:cSld>
@@ -9765,7 +11597,7 @@
 </p:sld>
 </file>
 
-<file path=ppt/slides/slide3.xml><?xml version="1.0" encoding="utf-8"?>
+<file path=ppt/slides/slide6.xml><?xml version="1.0" encoding="utf-8"?>
 <p:sld xmlns:a="http://schemas.openxmlformats.org/drawingml/2006/main" xmlns:r="http://schemas.openxmlformats.org/officeDocument/2006/relationships" xmlns:p="http://schemas.openxmlformats.org/presentationml/2006/main">
   <p:cSld>
     <p:spTree>
@@ -9787,249 +11619,6 @@
           <p:cNvPr id="2" name="Title 1">
             <a:extLst>
               <a:ext uri="{FF2B5EF4-FFF2-40B4-BE49-F238E27FC236}">
-                <a16:creationId xmlns:a16="http://schemas.microsoft.com/office/drawing/2014/main" id="{FB001243-385E-794A-9037-9F40B9A057ED}"/>
-              </a:ext>
-            </a:extLst>
-          </p:cNvPr>
-          <p:cNvSpPr>
-            <a:spLocks noGrp="1"/>
-          </p:cNvSpPr>
-          <p:nvPr>
-            <p:ph type="title"/>
-          </p:nvPr>
-        </p:nvSpPr>
-        <p:spPr/>
-        <p:txBody>
-          <a:bodyPr>
-            <a:normAutofit/>
-          </a:bodyPr>
-          <a:lstStyle/>
-          <a:p>
-            <a:r>
-              <a:rPr lang="en-US" dirty="0">
-                <a:latin typeface="Calibri"/>
-                <a:ea typeface="Calibri"/>
-                <a:cs typeface="Calibri"/>
-                <a:sym typeface="Calibri"/>
-              </a:rPr>
-              <a:t>Rich Programmer Food (Steve </a:t>
-            </a:r>
-            <a:r>
-              <a:rPr lang="en-US" dirty="0" err="1">
-                <a:latin typeface="Calibri"/>
-                <a:ea typeface="Calibri"/>
-                <a:cs typeface="Calibri"/>
-                <a:sym typeface="Calibri"/>
-              </a:rPr>
-              <a:t>Yegge</a:t>
-            </a:r>
-            <a:r>
-              <a:rPr lang="en-US" dirty="0">
-                <a:latin typeface="Calibri"/>
-                <a:ea typeface="Calibri"/>
-                <a:cs typeface="Calibri"/>
-                <a:sym typeface="Calibri"/>
-              </a:rPr>
-              <a:t>)</a:t>
-            </a:r>
-            <a:endParaRPr lang="en-US" dirty="0"/>
-          </a:p>
-        </p:txBody>
-      </p:sp>
-      <p:sp>
-        <p:nvSpPr>
-          <p:cNvPr id="5" name="Slide Number Placeholder 4">
-            <a:extLst>
-              <a:ext uri="{FF2B5EF4-FFF2-40B4-BE49-F238E27FC236}">
-                <a16:creationId xmlns:a16="http://schemas.microsoft.com/office/drawing/2014/main" id="{957BA935-2249-BD45-B2C6-48CE6DAD1AE8}"/>
-              </a:ext>
-            </a:extLst>
-          </p:cNvPr>
-          <p:cNvSpPr>
-            <a:spLocks noGrp="1"/>
-          </p:cNvSpPr>
-          <p:nvPr>
-            <p:ph type="sldNum" sz="quarter" idx="12"/>
-          </p:nvPr>
-        </p:nvSpPr>
-        <p:spPr>
-          <a:xfrm>
-            <a:off x="8472457" y="4663217"/>
-            <a:ext cx="548700" cy="393525"/>
-          </a:xfrm>
-          <a:prstGeom prst="rect">
-            <a:avLst/>
-          </a:prstGeom>
-        </p:spPr>
-        <p:txBody>
-          <a:bodyPr/>
-          <a:lstStyle/>
-          <a:p>
-            <a:fld id="{00000000-1234-1234-1234-123412341234}" type="slidenum">
-              <a:rPr lang="en-US" smtClean="0"/>
-              <a:pPr/>
-              <a:t>3</a:t>
-            </a:fld>
-            <a:endParaRPr lang="en-US" dirty="0"/>
-          </a:p>
-        </p:txBody>
-      </p:sp>
-      <p:sp>
-        <p:nvSpPr>
-          <p:cNvPr id="4" name="Shape 78">
-            <a:extLst>
-              <a:ext uri="{FF2B5EF4-FFF2-40B4-BE49-F238E27FC236}">
-                <a16:creationId xmlns:a16="http://schemas.microsoft.com/office/drawing/2014/main" id="{F0EDCED3-7685-2B4E-9F10-7F3E3B163731}"/>
-              </a:ext>
-            </a:extLst>
-          </p:cNvPr>
-          <p:cNvSpPr txBox="1"/>
-          <p:nvPr/>
-        </p:nvSpPr>
-        <p:spPr>
-          <a:xfrm>
-            <a:off x="397565" y="1673352"/>
-            <a:ext cx="8074892" cy="1459462"/>
-          </a:xfrm>
-          <a:prstGeom prst="rect">
-            <a:avLst/>
-          </a:prstGeom>
-          <a:noFill/>
-          <a:ln>
-            <a:noFill/>
-          </a:ln>
-        </p:spPr>
-        <p:txBody>
-          <a:bodyPr lIns="68569" tIns="34275" rIns="68569" bIns="34275" anchor="t" anchorCtr="0">
-            <a:noAutofit/>
-          </a:bodyPr>
-          <a:lstStyle/>
-          <a:p>
-            <a:pPr>
-              <a:buSzPct val="25000"/>
-            </a:pPr>
-            <a:r>
-              <a:rPr lang="en-US" sz="2400" dirty="0">
-                <a:solidFill>
-                  <a:schemeClr val="dk1"/>
-                </a:solidFill>
-                <a:latin typeface="Calibri"/>
-                <a:ea typeface="Calibri"/>
-                <a:cs typeface="Calibri"/>
-                <a:sym typeface="Calibri"/>
-              </a:rPr>
-              <a:t>“</a:t>
-            </a:r>
-            <a:r>
-              <a:rPr lang="en-US" sz="2400" dirty="0">
-                <a:solidFill>
-                  <a:schemeClr val="dk2"/>
-                </a:solidFill>
-                <a:latin typeface="Calibri"/>
-                <a:ea typeface="Calibri"/>
-                <a:cs typeface="Calibri"/>
-                <a:sym typeface="Calibri"/>
-              </a:rPr>
-              <a:t>In fact, Compiler Construction </a:t>
-            </a:r>
-            <a:r>
-              <a:rPr lang="en-US" sz="2400" dirty="0">
-                <a:solidFill>
-                  <a:schemeClr val="dk1"/>
-                </a:solidFill>
-                <a:latin typeface="Calibri"/>
-                <a:ea typeface="Calibri"/>
-                <a:cs typeface="Calibri"/>
-                <a:sym typeface="Calibri"/>
-              </a:rPr>
-              <a:t>is, </a:t>
-            </a:r>
-            <a:r>
-              <a:rPr lang="en-US" sz="2100" dirty="0">
-                <a:solidFill>
-                  <a:schemeClr val="dk1"/>
-                </a:solidFill>
-                <a:latin typeface="Calibri"/>
-                <a:ea typeface="Calibri"/>
-                <a:cs typeface="Calibri"/>
-                <a:sym typeface="Calibri"/>
-              </a:rPr>
-              <a:t>in my own humble and probably embarrassingly wrong opinion</a:t>
-            </a:r>
-            <a:r>
-              <a:rPr lang="en-US" sz="2400" dirty="0">
-                <a:solidFill>
-                  <a:schemeClr val="dk1"/>
-                </a:solidFill>
-                <a:latin typeface="Calibri"/>
-                <a:ea typeface="Calibri"/>
-                <a:cs typeface="Calibri"/>
-                <a:sym typeface="Calibri"/>
-              </a:rPr>
-              <a:t>, </a:t>
-            </a:r>
-            <a:r>
-              <a:rPr lang="en-US" sz="2400" dirty="0">
-                <a:solidFill>
-                  <a:srgbClr val="1F497D"/>
-                </a:solidFill>
-                <a:latin typeface="Calibri"/>
-                <a:ea typeface="Calibri"/>
-                <a:cs typeface="Calibri"/>
-                <a:sym typeface="Calibri"/>
-              </a:rPr>
-              <a:t>the second most important CS class you can take in an undergraduate computer science program</a:t>
-            </a:r>
-            <a:r>
-              <a:rPr lang="en-US" sz="2400" dirty="0">
-                <a:solidFill>
-                  <a:schemeClr val="dk1"/>
-                </a:solidFill>
-                <a:latin typeface="Calibri"/>
-                <a:ea typeface="Calibri"/>
-                <a:cs typeface="Calibri"/>
-                <a:sym typeface="Calibri"/>
-              </a:rPr>
-              <a:t>.”</a:t>
-            </a:r>
-          </a:p>
-        </p:txBody>
-      </p:sp>
-    </p:spTree>
-    <p:extLst>
-      <p:ext uri="{BB962C8B-B14F-4D97-AF65-F5344CB8AC3E}">
-        <p14:creationId xmlns:p14="http://schemas.microsoft.com/office/powerpoint/2010/main" val="185110302"/>
-      </p:ext>
-    </p:extLst>
-  </p:cSld>
-  <p:clrMapOvr>
-    <a:masterClrMapping/>
-  </p:clrMapOvr>
-</p:sld>
-</file>
-
-<file path=ppt/slides/slide4.xml><?xml version="1.0" encoding="utf-8"?>
-<p:sld xmlns:a="http://schemas.openxmlformats.org/drawingml/2006/main" xmlns:r="http://schemas.openxmlformats.org/officeDocument/2006/relationships" xmlns:p="http://schemas.openxmlformats.org/presentationml/2006/main">
-  <p:cSld>
-    <p:spTree>
-      <p:nvGrpSpPr>
-        <p:cNvPr id="1" name=""/>
-        <p:cNvGrpSpPr/>
-        <p:nvPr/>
-      </p:nvGrpSpPr>
-      <p:grpSpPr>
-        <a:xfrm>
-          <a:off x="0" y="0"/>
-          <a:ext cx="0" cy="0"/>
-          <a:chOff x="0" y="0"/>
-          <a:chExt cx="0" cy="0"/>
-        </a:xfrm>
-      </p:grpSpPr>
-      <p:sp>
-        <p:nvSpPr>
-          <p:cNvPr id="2" name="Title 1">
-            <a:extLst>
-              <a:ext uri="{FF2B5EF4-FFF2-40B4-BE49-F238E27FC236}">
                 <a16:creationId xmlns:a16="http://schemas.microsoft.com/office/drawing/2014/main" id="{4EF4709F-9A15-564E-8EF6-9C9D6EE59CF9}"/>
               </a:ext>
             </a:extLst>
@@ -10170,7 +11759,7 @@
           <a:p>
             <a:fld id="{7B252BF6-6A9C-D04A-BBE8-37A07D64A1C3}" type="slidenum">
               <a:rPr lang="en-US" smtClean="0"/>
-              <a:t>4</a:t>
+              <a:t>6</a:t>
             </a:fld>
             <a:endParaRPr lang="en-US"/>
           </a:p>
@@ -10369,7 +11958,7 @@
 </p:sld>
 </file>
 
-<file path=ppt/slides/slide5.xml><?xml version="1.0" encoding="utf-8"?>
+<file path=ppt/slides/slide7.xml><?xml version="1.0" encoding="utf-8"?>
 <p:sld xmlns:a="http://schemas.openxmlformats.org/drawingml/2006/main" xmlns:r="http://schemas.openxmlformats.org/officeDocument/2006/relationships" xmlns:p="http://schemas.openxmlformats.org/presentationml/2006/main">
   <p:cSld>
     <p:spTree>
@@ -10532,7 +12121,7 @@
               <a:pPr algn="r">
                 <a:buSzPct val="25000"/>
               </a:pPr>
-              <a:t>5</a:t>
+              <a:t>7</a:t>
             </a:fld>
             <a:endParaRPr lang="en-US" sz="900">
               <a:solidFill>
@@ -11180,7 +12769,7 @@
 </p:sld>
 </file>
 
-<file path=ppt/slides/slide6.xml><?xml version="1.0" encoding="utf-8"?>
+<file path=ppt/slides/slide8.xml><?xml version="1.0" encoding="utf-8"?>
 <p:sld xmlns:a="http://schemas.openxmlformats.org/drawingml/2006/main" xmlns:r="http://schemas.openxmlformats.org/officeDocument/2006/relationships" xmlns:p="http://schemas.openxmlformats.org/presentationml/2006/main">
   <p:cSld>
     <p:spTree>
@@ -11341,7 +12930,7 @@
           <a:p>
             <a:fld id="{7B252BF6-6A9C-D04A-BBE8-37A07D64A1C3}" type="slidenum">
               <a:rPr lang="en-US" smtClean="0"/>
-              <a:t>6</a:t>
+              <a:t>8</a:t>
             </a:fld>
             <a:endParaRPr lang="en-US"/>
           </a:p>
@@ -11491,7 +13080,7 @@
 </p:sld>
 </file>
 
-<file path=ppt/slides/slide7.xml><?xml version="1.0" encoding="utf-8"?>
+<file path=ppt/slides/slide9.xml><?xml version="1.0" encoding="utf-8"?>
 <p:sld xmlns:a="http://schemas.openxmlformats.org/drawingml/2006/main" xmlns:r="http://schemas.openxmlformats.org/officeDocument/2006/relationships" xmlns:p="http://schemas.openxmlformats.org/presentationml/2006/main">
   <p:cSld>
     <p:spTree>
@@ -11674,7 +13263,7 @@
               <a:pPr algn="r">
                 <a:buSzPct val="25000"/>
               </a:pPr>
-              <a:t>7</a:t>
+              <a:t>9</a:t>
             </a:fld>
             <a:endParaRPr lang="en-US" sz="900">
               <a:solidFill>
@@ -11878,815 +13467,6 @@
       <p:bldP spid="3" grpId="0" build="p"/>
     </p:bldLst>
   </p:timing>
-</p:sld>
-</file>
-
-<file path=ppt/slides/slide8.xml><?xml version="1.0" encoding="utf-8"?>
-<p:sld xmlns:a="http://schemas.openxmlformats.org/drawingml/2006/main" xmlns:r="http://schemas.openxmlformats.org/officeDocument/2006/relationships" xmlns:p="http://schemas.openxmlformats.org/presentationml/2006/main">
-  <p:cSld>
-    <p:spTree>
-      <p:nvGrpSpPr>
-        <p:cNvPr id="1" name=""/>
-        <p:cNvGrpSpPr/>
-        <p:nvPr/>
-      </p:nvGrpSpPr>
-      <p:grpSpPr>
-        <a:xfrm>
-          <a:off x="0" y="0"/>
-          <a:ext cx="0" cy="0"/>
-          <a:chOff x="0" y="0"/>
-          <a:chExt cx="0" cy="0"/>
-        </a:xfrm>
-      </p:grpSpPr>
-      <p:sp>
-        <p:nvSpPr>
-          <p:cNvPr id="2" name="Title 1">
-            <a:extLst>
-              <a:ext uri="{FF2B5EF4-FFF2-40B4-BE49-F238E27FC236}">
-                <a16:creationId xmlns:a16="http://schemas.microsoft.com/office/drawing/2014/main" id="{E631FF38-765E-994D-819C-EB74771BC79E}"/>
-              </a:ext>
-            </a:extLst>
-          </p:cNvPr>
-          <p:cNvSpPr>
-            <a:spLocks noGrp="1"/>
-          </p:cNvSpPr>
-          <p:nvPr>
-            <p:ph type="title"/>
-          </p:nvPr>
-        </p:nvSpPr>
-        <p:spPr/>
-        <p:txBody>
-          <a:bodyPr>
-            <a:normAutofit/>
-          </a:bodyPr>
-          <a:lstStyle/>
-          <a:p>
-            <a:r>
-              <a:rPr lang="en-US" dirty="0"/>
-              <a:t>Rich Programmer Food (Steve </a:t>
-            </a:r>
-            <a:r>
-              <a:rPr lang="en-US" dirty="0" err="1"/>
-              <a:t>Yegge</a:t>
-            </a:r>
-            <a:r>
-              <a:rPr lang="en-US" dirty="0"/>
-              <a:t>)</a:t>
-            </a:r>
-          </a:p>
-        </p:txBody>
-      </p:sp>
-      <p:sp>
-        <p:nvSpPr>
-          <p:cNvPr id="3" name="Text Placeholder 2">
-            <a:extLst>
-              <a:ext uri="{FF2B5EF4-FFF2-40B4-BE49-F238E27FC236}">
-                <a16:creationId xmlns:a16="http://schemas.microsoft.com/office/drawing/2014/main" id="{48DA3C79-6656-CF45-8DF5-CF03A8EB0A42}"/>
-              </a:ext>
-            </a:extLst>
-          </p:cNvPr>
-          <p:cNvSpPr>
-            <a:spLocks noGrp="1"/>
-          </p:cNvSpPr>
-          <p:nvPr>
-            <p:ph idx="1"/>
-          </p:nvPr>
-        </p:nvSpPr>
-        <p:spPr>
-          <a:xfrm>
-            <a:off x="457200" y="1200150"/>
-            <a:ext cx="8229600" cy="3567113"/>
-          </a:xfrm>
-        </p:spPr>
-        <p:txBody>
-          <a:bodyPr>
-            <a:normAutofit/>
-          </a:bodyPr>
-          <a:lstStyle/>
-          <a:p>
-            <a:r>
-              <a:rPr lang="en-US" dirty="0"/>
-              <a:t> </a:t>
-            </a:r>
-            <a:r>
-              <a:rPr lang="en-US" dirty="0">
-                <a:solidFill>
-                  <a:schemeClr val="accent1"/>
-                </a:solidFill>
-              </a:rPr>
-              <a:t>Situation 6</a:t>
-            </a:r>
-            <a:r>
-              <a:rPr lang="en-US" dirty="0"/>
-              <a:t>: The “software engineers” at your company have decided to redesign the entire code base to make it easier to add to the codebase. You have to write them a tool to ensure code maintenance does not get worse</a:t>
-            </a:r>
-            <a:r>
-              <a:rPr lang="en-CA" dirty="0"/>
-              <a:t>.</a:t>
-            </a:r>
-            <a:endParaRPr lang="en-US" dirty="0"/>
-          </a:p>
-          <a:p>
-            <a:r>
-              <a:rPr lang="en-US" dirty="0"/>
-              <a:t> </a:t>
-            </a:r>
-            <a:r>
-              <a:rPr lang="en-US" dirty="0">
-                <a:solidFill>
-                  <a:schemeClr val="accent1"/>
-                </a:solidFill>
-              </a:rPr>
-              <a:t>Situation 7</a:t>
-            </a:r>
-            <a:r>
-              <a:rPr lang="en-US" dirty="0"/>
-              <a:t>: In order to remove a security hole you must make a set of non-trivial changes to the code to replace one idiom with another in your entire codebase. (Look up </a:t>
-            </a:r>
-            <a:r>
-              <a:rPr lang="en-US" dirty="0">
-                <a:hlinkClick r:id="rId2"/>
-              </a:rPr>
-              <a:t>CVE</a:t>
-            </a:r>
-            <a:r>
-              <a:rPr lang="en-US" dirty="0"/>
-              <a:t>s)</a:t>
-            </a:r>
-          </a:p>
-        </p:txBody>
-      </p:sp>
-      <p:sp>
-        <p:nvSpPr>
-          <p:cNvPr id="5" name="Slide Number Placeholder 4">
-            <a:extLst>
-              <a:ext uri="{FF2B5EF4-FFF2-40B4-BE49-F238E27FC236}">
-                <a16:creationId xmlns:a16="http://schemas.microsoft.com/office/drawing/2014/main" id="{200C66D5-C963-0F44-AA2E-5CFF38C99C07}"/>
-              </a:ext>
-            </a:extLst>
-          </p:cNvPr>
-          <p:cNvSpPr>
-            <a:spLocks noGrp="1"/>
-          </p:cNvSpPr>
-          <p:nvPr>
-            <p:ph type="sldNum" sz="quarter" idx="12"/>
-          </p:nvPr>
-        </p:nvSpPr>
-        <p:spPr>
-          <a:xfrm>
-            <a:off x="6553200" y="4767263"/>
-            <a:ext cx="2133600" cy="273825"/>
-          </a:xfrm>
-          <a:prstGeom prst="rect">
-            <a:avLst/>
-          </a:prstGeom>
-        </p:spPr>
-        <p:txBody>
-          <a:bodyPr/>
-          <a:lstStyle/>
-          <a:p>
-            <a:pPr algn="r">
-              <a:buSzPct val="25000"/>
-            </a:pPr>
-            <a:fld id="{00000000-1234-1234-1234-123412341234}" type="slidenum">
-              <a:rPr lang="en-US" sz="900" smtClean="0">
-                <a:solidFill>
-                  <a:srgbClr val="888888"/>
-                </a:solidFill>
-                <a:latin typeface="Calibri"/>
-                <a:ea typeface="Calibri"/>
-                <a:cs typeface="Calibri"/>
-                <a:sym typeface="Calibri"/>
-              </a:rPr>
-              <a:pPr algn="r">
-                <a:buSzPct val="25000"/>
-              </a:pPr>
-              <a:t>8</a:t>
-            </a:fld>
-            <a:endParaRPr lang="en-US" sz="900">
-              <a:solidFill>
-                <a:srgbClr val="888888"/>
-              </a:solidFill>
-              <a:latin typeface="Calibri"/>
-              <a:ea typeface="Calibri"/>
-              <a:cs typeface="Calibri"/>
-              <a:sym typeface="Calibri"/>
-            </a:endParaRPr>
-          </a:p>
-        </p:txBody>
-      </p:sp>
-    </p:spTree>
-    <p:extLst>
-      <p:ext uri="{BB962C8B-B14F-4D97-AF65-F5344CB8AC3E}">
-        <p14:creationId xmlns:p14="http://schemas.microsoft.com/office/powerpoint/2010/main" val="3355460447"/>
-      </p:ext>
-    </p:extLst>
-  </p:cSld>
-  <p:clrMapOvr>
-    <a:masterClrMapping/>
-  </p:clrMapOvr>
-  <p:timing>
-    <p:tnLst>
-      <p:par>
-        <p:cTn id="1" dur="indefinite" restart="never" nodeType="tmRoot">
-          <p:childTnLst>
-            <p:seq concurrent="1" nextAc="seek">
-              <p:cTn id="2" dur="indefinite" nodeType="mainSeq">
-                <p:childTnLst>
-                  <p:par>
-                    <p:cTn id="3" fill="hold">
-                      <p:stCondLst>
-                        <p:cond delay="indefinite"/>
-                      </p:stCondLst>
-                      <p:childTnLst>
-                        <p:par>
-                          <p:cTn id="4" fill="hold">
-                            <p:stCondLst>
-                              <p:cond delay="0"/>
-                            </p:stCondLst>
-                            <p:childTnLst>
-                              <p:par>
-                                <p:cTn id="5" presetID="1" presetClass="entr" presetSubtype="0" fill="hold" grpId="0" nodeType="clickEffect">
-                                  <p:stCondLst>
-                                    <p:cond delay="0"/>
-                                  </p:stCondLst>
-                                  <p:childTnLst>
-                                    <p:set>
-                                      <p:cBhvr>
-                                        <p:cTn id="6" dur="1" fill="hold">
-                                          <p:stCondLst>
-                                            <p:cond delay="0"/>
-                                          </p:stCondLst>
-                                        </p:cTn>
-                                        <p:tgtEl>
-                                          <p:spTgt spid="3">
-                                            <p:txEl>
-                                              <p:pRg st="0" end="0"/>
-                                            </p:txEl>
-                                          </p:spTgt>
-                                        </p:tgtEl>
-                                        <p:attrNameLst>
-                                          <p:attrName>style.visibility</p:attrName>
-                                        </p:attrNameLst>
-                                      </p:cBhvr>
-                                      <p:to>
-                                        <p:strVal val="visible"/>
-                                      </p:to>
-                                    </p:set>
-                                  </p:childTnLst>
-                                </p:cTn>
-                              </p:par>
-                            </p:childTnLst>
-                          </p:cTn>
-                        </p:par>
-                      </p:childTnLst>
-                    </p:cTn>
-                  </p:par>
-                  <p:par>
-                    <p:cTn id="7" fill="hold">
-                      <p:stCondLst>
-                        <p:cond delay="indefinite"/>
-                      </p:stCondLst>
-                      <p:childTnLst>
-                        <p:par>
-                          <p:cTn id="8" fill="hold">
-                            <p:stCondLst>
-                              <p:cond delay="0"/>
-                            </p:stCondLst>
-                            <p:childTnLst>
-                              <p:par>
-                                <p:cTn id="9" presetID="1" presetClass="entr" presetSubtype="0" fill="hold" grpId="0" nodeType="clickEffect">
-                                  <p:stCondLst>
-                                    <p:cond delay="0"/>
-                                  </p:stCondLst>
-                                  <p:childTnLst>
-                                    <p:set>
-                                      <p:cBhvr>
-                                        <p:cTn id="10" dur="1" fill="hold">
-                                          <p:stCondLst>
-                                            <p:cond delay="0"/>
-                                          </p:stCondLst>
-                                        </p:cTn>
-                                        <p:tgtEl>
-                                          <p:spTgt spid="3">
-                                            <p:txEl>
-                                              <p:pRg st="1" end="1"/>
-                                            </p:txEl>
-                                          </p:spTgt>
-                                        </p:tgtEl>
-                                        <p:attrNameLst>
-                                          <p:attrName>style.visibility</p:attrName>
-                                        </p:attrNameLst>
-                                      </p:cBhvr>
-                                      <p:to>
-                                        <p:strVal val="visible"/>
-                                      </p:to>
-                                    </p:set>
-                                  </p:childTnLst>
-                                </p:cTn>
-                              </p:par>
-                            </p:childTnLst>
-                          </p:cTn>
-                        </p:par>
-                      </p:childTnLst>
-                    </p:cTn>
-                  </p:par>
-                </p:childTnLst>
-              </p:cTn>
-              <p:prevCondLst>
-                <p:cond evt="onPrev" delay="0">
-                  <p:tgtEl>
-                    <p:sldTgt/>
-                  </p:tgtEl>
-                </p:cond>
-              </p:prevCondLst>
-              <p:nextCondLst>
-                <p:cond evt="onNext" delay="0">
-                  <p:tgtEl>
-                    <p:sldTgt/>
-                  </p:tgtEl>
-                </p:cond>
-              </p:nextCondLst>
-            </p:seq>
-          </p:childTnLst>
-        </p:cTn>
-      </p:par>
-    </p:tnLst>
-    <p:bldLst>
-      <p:bldP spid="3" grpId="0" build="p"/>
-    </p:bldLst>
-  </p:timing>
-</p:sld>
-</file>
-
-<file path=ppt/slides/slide9.xml><?xml version="1.0" encoding="utf-8"?>
-<p:sld xmlns:a="http://schemas.openxmlformats.org/drawingml/2006/main" xmlns:r="http://schemas.openxmlformats.org/officeDocument/2006/relationships" xmlns:p="http://schemas.openxmlformats.org/presentationml/2006/main">
-  <p:cSld>
-    <p:spTree>
-      <p:nvGrpSpPr>
-        <p:cNvPr id="1" name=""/>
-        <p:cNvGrpSpPr/>
-        <p:nvPr/>
-      </p:nvGrpSpPr>
-      <p:grpSpPr>
-        <a:xfrm>
-          <a:off x="0" y="0"/>
-          <a:ext cx="0" cy="0"/>
-          <a:chOff x="0" y="0"/>
-          <a:chExt cx="0" cy="0"/>
-        </a:xfrm>
-      </p:grpSpPr>
-      <p:sp>
-        <p:nvSpPr>
-          <p:cNvPr id="2" name="Title 1">
-            <a:extLst>
-              <a:ext uri="{FF2B5EF4-FFF2-40B4-BE49-F238E27FC236}">
-                <a16:creationId xmlns:a16="http://schemas.microsoft.com/office/drawing/2014/main" id="{C4D738FD-F0F1-224E-9315-83082A3FC3AA}"/>
-              </a:ext>
-            </a:extLst>
-          </p:cNvPr>
-          <p:cNvSpPr>
-            <a:spLocks noGrp="1"/>
-          </p:cNvSpPr>
-          <p:nvPr>
-            <p:ph type="title"/>
-          </p:nvPr>
-        </p:nvSpPr>
-        <p:spPr/>
-        <p:txBody>
-          <a:bodyPr>
-            <a:normAutofit fontScale="90000"/>
-          </a:bodyPr>
-          <a:lstStyle/>
-          <a:p>
-            <a:r>
-              <a:rPr lang="en-US" dirty="0">
-                <a:latin typeface="Calibri"/>
-                <a:ea typeface="Calibri"/>
-                <a:cs typeface="Calibri"/>
-                <a:sym typeface="Calibri"/>
-              </a:rPr>
-              <a:t>Do you really know how programming languages work?</a:t>
-            </a:r>
-            <a:endParaRPr lang="en-US" dirty="0"/>
-          </a:p>
-        </p:txBody>
-      </p:sp>
-      <p:sp>
-        <p:nvSpPr>
-          <p:cNvPr id="6" name="Slide Number Placeholder 5">
-            <a:extLst>
-              <a:ext uri="{FF2B5EF4-FFF2-40B4-BE49-F238E27FC236}">
-                <a16:creationId xmlns:a16="http://schemas.microsoft.com/office/drawing/2014/main" id="{DE0E230D-EBCA-6B4A-9603-BC403763CB08}"/>
-              </a:ext>
-            </a:extLst>
-          </p:cNvPr>
-          <p:cNvSpPr>
-            <a:spLocks noGrp="1"/>
-          </p:cNvSpPr>
-          <p:nvPr>
-            <p:ph type="sldNum" sz="quarter" idx="12"/>
-          </p:nvPr>
-        </p:nvSpPr>
-        <p:spPr>
-          <a:xfrm>
-            <a:off x="8472457" y="4663217"/>
-            <a:ext cx="548700" cy="393525"/>
-          </a:xfrm>
-          <a:prstGeom prst="rect">
-            <a:avLst/>
-          </a:prstGeom>
-        </p:spPr>
-        <p:txBody>
-          <a:bodyPr/>
-          <a:lstStyle/>
-          <a:p>
-            <a:fld id="{00000000-1234-1234-1234-123412341234}" type="slidenum">
-              <a:rPr lang="en-US" smtClean="0"/>
-              <a:pPr/>
-              <a:t>9</a:t>
-            </a:fld>
-            <a:endParaRPr lang="en-US"/>
-          </a:p>
-        </p:txBody>
-      </p:sp>
-      <p:sp>
-        <p:nvSpPr>
-          <p:cNvPr id="5" name="Shape 133">
-            <a:extLst>
-              <a:ext uri="{FF2B5EF4-FFF2-40B4-BE49-F238E27FC236}">
-                <a16:creationId xmlns:a16="http://schemas.microsoft.com/office/drawing/2014/main" id="{116A0DCA-3395-2C46-9622-CBB29B059604}"/>
-              </a:ext>
-            </a:extLst>
-          </p:cNvPr>
-          <p:cNvSpPr txBox="1"/>
-          <p:nvPr/>
-        </p:nvSpPr>
-        <p:spPr>
-          <a:xfrm>
-            <a:off x="553415" y="1659642"/>
-            <a:ext cx="8037170" cy="2361582"/>
-          </a:xfrm>
-          <a:prstGeom prst="rect">
-            <a:avLst/>
-          </a:prstGeom>
-          <a:noFill/>
-          <a:ln>
-            <a:noFill/>
-          </a:ln>
-        </p:spPr>
-        <p:txBody>
-          <a:bodyPr lIns="68569" tIns="34275" rIns="68569" bIns="34275" anchor="t" anchorCtr="0">
-            <a:noAutofit/>
-          </a:bodyPr>
-          <a:lstStyle/>
-          <a:p>
-            <a:r>
-              <a:rPr lang="en-US" sz="2400" dirty="0">
-                <a:solidFill>
-                  <a:srgbClr val="B00040"/>
-                </a:solidFill>
-                <a:latin typeface="Courier" pitchFamily="2" charset="0"/>
-              </a:rPr>
-              <a:t>void</a:t>
-            </a:r>
-            <a:r>
-              <a:rPr lang="en-US" sz="2400" dirty="0">
-                <a:solidFill>
-                  <a:prstClr val="black"/>
-                </a:solidFill>
-                <a:latin typeface="Courier" pitchFamily="2" charset="0"/>
-              </a:rPr>
-              <a:t> </a:t>
-            </a:r>
-            <a:r>
-              <a:rPr lang="en-US" sz="2400" dirty="0">
-                <a:solidFill>
-                  <a:srgbClr val="0000FF"/>
-                </a:solidFill>
-                <a:latin typeface="Courier" pitchFamily="2" charset="0"/>
-              </a:rPr>
-              <a:t>send</a:t>
-            </a:r>
-            <a:r>
-              <a:rPr lang="en-US" sz="2400" dirty="0">
-                <a:solidFill>
-                  <a:prstClr val="black"/>
-                </a:solidFill>
-                <a:latin typeface="Courier" pitchFamily="2" charset="0"/>
-              </a:rPr>
-              <a:t> (</a:t>
-            </a:r>
-            <a:r>
-              <a:rPr lang="en-US" sz="2400" dirty="0">
-                <a:solidFill>
-                  <a:srgbClr val="B00040"/>
-                </a:solidFill>
-                <a:latin typeface="Courier" pitchFamily="2" charset="0"/>
-              </a:rPr>
-              <a:t>char</a:t>
-            </a:r>
-            <a:r>
-              <a:rPr lang="en-US" sz="2400" dirty="0">
-                <a:solidFill>
-                  <a:prstClr val="black"/>
-                </a:solidFill>
-                <a:latin typeface="Courier" pitchFamily="2" charset="0"/>
-              </a:rPr>
-              <a:t> </a:t>
-            </a:r>
-            <a:r>
-              <a:rPr lang="en-US" sz="2400" dirty="0">
-                <a:solidFill>
-                  <a:srgbClr val="666666"/>
-                </a:solidFill>
-                <a:latin typeface="Courier" pitchFamily="2" charset="0"/>
-              </a:rPr>
-              <a:t>*</a:t>
-            </a:r>
-            <a:r>
-              <a:rPr lang="en-US" sz="2400" dirty="0">
-                <a:solidFill>
-                  <a:prstClr val="black"/>
-                </a:solidFill>
-                <a:latin typeface="Courier" pitchFamily="2" charset="0"/>
-              </a:rPr>
-              <a:t>to, </a:t>
-            </a:r>
-            <a:r>
-              <a:rPr lang="en-US" sz="2400" dirty="0">
-                <a:solidFill>
-                  <a:srgbClr val="B00040"/>
-                </a:solidFill>
-                <a:latin typeface="Courier" pitchFamily="2" charset="0"/>
-              </a:rPr>
-              <a:t>char</a:t>
-            </a:r>
-            <a:r>
-              <a:rPr lang="en-US" sz="2400" dirty="0">
-                <a:solidFill>
-                  <a:prstClr val="black"/>
-                </a:solidFill>
-                <a:latin typeface="Courier" pitchFamily="2" charset="0"/>
-              </a:rPr>
-              <a:t> </a:t>
-            </a:r>
-            <a:r>
-              <a:rPr lang="en-US" sz="2400" dirty="0">
-                <a:solidFill>
-                  <a:srgbClr val="666666"/>
-                </a:solidFill>
-                <a:latin typeface="Courier" pitchFamily="2" charset="0"/>
-              </a:rPr>
-              <a:t>*</a:t>
-            </a:r>
-            <a:r>
-              <a:rPr lang="en-US" sz="2400" dirty="0">
-                <a:solidFill>
-                  <a:prstClr val="black"/>
-                </a:solidFill>
-                <a:latin typeface="Courier" pitchFamily="2" charset="0"/>
-              </a:rPr>
-              <a:t>from, </a:t>
-            </a:r>
-            <a:r>
-              <a:rPr lang="en-US" sz="2400" dirty="0">
-                <a:solidFill>
-                  <a:srgbClr val="B00040"/>
-                </a:solidFill>
-                <a:latin typeface="Courier" pitchFamily="2" charset="0"/>
-              </a:rPr>
-              <a:t>int</a:t>
-            </a:r>
-            <a:r>
-              <a:rPr lang="en-US" sz="2400" dirty="0">
-                <a:solidFill>
-                  <a:prstClr val="black"/>
-                </a:solidFill>
-                <a:latin typeface="Courier" pitchFamily="2" charset="0"/>
-              </a:rPr>
-              <a:t> count)</a:t>
-            </a:r>
-          </a:p>
-          <a:p>
-            <a:r>
-              <a:rPr lang="en-US" sz="2400" dirty="0">
-                <a:solidFill>
-                  <a:prstClr val="black"/>
-                </a:solidFill>
-                <a:latin typeface="Courier" pitchFamily="2" charset="0"/>
-              </a:rPr>
-              <a:t>{  </a:t>
-            </a:r>
-          </a:p>
-          <a:p>
-            <a:r>
-              <a:rPr lang="en-US" sz="2400" b="1" dirty="0">
-                <a:solidFill>
-                  <a:prstClr val="black"/>
-                </a:solidFill>
-                <a:latin typeface="Courier" pitchFamily="2" charset="0"/>
-              </a:rPr>
-              <a:t>	</a:t>
-            </a:r>
-            <a:r>
-              <a:rPr lang="en-US" sz="2400" b="1" dirty="0">
-                <a:solidFill>
-                  <a:srgbClr val="008000"/>
-                </a:solidFill>
-                <a:latin typeface="Courier-Bold" pitchFamily="2" charset="0"/>
-              </a:rPr>
-              <a:t>while</a:t>
-            </a:r>
-            <a:r>
-              <a:rPr lang="en-US" sz="2400" dirty="0">
-                <a:solidFill>
-                  <a:prstClr val="black"/>
-                </a:solidFill>
-                <a:latin typeface="Courier" pitchFamily="2" charset="0"/>
-              </a:rPr>
-              <a:t> (count</a:t>
-            </a:r>
-            <a:r>
-              <a:rPr lang="en-US" sz="2400" dirty="0">
-                <a:solidFill>
-                  <a:srgbClr val="666666"/>
-                </a:solidFill>
-                <a:latin typeface="Courier" pitchFamily="2" charset="0"/>
-              </a:rPr>
-              <a:t>--</a:t>
-            </a:r>
-            <a:r>
-              <a:rPr lang="en-US" sz="2400" dirty="0">
-                <a:solidFill>
-                  <a:prstClr val="black"/>
-                </a:solidFill>
-                <a:latin typeface="Courier" pitchFamily="2" charset="0"/>
-              </a:rPr>
-              <a:t> </a:t>
-            </a:r>
-            <a:r>
-              <a:rPr lang="en-US" sz="2400" dirty="0">
-                <a:solidFill>
-                  <a:srgbClr val="666666"/>
-                </a:solidFill>
-                <a:latin typeface="Courier" pitchFamily="2" charset="0"/>
-              </a:rPr>
-              <a:t>&gt;</a:t>
-            </a:r>
-            <a:r>
-              <a:rPr lang="en-US" sz="2400" dirty="0">
-                <a:solidFill>
-                  <a:prstClr val="black"/>
-                </a:solidFill>
-                <a:latin typeface="Courier" pitchFamily="2" charset="0"/>
-              </a:rPr>
-              <a:t> </a:t>
-            </a:r>
-            <a:r>
-              <a:rPr lang="en-US" sz="2400" dirty="0">
-                <a:solidFill>
-                  <a:srgbClr val="666666"/>
-                </a:solidFill>
-                <a:latin typeface="Courier" pitchFamily="2" charset="0"/>
-              </a:rPr>
-              <a:t>0</a:t>
-            </a:r>
-            <a:r>
-              <a:rPr lang="en-US" sz="2400" dirty="0">
-                <a:solidFill>
-                  <a:prstClr val="black"/>
-                </a:solidFill>
-                <a:latin typeface="Courier" pitchFamily="2" charset="0"/>
-              </a:rPr>
-              <a:t>)</a:t>
-            </a:r>
-          </a:p>
-          <a:p>
-            <a:r>
-              <a:rPr lang="en-US" sz="2400" dirty="0">
-                <a:solidFill>
-                  <a:prstClr val="black"/>
-                </a:solidFill>
-                <a:latin typeface="Courier" pitchFamily="2" charset="0"/>
-              </a:rPr>
-              <a:t>		</a:t>
-            </a:r>
-            <a:r>
-              <a:rPr lang="en-US" sz="2400" dirty="0">
-                <a:solidFill>
-                  <a:srgbClr val="666666"/>
-                </a:solidFill>
-                <a:latin typeface="Courier" pitchFamily="2" charset="0"/>
-              </a:rPr>
-              <a:t>*</a:t>
-            </a:r>
-            <a:r>
-              <a:rPr lang="en-US" sz="2400" dirty="0">
-                <a:solidFill>
-                  <a:prstClr val="black"/>
-                </a:solidFill>
-                <a:latin typeface="Courier" pitchFamily="2" charset="0"/>
-              </a:rPr>
-              <a:t>to</a:t>
-            </a:r>
-            <a:r>
-              <a:rPr lang="en-US" sz="2400" dirty="0">
-                <a:solidFill>
-                  <a:srgbClr val="666666"/>
-                </a:solidFill>
-                <a:latin typeface="Courier" pitchFamily="2" charset="0"/>
-              </a:rPr>
-              <a:t>++</a:t>
-            </a:r>
-            <a:r>
-              <a:rPr lang="en-US" sz="2400" dirty="0">
-                <a:solidFill>
-                  <a:prstClr val="black"/>
-                </a:solidFill>
-                <a:latin typeface="Courier" pitchFamily="2" charset="0"/>
-              </a:rPr>
-              <a:t> </a:t>
-            </a:r>
-            <a:r>
-              <a:rPr lang="en-US" sz="2400" dirty="0">
-                <a:solidFill>
-                  <a:srgbClr val="666666"/>
-                </a:solidFill>
-                <a:latin typeface="Courier" pitchFamily="2" charset="0"/>
-              </a:rPr>
-              <a:t>=</a:t>
-            </a:r>
-            <a:r>
-              <a:rPr lang="en-US" sz="2400" dirty="0">
-                <a:solidFill>
-                  <a:prstClr val="black"/>
-                </a:solidFill>
-                <a:latin typeface="Courier" pitchFamily="2" charset="0"/>
-              </a:rPr>
-              <a:t> </a:t>
-            </a:r>
-            <a:r>
-              <a:rPr lang="en-US" sz="2400" dirty="0">
-                <a:solidFill>
-                  <a:srgbClr val="666666"/>
-                </a:solidFill>
-                <a:latin typeface="Courier" pitchFamily="2" charset="0"/>
-              </a:rPr>
-              <a:t>*</a:t>
-            </a:r>
-            <a:r>
-              <a:rPr lang="en-US" sz="2400" dirty="0">
-                <a:solidFill>
-                  <a:prstClr val="black"/>
-                </a:solidFill>
-                <a:latin typeface="Courier" pitchFamily="2" charset="0"/>
-              </a:rPr>
-              <a:t>from</a:t>
-            </a:r>
-            <a:r>
-              <a:rPr lang="en-US" sz="2400" dirty="0">
-                <a:solidFill>
-                  <a:srgbClr val="666666"/>
-                </a:solidFill>
-                <a:latin typeface="Courier" pitchFamily="2" charset="0"/>
-              </a:rPr>
-              <a:t>++</a:t>
-            </a:r>
-            <a:r>
-              <a:rPr lang="en-US" sz="2400" dirty="0">
-                <a:solidFill>
-                  <a:prstClr val="black"/>
-                </a:solidFill>
-                <a:latin typeface="Courier" pitchFamily="2" charset="0"/>
-              </a:rPr>
-              <a:t>;</a:t>
-            </a:r>
-          </a:p>
-          <a:p>
-            <a:r>
-              <a:rPr lang="en-US" sz="2400" dirty="0">
-                <a:solidFill>
-                  <a:prstClr val="black"/>
-                </a:solidFill>
-                <a:latin typeface="Courier" pitchFamily="2" charset="0"/>
-              </a:rPr>
-              <a:t>}</a:t>
-            </a:r>
-            <a:endParaRPr lang="en-CA" sz="2400" dirty="0"/>
-          </a:p>
-        </p:txBody>
-      </p:sp>
-    </p:spTree>
-    <p:extLst>
-      <p:ext uri="{BB962C8B-B14F-4D97-AF65-F5344CB8AC3E}">
-        <p14:creationId xmlns:p14="http://schemas.microsoft.com/office/powerpoint/2010/main" val="2554529176"/>
-      </p:ext>
-    </p:extLst>
-  </p:cSld>
-  <p:clrMapOvr>
-    <a:masterClrMapping/>
-  </p:clrMapOvr>
 </p:sld>
 </file>
 
